--- a/public/slides/aa203/lecture_1.pptx
+++ b/public/slides/aa203/lecture_1.pptx
@@ -206,134 +206,112 @@
     <p:ext uri="{EFAFB233-063F-42B5-8137-9DF3F51BA10A}">
       <p15:sldGuideLst xmlns:p15="http://schemas.microsoft.com/office/powerpoint/2012/main"/>
     </p:ext>
+    <p:ext uri="{2D200454-40CA-4A62-9FC3-DE9A4176ACB9}">
+      <p15:notesGuideLst xmlns:p15="http://schemas.microsoft.com/office/powerpoint/2012/main"/>
+    </p:ext>
   </p:extLst>
 </p:presentation>
-</file>
-
-<file path=ppt/revisionInfo.xml><?xml version="1.0" encoding="utf-8"?>
-<p1510:revInfo xmlns:a="http://schemas.openxmlformats.org/drawingml/2006/main" xmlns:r="http://schemas.openxmlformats.org/officeDocument/2006/relationships" xmlns:p1510="http://schemas.microsoft.com/office/powerpoint/2015/10/main">
-  <p1510:revLst>
-    <p1510:client id="{CAB2CA14-7611-4E93-AE6E-D1BCF5C722B0}" v="2" dt="2022-04-18T07:10:50.369"/>
-  </p1510:revLst>
-</p1510:revInfo>
 </file>
 
 <file path=ppt/changesInfos/changesInfo1.xml><?xml version="1.0" encoding="utf-8"?>
 <pc:chgInfo xmlns:a="http://schemas.openxmlformats.org/drawingml/2006/main" xmlns:r="http://schemas.openxmlformats.org/officeDocument/2006/relationships" xmlns:ac="http://schemas.microsoft.com/office/drawing/2013/main/command" xmlns:pc="http://schemas.microsoft.com/office/powerpoint/2013/main/command">
   <pc:docChgLst>
-    <pc:chgData name="Edward Fu Schmerling" userId="S::schmrlng@stanford.edu::c8b75dde-c097-4599-bb13-81e931e3f9a3" providerId="AD" clId="Web-{576BD80B-06A1-49C6-88C5-09CEC335E284}"/>
-    <pc:docChg chg="modSld sldOrd">
-      <pc:chgData name="Edward Fu Schmerling" userId="S::schmrlng@stanford.edu::c8b75dde-c097-4599-bb13-81e931e3f9a3" providerId="AD" clId="Web-{576BD80B-06A1-49C6-88C5-09CEC335E284}" dt="2021-03-29T18:55:06.448" v="79"/>
+    <pc:chgData name="Daniele Gammelli" userId="292b8a31-f1ba-4b4c-b196-a231dc095d13" providerId="ADAL" clId="{6E670754-AB6A-5789-AA0A-6F6FD9CE3EEA}"/>
+    <pc:docChg chg="modSld">
+      <pc:chgData name="Daniele Gammelli" userId="292b8a31-f1ba-4b4c-b196-a231dc095d13" providerId="ADAL" clId="{6E670754-AB6A-5789-AA0A-6F6FD9CE3EEA}" dt="2026-08-13T16:36:12.445" v="12" actId="20577"/>
       <pc:docMkLst>
         <pc:docMk/>
       </pc:docMkLst>
-      <pc:sldChg chg="modSp">
-        <pc:chgData name="Edward Fu Schmerling" userId="S::schmrlng@stanford.edu::c8b75dde-c097-4599-bb13-81e931e3f9a3" providerId="AD" clId="Web-{576BD80B-06A1-49C6-88C5-09CEC335E284}" dt="2021-03-29T18:32:03.883" v="8" actId="20577"/>
+      <pc:sldChg chg="modNotesTx">
+        <pc:chgData name="Daniele Gammelli" userId="292b8a31-f1ba-4b4c-b196-a231dc095d13" providerId="ADAL" clId="{6E670754-AB6A-5789-AA0A-6F6FD9CE3EEA}" dt="2026-08-13T16:34:52.147" v="0" actId="20577"/>
         <pc:sldMkLst>
           <pc:docMk/>
-          <pc:sldMk cId="4210620432" sldId="321"/>
+          <pc:sldMk cId="3435970795" sldId="326"/>
         </pc:sldMkLst>
-        <pc:spChg chg="mod">
-          <ac:chgData name="Edward Fu Schmerling" userId="S::schmrlng@stanford.edu::c8b75dde-c097-4599-bb13-81e931e3f9a3" providerId="AD" clId="Web-{576BD80B-06A1-49C6-88C5-09CEC335E284}" dt="2021-03-29T18:32:03.883" v="8" actId="20577"/>
-          <ac:spMkLst>
-            <pc:docMk/>
-            <pc:sldMk cId="4210620432" sldId="321"/>
-            <ac:spMk id="3" creationId="{AF9DE24D-49A0-074C-9776-4374E5628535}"/>
-          </ac:spMkLst>
-        </pc:spChg>
       </pc:sldChg>
-      <pc:sldChg chg="modSp">
-        <pc:chgData name="Edward Fu Schmerling" userId="S::schmrlng@stanford.edu::c8b75dde-c097-4599-bb13-81e931e3f9a3" providerId="AD" clId="Web-{576BD80B-06A1-49C6-88C5-09CEC335E284}" dt="2021-03-29T18:33:38.557" v="50" actId="20577"/>
+      <pc:sldChg chg="modNotesTx">
+        <pc:chgData name="Daniele Gammelli" userId="292b8a31-f1ba-4b4c-b196-a231dc095d13" providerId="ADAL" clId="{6E670754-AB6A-5789-AA0A-6F6FD9CE3EEA}" dt="2026-08-13T16:34:55.316" v="1" actId="20577"/>
         <pc:sldMkLst>
           <pc:docMk/>
-          <pc:sldMk cId="3998428560" sldId="322"/>
+          <pc:sldMk cId="2564725588" sldId="327"/>
         </pc:sldMkLst>
-        <pc:spChg chg="mod">
-          <ac:chgData name="Edward Fu Schmerling" userId="S::schmrlng@stanford.edu::c8b75dde-c097-4599-bb13-81e931e3f9a3" providerId="AD" clId="Web-{576BD80B-06A1-49C6-88C5-09CEC335E284}" dt="2021-03-29T18:33:38.557" v="50" actId="20577"/>
-          <ac:spMkLst>
-            <pc:docMk/>
-            <pc:sldMk cId="3998428560" sldId="322"/>
-            <ac:spMk id="3" creationId="{6CA39913-93B3-7249-A8FD-AAFA5D8DEDD8}"/>
-          </ac:spMkLst>
-        </pc:spChg>
       </pc:sldChg>
-      <pc:sldChg chg="ord">
-        <pc:chgData name="Edward Fu Schmerling" userId="S::schmrlng@stanford.edu::c8b75dde-c097-4599-bb13-81e931e3f9a3" providerId="AD" clId="Web-{576BD80B-06A1-49C6-88C5-09CEC335E284}" dt="2021-03-29T18:55:06.448" v="79"/>
+      <pc:sldChg chg="modNotesTx">
+        <pc:chgData name="Daniele Gammelli" userId="292b8a31-f1ba-4b4c-b196-a231dc095d13" providerId="ADAL" clId="{6E670754-AB6A-5789-AA0A-6F6FD9CE3EEA}" dt="2026-08-13T16:35:16.854" v="6" actId="20577"/>
         <pc:sldMkLst>
           <pc:docMk/>
-          <pc:sldMk cId="1572909638" sldId="330"/>
+          <pc:sldMk cId="4049043622" sldId="328"/>
         </pc:sldMkLst>
       </pc:sldChg>
-      <pc:sldChg chg="modSp">
-        <pc:chgData name="Edward Fu Schmerling" userId="S::schmrlng@stanford.edu::c8b75dde-c097-4599-bb13-81e931e3f9a3" providerId="AD" clId="Web-{576BD80B-06A1-49C6-88C5-09CEC335E284}" dt="2021-03-29T18:54:49.025" v="78" actId="20577"/>
+      <pc:sldChg chg="modNotesTx">
+        <pc:chgData name="Daniele Gammelli" userId="292b8a31-f1ba-4b4c-b196-a231dc095d13" providerId="ADAL" clId="{6E670754-AB6A-5789-AA0A-6F6FD9CE3EEA}" dt="2026-08-13T16:35:29.140" v="7" actId="20577"/>
+        <pc:sldMkLst>
+          <pc:docMk/>
+          <pc:sldMk cId="3550627275" sldId="337"/>
+        </pc:sldMkLst>
+      </pc:sldChg>
+      <pc:sldChg chg="modNotesTx">
+        <pc:chgData name="Daniele Gammelli" userId="292b8a31-f1ba-4b4c-b196-a231dc095d13" providerId="ADAL" clId="{6E670754-AB6A-5789-AA0A-6F6FD9CE3EEA}" dt="2026-08-13T16:35:32.271" v="8" actId="20577"/>
+        <pc:sldMkLst>
+          <pc:docMk/>
+          <pc:sldMk cId="683792164" sldId="338"/>
+        </pc:sldMkLst>
+      </pc:sldChg>
+      <pc:sldChg chg="modNotesTx">
+        <pc:chgData name="Daniele Gammelli" userId="292b8a31-f1ba-4b4c-b196-a231dc095d13" providerId="ADAL" clId="{6E670754-AB6A-5789-AA0A-6F6FD9CE3EEA}" dt="2026-08-13T16:36:00.335" v="9" actId="20577"/>
+        <pc:sldMkLst>
+          <pc:docMk/>
+          <pc:sldMk cId="658440458" sldId="339"/>
+        </pc:sldMkLst>
+      </pc:sldChg>
+      <pc:sldChg chg="modNotesTx">
+        <pc:chgData name="Daniele Gammelli" userId="292b8a31-f1ba-4b4c-b196-a231dc095d13" providerId="ADAL" clId="{6E670754-AB6A-5789-AA0A-6F6FD9CE3EEA}" dt="2026-08-13T16:36:04.539" v="10" actId="20577"/>
+        <pc:sldMkLst>
+          <pc:docMk/>
+          <pc:sldMk cId="969665993" sldId="340"/>
+        </pc:sldMkLst>
+      </pc:sldChg>
+      <pc:sldChg chg="modNotesTx">
+        <pc:chgData name="Daniele Gammelli" userId="292b8a31-f1ba-4b4c-b196-a231dc095d13" providerId="ADAL" clId="{6E670754-AB6A-5789-AA0A-6F6FD9CE3EEA}" dt="2026-08-13T16:36:06.834" v="11" actId="20577"/>
+        <pc:sldMkLst>
+          <pc:docMk/>
+          <pc:sldMk cId="1306372386" sldId="341"/>
+        </pc:sldMkLst>
+      </pc:sldChg>
+      <pc:sldChg chg="modNotesTx">
+        <pc:chgData name="Daniele Gammelli" userId="292b8a31-f1ba-4b4c-b196-a231dc095d13" providerId="ADAL" clId="{6E670754-AB6A-5789-AA0A-6F6FD9CE3EEA}" dt="2026-08-13T16:36:12.445" v="12" actId="20577"/>
+        <pc:sldMkLst>
+          <pc:docMk/>
+          <pc:sldMk cId="50721351" sldId="355"/>
+        </pc:sldMkLst>
+      </pc:sldChg>
+      <pc:sldChg chg="modNotesTx">
+        <pc:chgData name="Daniele Gammelli" userId="292b8a31-f1ba-4b4c-b196-a231dc095d13" providerId="ADAL" clId="{6E670754-AB6A-5789-AA0A-6F6FD9CE3EEA}" dt="2026-08-13T16:35:03.142" v="2" actId="20577"/>
         <pc:sldMkLst>
           <pc:docMk/>
           <pc:sldMk cId="2960085092" sldId="395"/>
         </pc:sldMkLst>
-        <pc:spChg chg="mod">
-          <ac:chgData name="Edward Fu Schmerling" userId="S::schmrlng@stanford.edu::c8b75dde-c097-4599-bb13-81e931e3f9a3" providerId="AD" clId="Web-{576BD80B-06A1-49C6-88C5-09CEC335E284}" dt="2021-03-29T18:54:49.025" v="78" actId="20577"/>
-          <ac:spMkLst>
-            <pc:docMk/>
-            <pc:sldMk cId="2960085092" sldId="395"/>
-            <ac:spMk id="7" creationId="{6B672181-C8F0-A54D-821E-94076DD0E7D2}"/>
-          </ac:spMkLst>
-        </pc:spChg>
       </pc:sldChg>
-    </pc:docChg>
-  </pc:docChgLst>
-  <pc:docChgLst>
-    <pc:chgData name="Edward Fu Schmerling" userId="S::schmrlng@stanford.edu::c8b75dde-c097-4599-bb13-81e931e3f9a3" providerId="AD" clId="Web-{8A6EEC5F-4330-3884-0536-F41B1766EBA2}"/>
-    <pc:docChg chg="addSld modSection">
-      <pc:chgData name="Edward Fu Schmerling" userId="S::schmrlng@stanford.edu::c8b75dde-c097-4599-bb13-81e931e3f9a3" providerId="AD" clId="Web-{8A6EEC5F-4330-3884-0536-F41B1766EBA2}" dt="2021-03-29T19:05:46.829" v="0"/>
-      <pc:docMkLst>
-        <pc:docMk/>
-      </pc:docMkLst>
-      <pc:sldChg chg="add replId">
-        <pc:chgData name="Edward Fu Schmerling" userId="S::schmrlng@stanford.edu::c8b75dde-c097-4599-bb13-81e931e3f9a3" providerId="AD" clId="Web-{8A6EEC5F-4330-3884-0536-F41B1766EBA2}" dt="2021-03-29T19:05:46.829" v="0"/>
+      <pc:sldChg chg="modNotesTx">
+        <pc:chgData name="Daniele Gammelli" userId="292b8a31-f1ba-4b4c-b196-a231dc095d13" providerId="ADAL" clId="{6E670754-AB6A-5789-AA0A-6F6FD9CE3EEA}" dt="2026-08-13T16:35:11.187" v="4" actId="20577"/>
         <pc:sldMkLst>
           <pc:docMk/>
-          <pc:sldMk cId="1635127468" sldId="397"/>
+          <pc:sldMk cId="2629286650" sldId="399"/>
         </pc:sldMkLst>
       </pc:sldChg>
-    </pc:docChg>
-  </pc:docChgLst>
-  <pc:docChgLst>
-    <pc:chgData name="Edward Fu Schmerling" userId="S::schmrlng@stanford.edu::c8b75dde-c097-4599-bb13-81e931e3f9a3" providerId="AD" clId="Web-{C563B99F-C0DD-0000-B18F-F1CD37FFFCC8}"/>
-    <pc:docChg chg="addSld modSld sldOrd modSection">
-      <pc:chgData name="Edward Fu Schmerling" userId="S::schmrlng@stanford.edu::c8b75dde-c097-4599-bb13-81e931e3f9a3" providerId="AD" clId="Web-{C563B99F-C0DD-0000-B18F-F1CD37FFFCC8}" dt="2021-03-30T16:59:23.013" v="69" actId="20577"/>
-      <pc:docMkLst>
-        <pc:docMk/>
-      </pc:docMkLst>
-      <pc:sldChg chg="addSp delSp modSp add ord replId">
-        <pc:chgData name="Edward Fu Schmerling" userId="S::schmrlng@stanford.edu::c8b75dde-c097-4599-bb13-81e931e3f9a3" providerId="AD" clId="Web-{C563B99F-C0DD-0000-B18F-F1CD37FFFCC8}" dt="2021-03-30T16:59:23.013" v="69" actId="20577"/>
+      <pc:sldChg chg="modNotesTx">
+        <pc:chgData name="Daniele Gammelli" userId="292b8a31-f1ba-4b4c-b196-a231dc095d13" providerId="ADAL" clId="{6E670754-AB6A-5789-AA0A-6F6FD9CE3EEA}" dt="2026-08-13T16:35:06.671" v="3" actId="20577"/>
         <pc:sldMkLst>
           <pc:docMk/>
-          <pc:sldMk cId="795216500" sldId="412"/>
+          <pc:sldMk cId="2209826619" sldId="415"/>
         </pc:sldMkLst>
-        <pc:spChg chg="mod">
-          <ac:chgData name="Edward Fu Schmerling" userId="S::schmrlng@stanford.edu::c8b75dde-c097-4599-bb13-81e931e3f9a3" providerId="AD" clId="Web-{C563B99F-C0DD-0000-B18F-F1CD37FFFCC8}" dt="2021-03-30T16:57:35.772" v="20" actId="20577"/>
-          <ac:spMkLst>
-            <pc:docMk/>
-            <pc:sldMk cId="795216500" sldId="412"/>
-            <ac:spMk id="2" creationId="{62BB3B4C-86BF-F849-9347-D8CF840BAD2A}"/>
-          </ac:spMkLst>
-        </pc:spChg>
-        <pc:spChg chg="del">
-          <ac:chgData name="Edward Fu Schmerling" userId="S::schmrlng@stanford.edu::c8b75dde-c097-4599-bb13-81e931e3f9a3" providerId="AD" clId="Web-{C563B99F-C0DD-0000-B18F-F1CD37FFFCC8}" dt="2021-03-30T16:57:48.742" v="21"/>
-          <ac:spMkLst>
-            <pc:docMk/>
-            <pc:sldMk cId="795216500" sldId="412"/>
-            <ac:spMk id="3" creationId="{A7581F14-6FAD-A946-97F0-58C682D809EF}"/>
-          </ac:spMkLst>
-        </pc:spChg>
-        <pc:spChg chg="add mod">
-          <ac:chgData name="Edward Fu Schmerling" userId="S::schmrlng@stanford.edu::c8b75dde-c097-4599-bb13-81e931e3f9a3" providerId="AD" clId="Web-{C563B99F-C0DD-0000-B18F-F1CD37FFFCC8}" dt="2021-03-30T16:59:23.013" v="69" actId="20577"/>
-          <ac:spMkLst>
-            <pc:docMk/>
-            <pc:sldMk cId="795216500" sldId="412"/>
-            <ac:spMk id="8" creationId="{1B49B0DA-9FD0-47EC-9C9C-FF87D03B12B9}"/>
-          </ac:spMkLst>
-        </pc:spChg>
+      </pc:sldChg>
+      <pc:sldChg chg="modNotesTx">
+        <pc:chgData name="Daniele Gammelli" userId="292b8a31-f1ba-4b4c-b196-a231dc095d13" providerId="ADAL" clId="{6E670754-AB6A-5789-AA0A-6F6FD9CE3EEA}" dt="2026-08-13T16:35:13.356" v="5" actId="20577"/>
+        <pc:sldMkLst>
+          <pc:docMk/>
+          <pc:sldMk cId="3331100513" sldId="416"/>
+        </pc:sldMkLst>
       </pc:sldChg>
     </pc:docChg>
   </pc:docChgLst>
@@ -422,7 +400,7 @@
           <a:p>
             <a:fld id="{EBD6F028-2067-3740-AA48-A91E93570B1D}" type="datetimeFigureOut">
               <a:rPr lang="en-US" smtClean="0"/>
-              <a:t>3/28/26</a:t>
+              <a:t>8/13/26</a:t>
             </a:fld>
             <a:endParaRPr lang="en-US"/>
           </a:p>
@@ -817,938 +795,6 @@
           <a:bodyPr/>
           <a:lstStyle/>
           <a:p>
-            <a:pPr marL="0" marR="0" lvl="0" indent="0" algn="l" defTabSz="914400" rtl="0" eaLnBrk="1" fontAlgn="auto" latinLnBrk="0" hangingPunct="1">
-              <a:lnSpc>
-                <a:spcPct val="100000"/>
-              </a:lnSpc>
-              <a:spcBef>
-                <a:spcPts val="0"/>
-              </a:spcBef>
-              <a:spcAft>
-                <a:spcPts val="0"/>
-              </a:spcAft>
-              <a:buClrTx/>
-              <a:buSzTx/>
-              <a:buFontTx/>
-              <a:buNone/>
-              <a:tabLst/>
-              <a:defRPr/>
-            </a:pPr>
-            <a:r>
-              <a:rPr lang="en-US" sz="1200" kern="1200" dirty="0">
-                <a:solidFill>
-                  <a:schemeClr val="tx1"/>
-                </a:solidFill>
-                <a:effectLst/>
-                <a:latin typeface="+mn-lt"/>
-                <a:ea typeface="+mn-ea"/>
-                <a:cs typeface="+mn-cs"/>
-              </a:rPr>
-              <a:t>\</a:t>
-            </a:r>
-            <a:r>
-              <a:rPr lang="en-US" sz="1200" kern="1200" dirty="0" err="1">
-                <a:solidFill>
-                  <a:schemeClr val="tx1"/>
-                </a:solidFill>
-                <a:effectLst/>
-                <a:latin typeface="+mn-lt"/>
-                <a:ea typeface="+mn-ea"/>
-                <a:cs typeface="+mn-cs"/>
-              </a:rPr>
-              <a:t>ddot</a:t>
-            </a:r>
-            <a:r>
-              <a:rPr lang="en-US" sz="1200" kern="1200" dirty="0">
-                <a:solidFill>
-                  <a:schemeClr val="tx1"/>
-                </a:solidFill>
-                <a:effectLst/>
-                <a:latin typeface="+mn-lt"/>
-                <a:ea typeface="+mn-ea"/>
-                <a:cs typeface="+mn-cs"/>
-              </a:rPr>
-              <a:t> s = a</a:t>
-            </a:r>
-          </a:p>
-          <a:p>
-            <a:pPr marL="0" marR="0" lvl="0" indent="0" algn="l" defTabSz="914400" rtl="0" eaLnBrk="1" fontAlgn="auto" latinLnBrk="0" hangingPunct="1">
-              <a:lnSpc>
-                <a:spcPct val="100000"/>
-              </a:lnSpc>
-              <a:spcBef>
-                <a:spcPts val="0"/>
-              </a:spcBef>
-              <a:spcAft>
-                <a:spcPts val="0"/>
-              </a:spcAft>
-              <a:buClrTx/>
-              <a:buSzTx/>
-              <a:buFontTx/>
-              <a:buNone/>
-              <a:tabLst/>
-              <a:defRPr/>
-            </a:pPr>
-            <a:endParaRPr lang="en-US" sz="1200" kern="1200" dirty="0">
-              <a:solidFill>
-                <a:schemeClr val="tx1"/>
-              </a:solidFill>
-              <a:effectLst/>
-              <a:latin typeface="+mn-lt"/>
-              <a:ea typeface="+mn-ea"/>
-              <a:cs typeface="+mn-cs"/>
-            </a:endParaRPr>
-          </a:p>
-          <a:p>
-            <a:pPr marL="0" marR="0" lvl="0" indent="0" algn="l" defTabSz="914400" rtl="0" eaLnBrk="1" fontAlgn="auto" latinLnBrk="0" hangingPunct="1">
-              <a:lnSpc>
-                <a:spcPct val="100000"/>
-              </a:lnSpc>
-              <a:spcBef>
-                <a:spcPts val="0"/>
-              </a:spcBef>
-              <a:spcAft>
-                <a:spcPts val="0"/>
-              </a:spcAft>
-              <a:buClrTx/>
-              <a:buSzTx/>
-              <a:buFontTx/>
-              <a:buNone/>
-              <a:tabLst/>
-              <a:defRPr/>
-            </a:pPr>
-            <a:r>
-              <a:rPr lang="en-US" sz="1200" kern="1200" dirty="0">
-                <a:solidFill>
-                  <a:schemeClr val="tx1"/>
-                </a:solidFill>
-                <a:effectLst/>
-                <a:latin typeface="+mn-lt"/>
-                <a:ea typeface="+mn-ea"/>
-                <a:cs typeface="+mn-cs"/>
-              </a:rPr>
-              <a:t>\begin{</a:t>
-            </a:r>
-            <a:r>
-              <a:rPr lang="en-US" sz="1200" kern="1200" dirty="0" err="1">
-                <a:solidFill>
-                  <a:schemeClr val="tx1"/>
-                </a:solidFill>
-                <a:effectLst/>
-                <a:latin typeface="+mn-lt"/>
-                <a:ea typeface="+mn-ea"/>
-                <a:cs typeface="+mn-cs"/>
-              </a:rPr>
-              <a:t>bmatrix</a:t>
-            </a:r>
-            <a:r>
-              <a:rPr lang="en-US" sz="1200" kern="1200" dirty="0">
-                <a:solidFill>
-                  <a:schemeClr val="tx1"/>
-                </a:solidFill>
-                <a:effectLst/>
-                <a:latin typeface="+mn-lt"/>
-                <a:ea typeface="+mn-ea"/>
-                <a:cs typeface="+mn-cs"/>
-              </a:rPr>
-              <a:t>} \dot s \\ \dot v\end{</a:t>
-            </a:r>
-            <a:r>
-              <a:rPr lang="en-US" sz="1200" kern="1200" dirty="0" err="1">
-                <a:solidFill>
-                  <a:schemeClr val="tx1"/>
-                </a:solidFill>
-                <a:effectLst/>
-                <a:latin typeface="+mn-lt"/>
-                <a:ea typeface="+mn-ea"/>
-                <a:cs typeface="+mn-cs"/>
-              </a:rPr>
-              <a:t>bmatrix</a:t>
-            </a:r>
-            <a:r>
-              <a:rPr lang="en-US" sz="1200" kern="1200" dirty="0">
-                <a:solidFill>
-                  <a:schemeClr val="tx1"/>
-                </a:solidFill>
-                <a:effectLst/>
-                <a:latin typeface="+mn-lt"/>
-                <a:ea typeface="+mn-ea"/>
-                <a:cs typeface="+mn-cs"/>
-              </a:rPr>
-              <a:t>} = \begin{</a:t>
-            </a:r>
-            <a:r>
-              <a:rPr lang="en-US" sz="1200" kern="1200" dirty="0" err="1">
-                <a:solidFill>
-                  <a:schemeClr val="tx1"/>
-                </a:solidFill>
-                <a:effectLst/>
-                <a:latin typeface="+mn-lt"/>
-                <a:ea typeface="+mn-ea"/>
-                <a:cs typeface="+mn-cs"/>
-              </a:rPr>
-              <a:t>bmatrix</a:t>
-            </a:r>
-            <a:r>
-              <a:rPr lang="en-US" sz="1200" kern="1200" dirty="0">
-                <a:solidFill>
-                  <a:schemeClr val="tx1"/>
-                </a:solidFill>
-                <a:effectLst/>
-                <a:latin typeface="+mn-lt"/>
-                <a:ea typeface="+mn-ea"/>
-                <a:cs typeface="+mn-cs"/>
-              </a:rPr>
-              <a:t>} 0 &amp; 1 \\ 0 &amp; 0\end{</a:t>
-            </a:r>
-            <a:r>
-              <a:rPr lang="en-US" sz="1200" kern="1200" dirty="0" err="1">
-                <a:solidFill>
-                  <a:schemeClr val="tx1"/>
-                </a:solidFill>
-                <a:effectLst/>
-                <a:latin typeface="+mn-lt"/>
-                <a:ea typeface="+mn-ea"/>
-                <a:cs typeface="+mn-cs"/>
-              </a:rPr>
-              <a:t>bmatrix</a:t>
-            </a:r>
-            <a:r>
-              <a:rPr lang="en-US" sz="1200" kern="1200" dirty="0">
-                <a:solidFill>
-                  <a:schemeClr val="tx1"/>
-                </a:solidFill>
-                <a:effectLst/>
-                <a:latin typeface="+mn-lt"/>
-                <a:ea typeface="+mn-ea"/>
-                <a:cs typeface="+mn-cs"/>
-              </a:rPr>
-              <a:t>} \begin{</a:t>
-            </a:r>
-            <a:r>
-              <a:rPr lang="en-US" sz="1200" kern="1200" dirty="0" err="1">
-                <a:solidFill>
-                  <a:schemeClr val="tx1"/>
-                </a:solidFill>
-                <a:effectLst/>
-                <a:latin typeface="+mn-lt"/>
-                <a:ea typeface="+mn-ea"/>
-                <a:cs typeface="+mn-cs"/>
-              </a:rPr>
-              <a:t>bmatrix</a:t>
-            </a:r>
-            <a:r>
-              <a:rPr lang="en-US" sz="1200" kern="1200" dirty="0">
-                <a:solidFill>
-                  <a:schemeClr val="tx1"/>
-                </a:solidFill>
-                <a:effectLst/>
-                <a:latin typeface="+mn-lt"/>
-                <a:ea typeface="+mn-ea"/>
-                <a:cs typeface="+mn-cs"/>
-              </a:rPr>
-              <a:t>} s \\ v\end{</a:t>
-            </a:r>
-            <a:r>
-              <a:rPr lang="en-US" sz="1200" kern="1200" dirty="0" err="1">
-                <a:solidFill>
-                  <a:schemeClr val="tx1"/>
-                </a:solidFill>
-                <a:effectLst/>
-                <a:latin typeface="+mn-lt"/>
-                <a:ea typeface="+mn-ea"/>
-                <a:cs typeface="+mn-cs"/>
-              </a:rPr>
-              <a:t>bmatrix</a:t>
-            </a:r>
-            <a:r>
-              <a:rPr lang="en-US" sz="1200" kern="1200" dirty="0">
-                <a:solidFill>
-                  <a:schemeClr val="tx1"/>
-                </a:solidFill>
-                <a:effectLst/>
-                <a:latin typeface="+mn-lt"/>
-                <a:ea typeface="+mn-ea"/>
-                <a:cs typeface="+mn-cs"/>
-              </a:rPr>
-              <a:t>} + \begin{</a:t>
-            </a:r>
-            <a:r>
-              <a:rPr lang="en-US" sz="1200" kern="1200" dirty="0" err="1">
-                <a:solidFill>
-                  <a:schemeClr val="tx1"/>
-                </a:solidFill>
-                <a:effectLst/>
-                <a:latin typeface="+mn-lt"/>
-                <a:ea typeface="+mn-ea"/>
-                <a:cs typeface="+mn-cs"/>
-              </a:rPr>
-              <a:t>bmatrix</a:t>
-            </a:r>
-            <a:r>
-              <a:rPr lang="en-US" sz="1200" kern="1200" dirty="0">
-                <a:solidFill>
-                  <a:schemeClr val="tx1"/>
-                </a:solidFill>
-                <a:effectLst/>
-                <a:latin typeface="+mn-lt"/>
-                <a:ea typeface="+mn-ea"/>
-                <a:cs typeface="+mn-cs"/>
-              </a:rPr>
-              <a:t>} 0 \\ 1\end{</a:t>
-            </a:r>
-            <a:r>
-              <a:rPr lang="en-US" sz="1200" kern="1200" dirty="0" err="1">
-                <a:solidFill>
-                  <a:schemeClr val="tx1"/>
-                </a:solidFill>
-                <a:effectLst/>
-                <a:latin typeface="+mn-lt"/>
-                <a:ea typeface="+mn-ea"/>
-                <a:cs typeface="+mn-cs"/>
-              </a:rPr>
-              <a:t>bmatrix</a:t>
-            </a:r>
-            <a:r>
-              <a:rPr lang="en-US" sz="1200" kern="1200" dirty="0">
-                <a:solidFill>
-                  <a:schemeClr val="tx1"/>
-                </a:solidFill>
-                <a:effectLst/>
-                <a:latin typeface="+mn-lt"/>
-                <a:ea typeface="+mn-ea"/>
-                <a:cs typeface="+mn-cs"/>
-              </a:rPr>
-              <a:t>} \begin{</a:t>
-            </a:r>
-            <a:r>
-              <a:rPr lang="en-US" sz="1200" kern="1200" dirty="0" err="1">
-                <a:solidFill>
-                  <a:schemeClr val="tx1"/>
-                </a:solidFill>
-                <a:effectLst/>
-                <a:latin typeface="+mn-lt"/>
-                <a:ea typeface="+mn-ea"/>
-                <a:cs typeface="+mn-cs"/>
-              </a:rPr>
-              <a:t>bmatrix</a:t>
-            </a:r>
-            <a:r>
-              <a:rPr lang="en-US" sz="1200" kern="1200" dirty="0">
-                <a:solidFill>
-                  <a:schemeClr val="tx1"/>
-                </a:solidFill>
-                <a:effectLst/>
-                <a:latin typeface="+mn-lt"/>
-                <a:ea typeface="+mn-ea"/>
-                <a:cs typeface="+mn-cs"/>
-              </a:rPr>
-              <a:t>} a \end{</a:t>
-            </a:r>
-            <a:r>
-              <a:rPr lang="en-US" sz="1200" kern="1200" dirty="0" err="1">
-                <a:solidFill>
-                  <a:schemeClr val="tx1"/>
-                </a:solidFill>
-                <a:effectLst/>
-                <a:latin typeface="+mn-lt"/>
-                <a:ea typeface="+mn-ea"/>
-                <a:cs typeface="+mn-cs"/>
-              </a:rPr>
-              <a:t>bmatrix</a:t>
-            </a:r>
-            <a:r>
-              <a:rPr lang="en-US" sz="1200" kern="1200" dirty="0">
-                <a:solidFill>
-                  <a:schemeClr val="tx1"/>
-                </a:solidFill>
-                <a:effectLst/>
-                <a:latin typeface="+mn-lt"/>
-                <a:ea typeface="+mn-ea"/>
-                <a:cs typeface="+mn-cs"/>
-              </a:rPr>
-              <a:t>}</a:t>
-            </a:r>
-          </a:p>
-          <a:p>
-            <a:pPr marL="0" marR="0" lvl="0" indent="0" algn="l" defTabSz="914400" rtl="0" eaLnBrk="1" fontAlgn="auto" latinLnBrk="0" hangingPunct="1">
-              <a:lnSpc>
-                <a:spcPct val="100000"/>
-              </a:lnSpc>
-              <a:spcBef>
-                <a:spcPts val="0"/>
-              </a:spcBef>
-              <a:spcAft>
-                <a:spcPts val="0"/>
-              </a:spcAft>
-              <a:buClrTx/>
-              <a:buSzTx/>
-              <a:buFontTx/>
-              <a:buNone/>
-              <a:tabLst/>
-              <a:defRPr/>
-            </a:pPr>
-            <a:endParaRPr lang="en-US" sz="1200" kern="1200" dirty="0">
-              <a:solidFill>
-                <a:schemeClr val="tx1"/>
-              </a:solidFill>
-              <a:effectLst/>
-              <a:latin typeface="+mn-lt"/>
-              <a:ea typeface="+mn-ea"/>
-              <a:cs typeface="+mn-cs"/>
-            </a:endParaRPr>
-          </a:p>
-          <a:p>
-            <a:pPr marL="0" marR="0" lvl="0" indent="0" algn="l" defTabSz="914400" rtl="0" eaLnBrk="1" fontAlgn="auto" latinLnBrk="0" hangingPunct="1">
-              <a:lnSpc>
-                <a:spcPct val="100000"/>
-              </a:lnSpc>
-              <a:spcBef>
-                <a:spcPts val="0"/>
-              </a:spcBef>
-              <a:spcAft>
-                <a:spcPts val="0"/>
-              </a:spcAft>
-              <a:buClrTx/>
-              <a:buSzTx/>
-              <a:buFontTx/>
-              <a:buNone/>
-              <a:tabLst/>
-              <a:defRPr/>
-            </a:pPr>
-            <a:endParaRPr lang="en-US" sz="1200" kern="1200" dirty="0">
-              <a:solidFill>
-                <a:schemeClr val="tx1"/>
-              </a:solidFill>
-              <a:effectLst/>
-              <a:latin typeface="+mn-lt"/>
-              <a:ea typeface="+mn-ea"/>
-              <a:cs typeface="+mn-cs"/>
-            </a:endParaRPr>
-          </a:p>
-          <a:p>
-            <a:pPr marL="0" marR="0" lvl="0" indent="0" algn="l" defTabSz="914400" rtl="0" eaLnBrk="1" fontAlgn="auto" latinLnBrk="0" hangingPunct="1">
-              <a:lnSpc>
-                <a:spcPct val="100000"/>
-              </a:lnSpc>
-              <a:spcBef>
-                <a:spcPts val="0"/>
-              </a:spcBef>
-              <a:spcAft>
-                <a:spcPts val="0"/>
-              </a:spcAft>
-              <a:buClrTx/>
-              <a:buSzTx/>
-              <a:buFontTx/>
-              <a:buNone/>
-              <a:tabLst/>
-              <a:defRPr/>
-            </a:pPr>
-            <a:r>
-              <a:rPr lang="en-US" sz="1200" kern="1200" dirty="0">
-                <a:solidFill>
-                  <a:schemeClr val="tx1"/>
-                </a:solidFill>
-                <a:effectLst/>
-                <a:latin typeface="+mn-lt"/>
-                <a:ea typeface="+mn-ea"/>
-                <a:cs typeface="+mn-cs"/>
-              </a:rPr>
-              <a:t>\dot{\</a:t>
-            </a:r>
-            <a:r>
-              <a:rPr lang="en-US" sz="1200" kern="1200" dirty="0" err="1">
-                <a:solidFill>
-                  <a:schemeClr val="tx1"/>
-                </a:solidFill>
-                <a:effectLst/>
-                <a:latin typeface="+mn-lt"/>
-                <a:ea typeface="+mn-ea"/>
-                <a:cs typeface="+mn-cs"/>
-              </a:rPr>
-              <a:t>mathbf</a:t>
-            </a:r>
-            <a:r>
-              <a:rPr lang="en-US" sz="1200" kern="1200" dirty="0">
-                <a:solidFill>
-                  <a:schemeClr val="tx1"/>
-                </a:solidFill>
-                <a:effectLst/>
-                <a:latin typeface="+mn-lt"/>
-                <a:ea typeface="+mn-ea"/>
-                <a:cs typeface="+mn-cs"/>
-              </a:rPr>
-              <a:t>{x(t)}} = A \</a:t>
-            </a:r>
-            <a:r>
-              <a:rPr lang="en-US" sz="1200" kern="1200" dirty="0" err="1">
-                <a:solidFill>
-                  <a:schemeClr val="tx1"/>
-                </a:solidFill>
-                <a:effectLst/>
-                <a:latin typeface="+mn-lt"/>
-                <a:ea typeface="+mn-ea"/>
-                <a:cs typeface="+mn-cs"/>
-              </a:rPr>
-              <a:t>mathbf</a:t>
-            </a:r>
-            <a:r>
-              <a:rPr lang="en-US" sz="1200" kern="1200" dirty="0">
-                <a:solidFill>
-                  <a:schemeClr val="tx1"/>
-                </a:solidFill>
-                <a:effectLst/>
-                <a:latin typeface="+mn-lt"/>
-                <a:ea typeface="+mn-ea"/>
-                <a:cs typeface="+mn-cs"/>
-              </a:rPr>
-              <a:t>{x(t)} + B \</a:t>
-            </a:r>
-            <a:r>
-              <a:rPr lang="en-US" sz="1200" kern="1200" dirty="0" err="1">
-                <a:solidFill>
-                  <a:schemeClr val="tx1"/>
-                </a:solidFill>
-                <a:effectLst/>
-                <a:latin typeface="+mn-lt"/>
-                <a:ea typeface="+mn-ea"/>
-                <a:cs typeface="+mn-cs"/>
-              </a:rPr>
-              <a:t>mathbf</a:t>
-            </a:r>
-            <a:r>
-              <a:rPr lang="en-US" sz="1200" kern="1200" dirty="0">
-                <a:solidFill>
-                  <a:schemeClr val="tx1"/>
-                </a:solidFill>
-                <a:effectLst/>
-                <a:latin typeface="+mn-lt"/>
-                <a:ea typeface="+mn-ea"/>
-                <a:cs typeface="+mn-cs"/>
-              </a:rPr>
-              <a:t>{u(t)}</a:t>
-            </a:r>
-          </a:p>
-          <a:p>
-            <a:pPr marL="0" marR="0" lvl="0" indent="0" algn="l" defTabSz="914400" rtl="0" eaLnBrk="1" fontAlgn="auto" latinLnBrk="0" hangingPunct="1">
-              <a:lnSpc>
-                <a:spcPct val="100000"/>
-              </a:lnSpc>
-              <a:spcBef>
-                <a:spcPts val="0"/>
-              </a:spcBef>
-              <a:spcAft>
-                <a:spcPts val="0"/>
-              </a:spcAft>
-              <a:buClrTx/>
-              <a:buSzTx/>
-              <a:buFontTx/>
-              <a:buNone/>
-              <a:tabLst/>
-              <a:defRPr/>
-            </a:pPr>
-            <a:endParaRPr lang="en-US" sz="1200" kern="1200" dirty="0">
-              <a:solidFill>
-                <a:schemeClr val="tx1"/>
-              </a:solidFill>
-              <a:effectLst/>
-              <a:latin typeface="+mn-lt"/>
-              <a:ea typeface="+mn-ea"/>
-              <a:cs typeface="+mn-cs"/>
-            </a:endParaRPr>
-          </a:p>
-          <a:p>
-            <a:pPr marL="0" marR="0" lvl="0" indent="0" algn="l" defTabSz="914400" rtl="0" eaLnBrk="1" fontAlgn="auto" latinLnBrk="0" hangingPunct="1">
-              <a:lnSpc>
-                <a:spcPct val="100000"/>
-              </a:lnSpc>
-              <a:spcBef>
-                <a:spcPts val="0"/>
-              </a:spcBef>
-              <a:spcAft>
-                <a:spcPts val="0"/>
-              </a:spcAft>
-              <a:buClrTx/>
-              <a:buSzTx/>
-              <a:buFontTx/>
-              <a:buNone/>
-              <a:tabLst/>
-              <a:defRPr/>
-            </a:pPr>
-            <a:r>
-              <a:rPr lang="en-US" sz="1200" kern="1200" dirty="0">
-                <a:solidFill>
-                  <a:schemeClr val="tx1"/>
-                </a:solidFill>
-                <a:effectLst/>
-                <a:latin typeface="+mn-lt"/>
-                <a:ea typeface="+mn-ea"/>
-                <a:cs typeface="+mn-cs"/>
-              </a:rPr>
-              <a:t>\begin{</a:t>
-            </a:r>
-            <a:r>
-              <a:rPr lang="en-US" sz="1200" kern="1200" dirty="0" err="1">
-                <a:solidFill>
-                  <a:schemeClr val="tx1"/>
-                </a:solidFill>
-                <a:effectLst/>
-                <a:latin typeface="+mn-lt"/>
-                <a:ea typeface="+mn-ea"/>
-                <a:cs typeface="+mn-cs"/>
-              </a:rPr>
-              <a:t>bmatrix</a:t>
-            </a:r>
-            <a:r>
-              <a:rPr lang="en-US" sz="1200" kern="1200" dirty="0">
-                <a:solidFill>
-                  <a:schemeClr val="tx1"/>
-                </a:solidFill>
-                <a:effectLst/>
-                <a:latin typeface="+mn-lt"/>
-                <a:ea typeface="+mn-ea"/>
-                <a:cs typeface="+mn-cs"/>
-              </a:rPr>
-              <a:t>} \dot{\</a:t>
-            </a:r>
-            <a:r>
-              <a:rPr lang="en-US" sz="1200" kern="1200" dirty="0" err="1">
-                <a:solidFill>
-                  <a:schemeClr val="tx1"/>
-                </a:solidFill>
-                <a:effectLst/>
-                <a:latin typeface="+mn-lt"/>
-                <a:ea typeface="+mn-ea"/>
-                <a:cs typeface="+mn-cs"/>
-              </a:rPr>
-              <a:t>mathbf</a:t>
-            </a:r>
-            <a:r>
-              <a:rPr lang="en-US" sz="1200" kern="1200" dirty="0">
-                <a:solidFill>
-                  <a:schemeClr val="tx1"/>
-                </a:solidFill>
-                <a:effectLst/>
-                <a:latin typeface="+mn-lt"/>
-                <a:ea typeface="+mn-ea"/>
-                <a:cs typeface="+mn-cs"/>
-              </a:rPr>
-              <a:t>{s}} \\ \dot{\</a:t>
-            </a:r>
-            <a:r>
-              <a:rPr lang="en-US" sz="1200" kern="1200" dirty="0" err="1">
-                <a:solidFill>
-                  <a:schemeClr val="tx1"/>
-                </a:solidFill>
-                <a:effectLst/>
-                <a:latin typeface="+mn-lt"/>
-                <a:ea typeface="+mn-ea"/>
-                <a:cs typeface="+mn-cs"/>
-              </a:rPr>
-              <a:t>mathbf</a:t>
-            </a:r>
-            <a:r>
-              <a:rPr lang="en-US" sz="1200" kern="1200" dirty="0">
-                <a:solidFill>
-                  <a:schemeClr val="tx1"/>
-                </a:solidFill>
-                <a:effectLst/>
-                <a:latin typeface="+mn-lt"/>
-                <a:ea typeface="+mn-ea"/>
-                <a:cs typeface="+mn-cs"/>
-              </a:rPr>
-              <a:t>{v}}\end{</a:t>
-            </a:r>
-            <a:r>
-              <a:rPr lang="en-US" sz="1200" kern="1200" dirty="0" err="1">
-                <a:solidFill>
-                  <a:schemeClr val="tx1"/>
-                </a:solidFill>
-                <a:effectLst/>
-                <a:latin typeface="+mn-lt"/>
-                <a:ea typeface="+mn-ea"/>
-                <a:cs typeface="+mn-cs"/>
-              </a:rPr>
-              <a:t>bmatrix</a:t>
-            </a:r>
-            <a:r>
-              <a:rPr lang="en-US" sz="1200" kern="1200" dirty="0">
-                <a:solidFill>
-                  <a:schemeClr val="tx1"/>
-                </a:solidFill>
-                <a:effectLst/>
-                <a:latin typeface="+mn-lt"/>
-                <a:ea typeface="+mn-ea"/>
-                <a:cs typeface="+mn-cs"/>
-              </a:rPr>
-              <a:t>} = \begin{</a:t>
-            </a:r>
-            <a:r>
-              <a:rPr lang="en-US" sz="1200" kern="1200" dirty="0" err="1">
-                <a:solidFill>
-                  <a:schemeClr val="tx1"/>
-                </a:solidFill>
-                <a:effectLst/>
-                <a:latin typeface="+mn-lt"/>
-                <a:ea typeface="+mn-ea"/>
-                <a:cs typeface="+mn-cs"/>
-              </a:rPr>
-              <a:t>bmatrix</a:t>
-            </a:r>
-            <a:r>
-              <a:rPr lang="en-US" sz="1200" kern="1200" dirty="0">
-                <a:solidFill>
-                  <a:schemeClr val="tx1"/>
-                </a:solidFill>
-                <a:effectLst/>
-                <a:latin typeface="+mn-lt"/>
-                <a:ea typeface="+mn-ea"/>
-                <a:cs typeface="+mn-cs"/>
-              </a:rPr>
-              <a:t>} 0 &amp; I \\ 0 &amp; 0\end{</a:t>
-            </a:r>
-            <a:r>
-              <a:rPr lang="en-US" sz="1200" kern="1200" dirty="0" err="1">
-                <a:solidFill>
-                  <a:schemeClr val="tx1"/>
-                </a:solidFill>
-                <a:effectLst/>
-                <a:latin typeface="+mn-lt"/>
-                <a:ea typeface="+mn-ea"/>
-                <a:cs typeface="+mn-cs"/>
-              </a:rPr>
-              <a:t>bmatrix</a:t>
-            </a:r>
-            <a:r>
-              <a:rPr lang="en-US" sz="1200" kern="1200" dirty="0">
-                <a:solidFill>
-                  <a:schemeClr val="tx1"/>
-                </a:solidFill>
-                <a:effectLst/>
-                <a:latin typeface="+mn-lt"/>
-                <a:ea typeface="+mn-ea"/>
-                <a:cs typeface="+mn-cs"/>
-              </a:rPr>
-              <a:t>} \begin{</a:t>
-            </a:r>
-            <a:r>
-              <a:rPr lang="en-US" sz="1200" kern="1200" dirty="0" err="1">
-                <a:solidFill>
-                  <a:schemeClr val="tx1"/>
-                </a:solidFill>
-                <a:effectLst/>
-                <a:latin typeface="+mn-lt"/>
-                <a:ea typeface="+mn-ea"/>
-                <a:cs typeface="+mn-cs"/>
-              </a:rPr>
-              <a:t>bmatrix</a:t>
-            </a:r>
-            <a:r>
-              <a:rPr lang="en-US" sz="1200" kern="1200" dirty="0">
-                <a:solidFill>
-                  <a:schemeClr val="tx1"/>
-                </a:solidFill>
-                <a:effectLst/>
-                <a:latin typeface="+mn-lt"/>
-                <a:ea typeface="+mn-ea"/>
-                <a:cs typeface="+mn-cs"/>
-              </a:rPr>
-              <a:t>} \</a:t>
-            </a:r>
-            <a:r>
-              <a:rPr lang="en-US" sz="1200" kern="1200" dirty="0" err="1">
-                <a:solidFill>
-                  <a:schemeClr val="tx1"/>
-                </a:solidFill>
-                <a:effectLst/>
-                <a:latin typeface="+mn-lt"/>
-                <a:ea typeface="+mn-ea"/>
-                <a:cs typeface="+mn-cs"/>
-              </a:rPr>
-              <a:t>mathbf</a:t>
-            </a:r>
-            <a:r>
-              <a:rPr lang="en-US" sz="1200" kern="1200" dirty="0">
-                <a:solidFill>
-                  <a:schemeClr val="tx1"/>
-                </a:solidFill>
-                <a:effectLst/>
-                <a:latin typeface="+mn-lt"/>
-                <a:ea typeface="+mn-ea"/>
-                <a:cs typeface="+mn-cs"/>
-              </a:rPr>
-              <a:t>{s} \\ \</a:t>
-            </a:r>
-            <a:r>
-              <a:rPr lang="en-US" sz="1200" kern="1200" dirty="0" err="1">
-                <a:solidFill>
-                  <a:schemeClr val="tx1"/>
-                </a:solidFill>
-                <a:effectLst/>
-                <a:latin typeface="+mn-lt"/>
-                <a:ea typeface="+mn-ea"/>
-                <a:cs typeface="+mn-cs"/>
-              </a:rPr>
-              <a:t>mathbf</a:t>
-            </a:r>
-            <a:r>
-              <a:rPr lang="en-US" sz="1200" kern="1200" dirty="0">
-                <a:solidFill>
-                  <a:schemeClr val="tx1"/>
-                </a:solidFill>
-                <a:effectLst/>
-                <a:latin typeface="+mn-lt"/>
-                <a:ea typeface="+mn-ea"/>
-                <a:cs typeface="+mn-cs"/>
-              </a:rPr>
-              <a:t>{v}\end{</a:t>
-            </a:r>
-            <a:r>
-              <a:rPr lang="en-US" sz="1200" kern="1200" dirty="0" err="1">
-                <a:solidFill>
-                  <a:schemeClr val="tx1"/>
-                </a:solidFill>
-                <a:effectLst/>
-                <a:latin typeface="+mn-lt"/>
-                <a:ea typeface="+mn-ea"/>
-                <a:cs typeface="+mn-cs"/>
-              </a:rPr>
-              <a:t>bmatrix</a:t>
-            </a:r>
-            <a:r>
-              <a:rPr lang="en-US" sz="1200" kern="1200" dirty="0">
-                <a:solidFill>
-                  <a:schemeClr val="tx1"/>
-                </a:solidFill>
-                <a:effectLst/>
-                <a:latin typeface="+mn-lt"/>
-                <a:ea typeface="+mn-ea"/>
-                <a:cs typeface="+mn-cs"/>
-              </a:rPr>
-              <a:t>} + \begin{</a:t>
-            </a:r>
-            <a:r>
-              <a:rPr lang="en-US" sz="1200" kern="1200" dirty="0" err="1">
-                <a:solidFill>
-                  <a:schemeClr val="tx1"/>
-                </a:solidFill>
-                <a:effectLst/>
-                <a:latin typeface="+mn-lt"/>
-                <a:ea typeface="+mn-ea"/>
-                <a:cs typeface="+mn-cs"/>
-              </a:rPr>
-              <a:t>bmatrix</a:t>
-            </a:r>
-            <a:r>
-              <a:rPr lang="en-US" sz="1200" kern="1200" dirty="0">
-                <a:solidFill>
-                  <a:schemeClr val="tx1"/>
-                </a:solidFill>
-                <a:effectLst/>
-                <a:latin typeface="+mn-lt"/>
-                <a:ea typeface="+mn-ea"/>
-                <a:cs typeface="+mn-cs"/>
-              </a:rPr>
-              <a:t>} 0 \\ I\end{</a:t>
-            </a:r>
-            <a:r>
-              <a:rPr lang="en-US" sz="1200" kern="1200" dirty="0" err="1">
-                <a:solidFill>
-                  <a:schemeClr val="tx1"/>
-                </a:solidFill>
-                <a:effectLst/>
-                <a:latin typeface="+mn-lt"/>
-                <a:ea typeface="+mn-ea"/>
-                <a:cs typeface="+mn-cs"/>
-              </a:rPr>
-              <a:t>bmatrix</a:t>
-            </a:r>
-            <a:r>
-              <a:rPr lang="en-US" sz="1200" kern="1200" dirty="0">
-                <a:solidFill>
-                  <a:schemeClr val="tx1"/>
-                </a:solidFill>
-                <a:effectLst/>
-                <a:latin typeface="+mn-lt"/>
-                <a:ea typeface="+mn-ea"/>
-                <a:cs typeface="+mn-cs"/>
-              </a:rPr>
-              <a:t>} \begin{</a:t>
-            </a:r>
-            <a:r>
-              <a:rPr lang="en-US" sz="1200" kern="1200" dirty="0" err="1">
-                <a:solidFill>
-                  <a:schemeClr val="tx1"/>
-                </a:solidFill>
-                <a:effectLst/>
-                <a:latin typeface="+mn-lt"/>
-                <a:ea typeface="+mn-ea"/>
-                <a:cs typeface="+mn-cs"/>
-              </a:rPr>
-              <a:t>bmatrix</a:t>
-            </a:r>
-            <a:r>
-              <a:rPr lang="en-US" sz="1200" kern="1200" dirty="0">
-                <a:solidFill>
-                  <a:schemeClr val="tx1"/>
-                </a:solidFill>
-                <a:effectLst/>
-                <a:latin typeface="+mn-lt"/>
-                <a:ea typeface="+mn-ea"/>
-                <a:cs typeface="+mn-cs"/>
-              </a:rPr>
-              <a:t>} \</a:t>
-            </a:r>
-            <a:r>
-              <a:rPr lang="en-US" sz="1200" kern="1200" dirty="0" err="1">
-                <a:solidFill>
-                  <a:schemeClr val="tx1"/>
-                </a:solidFill>
-                <a:effectLst/>
-                <a:latin typeface="+mn-lt"/>
-                <a:ea typeface="+mn-ea"/>
-                <a:cs typeface="+mn-cs"/>
-              </a:rPr>
-              <a:t>mathbf</a:t>
-            </a:r>
-            <a:r>
-              <a:rPr lang="en-US" sz="1200" kern="1200" dirty="0">
-                <a:solidFill>
-                  <a:schemeClr val="tx1"/>
-                </a:solidFill>
-                <a:effectLst/>
-                <a:latin typeface="+mn-lt"/>
-                <a:ea typeface="+mn-ea"/>
-                <a:cs typeface="+mn-cs"/>
-              </a:rPr>
-              <a:t>{a} \end{</a:t>
-            </a:r>
-            <a:r>
-              <a:rPr lang="en-US" sz="1200" kern="1200" dirty="0" err="1">
-                <a:solidFill>
-                  <a:schemeClr val="tx1"/>
-                </a:solidFill>
-                <a:effectLst/>
-                <a:latin typeface="+mn-lt"/>
-                <a:ea typeface="+mn-ea"/>
-                <a:cs typeface="+mn-cs"/>
-              </a:rPr>
-              <a:t>bmatrix</a:t>
-            </a:r>
-            <a:r>
-              <a:rPr lang="en-US" sz="1200" kern="1200" dirty="0">
-                <a:solidFill>
-                  <a:schemeClr val="tx1"/>
-                </a:solidFill>
-                <a:effectLst/>
-                <a:latin typeface="+mn-lt"/>
-                <a:ea typeface="+mn-ea"/>
-                <a:cs typeface="+mn-cs"/>
-              </a:rPr>
-              <a:t>}</a:t>
-            </a:r>
-          </a:p>
-          <a:p>
             <a:endParaRPr lang="en-US" dirty="0"/>
           </a:p>
         </p:txBody>
@@ -1833,938 +879,6 @@
           <a:bodyPr/>
           <a:lstStyle/>
           <a:p>
-            <a:pPr marL="0" marR="0" lvl="0" indent="0" algn="l" defTabSz="914400" rtl="0" eaLnBrk="1" fontAlgn="auto" latinLnBrk="0" hangingPunct="1">
-              <a:lnSpc>
-                <a:spcPct val="100000"/>
-              </a:lnSpc>
-              <a:spcBef>
-                <a:spcPts val="0"/>
-              </a:spcBef>
-              <a:spcAft>
-                <a:spcPts val="0"/>
-              </a:spcAft>
-              <a:buClrTx/>
-              <a:buSzTx/>
-              <a:buFontTx/>
-              <a:buNone/>
-              <a:tabLst/>
-              <a:defRPr/>
-            </a:pPr>
-            <a:r>
-              <a:rPr lang="en-US" sz="1200" kern="1200" dirty="0">
-                <a:solidFill>
-                  <a:schemeClr val="tx1"/>
-                </a:solidFill>
-                <a:effectLst/>
-                <a:latin typeface="+mn-lt"/>
-                <a:ea typeface="+mn-ea"/>
-                <a:cs typeface="+mn-cs"/>
-              </a:rPr>
-              <a:t>\</a:t>
-            </a:r>
-            <a:r>
-              <a:rPr lang="en-US" sz="1200" kern="1200" dirty="0" err="1">
-                <a:solidFill>
-                  <a:schemeClr val="tx1"/>
-                </a:solidFill>
-                <a:effectLst/>
-                <a:latin typeface="+mn-lt"/>
-                <a:ea typeface="+mn-ea"/>
-                <a:cs typeface="+mn-cs"/>
-              </a:rPr>
-              <a:t>ddot</a:t>
-            </a:r>
-            <a:r>
-              <a:rPr lang="en-US" sz="1200" kern="1200" dirty="0">
-                <a:solidFill>
-                  <a:schemeClr val="tx1"/>
-                </a:solidFill>
-                <a:effectLst/>
-                <a:latin typeface="+mn-lt"/>
-                <a:ea typeface="+mn-ea"/>
-                <a:cs typeface="+mn-cs"/>
-              </a:rPr>
-              <a:t> s = a</a:t>
-            </a:r>
-          </a:p>
-          <a:p>
-            <a:pPr marL="0" marR="0" lvl="0" indent="0" algn="l" defTabSz="914400" rtl="0" eaLnBrk="1" fontAlgn="auto" latinLnBrk="0" hangingPunct="1">
-              <a:lnSpc>
-                <a:spcPct val="100000"/>
-              </a:lnSpc>
-              <a:spcBef>
-                <a:spcPts val="0"/>
-              </a:spcBef>
-              <a:spcAft>
-                <a:spcPts val="0"/>
-              </a:spcAft>
-              <a:buClrTx/>
-              <a:buSzTx/>
-              <a:buFontTx/>
-              <a:buNone/>
-              <a:tabLst/>
-              <a:defRPr/>
-            </a:pPr>
-            <a:endParaRPr lang="en-US" sz="1200" kern="1200" dirty="0">
-              <a:solidFill>
-                <a:schemeClr val="tx1"/>
-              </a:solidFill>
-              <a:effectLst/>
-              <a:latin typeface="+mn-lt"/>
-              <a:ea typeface="+mn-ea"/>
-              <a:cs typeface="+mn-cs"/>
-            </a:endParaRPr>
-          </a:p>
-          <a:p>
-            <a:pPr marL="0" marR="0" lvl="0" indent="0" algn="l" defTabSz="914400" rtl="0" eaLnBrk="1" fontAlgn="auto" latinLnBrk="0" hangingPunct="1">
-              <a:lnSpc>
-                <a:spcPct val="100000"/>
-              </a:lnSpc>
-              <a:spcBef>
-                <a:spcPts val="0"/>
-              </a:spcBef>
-              <a:spcAft>
-                <a:spcPts val="0"/>
-              </a:spcAft>
-              <a:buClrTx/>
-              <a:buSzTx/>
-              <a:buFontTx/>
-              <a:buNone/>
-              <a:tabLst/>
-              <a:defRPr/>
-            </a:pPr>
-            <a:r>
-              <a:rPr lang="en-US" sz="1200" kern="1200" dirty="0">
-                <a:solidFill>
-                  <a:schemeClr val="tx1"/>
-                </a:solidFill>
-                <a:effectLst/>
-                <a:latin typeface="+mn-lt"/>
-                <a:ea typeface="+mn-ea"/>
-                <a:cs typeface="+mn-cs"/>
-              </a:rPr>
-              <a:t>\begin{</a:t>
-            </a:r>
-            <a:r>
-              <a:rPr lang="en-US" sz="1200" kern="1200" dirty="0" err="1">
-                <a:solidFill>
-                  <a:schemeClr val="tx1"/>
-                </a:solidFill>
-                <a:effectLst/>
-                <a:latin typeface="+mn-lt"/>
-                <a:ea typeface="+mn-ea"/>
-                <a:cs typeface="+mn-cs"/>
-              </a:rPr>
-              <a:t>bmatrix</a:t>
-            </a:r>
-            <a:r>
-              <a:rPr lang="en-US" sz="1200" kern="1200" dirty="0">
-                <a:solidFill>
-                  <a:schemeClr val="tx1"/>
-                </a:solidFill>
-                <a:effectLst/>
-                <a:latin typeface="+mn-lt"/>
-                <a:ea typeface="+mn-ea"/>
-                <a:cs typeface="+mn-cs"/>
-              </a:rPr>
-              <a:t>} \dot s \\ \dot v\end{</a:t>
-            </a:r>
-            <a:r>
-              <a:rPr lang="en-US" sz="1200" kern="1200" dirty="0" err="1">
-                <a:solidFill>
-                  <a:schemeClr val="tx1"/>
-                </a:solidFill>
-                <a:effectLst/>
-                <a:latin typeface="+mn-lt"/>
-                <a:ea typeface="+mn-ea"/>
-                <a:cs typeface="+mn-cs"/>
-              </a:rPr>
-              <a:t>bmatrix</a:t>
-            </a:r>
-            <a:r>
-              <a:rPr lang="en-US" sz="1200" kern="1200" dirty="0">
-                <a:solidFill>
-                  <a:schemeClr val="tx1"/>
-                </a:solidFill>
-                <a:effectLst/>
-                <a:latin typeface="+mn-lt"/>
-                <a:ea typeface="+mn-ea"/>
-                <a:cs typeface="+mn-cs"/>
-              </a:rPr>
-              <a:t>} = \begin{</a:t>
-            </a:r>
-            <a:r>
-              <a:rPr lang="en-US" sz="1200" kern="1200" dirty="0" err="1">
-                <a:solidFill>
-                  <a:schemeClr val="tx1"/>
-                </a:solidFill>
-                <a:effectLst/>
-                <a:latin typeface="+mn-lt"/>
-                <a:ea typeface="+mn-ea"/>
-                <a:cs typeface="+mn-cs"/>
-              </a:rPr>
-              <a:t>bmatrix</a:t>
-            </a:r>
-            <a:r>
-              <a:rPr lang="en-US" sz="1200" kern="1200" dirty="0">
-                <a:solidFill>
-                  <a:schemeClr val="tx1"/>
-                </a:solidFill>
-                <a:effectLst/>
-                <a:latin typeface="+mn-lt"/>
-                <a:ea typeface="+mn-ea"/>
-                <a:cs typeface="+mn-cs"/>
-              </a:rPr>
-              <a:t>} 0 &amp; 1 \\ 0 &amp; 0\end{</a:t>
-            </a:r>
-            <a:r>
-              <a:rPr lang="en-US" sz="1200" kern="1200" dirty="0" err="1">
-                <a:solidFill>
-                  <a:schemeClr val="tx1"/>
-                </a:solidFill>
-                <a:effectLst/>
-                <a:latin typeface="+mn-lt"/>
-                <a:ea typeface="+mn-ea"/>
-                <a:cs typeface="+mn-cs"/>
-              </a:rPr>
-              <a:t>bmatrix</a:t>
-            </a:r>
-            <a:r>
-              <a:rPr lang="en-US" sz="1200" kern="1200" dirty="0">
-                <a:solidFill>
-                  <a:schemeClr val="tx1"/>
-                </a:solidFill>
-                <a:effectLst/>
-                <a:latin typeface="+mn-lt"/>
-                <a:ea typeface="+mn-ea"/>
-                <a:cs typeface="+mn-cs"/>
-              </a:rPr>
-              <a:t>} \begin{</a:t>
-            </a:r>
-            <a:r>
-              <a:rPr lang="en-US" sz="1200" kern="1200" dirty="0" err="1">
-                <a:solidFill>
-                  <a:schemeClr val="tx1"/>
-                </a:solidFill>
-                <a:effectLst/>
-                <a:latin typeface="+mn-lt"/>
-                <a:ea typeface="+mn-ea"/>
-                <a:cs typeface="+mn-cs"/>
-              </a:rPr>
-              <a:t>bmatrix</a:t>
-            </a:r>
-            <a:r>
-              <a:rPr lang="en-US" sz="1200" kern="1200" dirty="0">
-                <a:solidFill>
-                  <a:schemeClr val="tx1"/>
-                </a:solidFill>
-                <a:effectLst/>
-                <a:latin typeface="+mn-lt"/>
-                <a:ea typeface="+mn-ea"/>
-                <a:cs typeface="+mn-cs"/>
-              </a:rPr>
-              <a:t>} s \\ v\end{</a:t>
-            </a:r>
-            <a:r>
-              <a:rPr lang="en-US" sz="1200" kern="1200" dirty="0" err="1">
-                <a:solidFill>
-                  <a:schemeClr val="tx1"/>
-                </a:solidFill>
-                <a:effectLst/>
-                <a:latin typeface="+mn-lt"/>
-                <a:ea typeface="+mn-ea"/>
-                <a:cs typeface="+mn-cs"/>
-              </a:rPr>
-              <a:t>bmatrix</a:t>
-            </a:r>
-            <a:r>
-              <a:rPr lang="en-US" sz="1200" kern="1200" dirty="0">
-                <a:solidFill>
-                  <a:schemeClr val="tx1"/>
-                </a:solidFill>
-                <a:effectLst/>
-                <a:latin typeface="+mn-lt"/>
-                <a:ea typeface="+mn-ea"/>
-                <a:cs typeface="+mn-cs"/>
-              </a:rPr>
-              <a:t>} + \begin{</a:t>
-            </a:r>
-            <a:r>
-              <a:rPr lang="en-US" sz="1200" kern="1200" dirty="0" err="1">
-                <a:solidFill>
-                  <a:schemeClr val="tx1"/>
-                </a:solidFill>
-                <a:effectLst/>
-                <a:latin typeface="+mn-lt"/>
-                <a:ea typeface="+mn-ea"/>
-                <a:cs typeface="+mn-cs"/>
-              </a:rPr>
-              <a:t>bmatrix</a:t>
-            </a:r>
-            <a:r>
-              <a:rPr lang="en-US" sz="1200" kern="1200" dirty="0">
-                <a:solidFill>
-                  <a:schemeClr val="tx1"/>
-                </a:solidFill>
-                <a:effectLst/>
-                <a:latin typeface="+mn-lt"/>
-                <a:ea typeface="+mn-ea"/>
-                <a:cs typeface="+mn-cs"/>
-              </a:rPr>
-              <a:t>} 0 \\ 1\end{</a:t>
-            </a:r>
-            <a:r>
-              <a:rPr lang="en-US" sz="1200" kern="1200" dirty="0" err="1">
-                <a:solidFill>
-                  <a:schemeClr val="tx1"/>
-                </a:solidFill>
-                <a:effectLst/>
-                <a:latin typeface="+mn-lt"/>
-                <a:ea typeface="+mn-ea"/>
-                <a:cs typeface="+mn-cs"/>
-              </a:rPr>
-              <a:t>bmatrix</a:t>
-            </a:r>
-            <a:r>
-              <a:rPr lang="en-US" sz="1200" kern="1200" dirty="0">
-                <a:solidFill>
-                  <a:schemeClr val="tx1"/>
-                </a:solidFill>
-                <a:effectLst/>
-                <a:latin typeface="+mn-lt"/>
-                <a:ea typeface="+mn-ea"/>
-                <a:cs typeface="+mn-cs"/>
-              </a:rPr>
-              <a:t>} \begin{</a:t>
-            </a:r>
-            <a:r>
-              <a:rPr lang="en-US" sz="1200" kern="1200" dirty="0" err="1">
-                <a:solidFill>
-                  <a:schemeClr val="tx1"/>
-                </a:solidFill>
-                <a:effectLst/>
-                <a:latin typeface="+mn-lt"/>
-                <a:ea typeface="+mn-ea"/>
-                <a:cs typeface="+mn-cs"/>
-              </a:rPr>
-              <a:t>bmatrix</a:t>
-            </a:r>
-            <a:r>
-              <a:rPr lang="en-US" sz="1200" kern="1200" dirty="0">
-                <a:solidFill>
-                  <a:schemeClr val="tx1"/>
-                </a:solidFill>
-                <a:effectLst/>
-                <a:latin typeface="+mn-lt"/>
-                <a:ea typeface="+mn-ea"/>
-                <a:cs typeface="+mn-cs"/>
-              </a:rPr>
-              <a:t>} a \end{</a:t>
-            </a:r>
-            <a:r>
-              <a:rPr lang="en-US" sz="1200" kern="1200" dirty="0" err="1">
-                <a:solidFill>
-                  <a:schemeClr val="tx1"/>
-                </a:solidFill>
-                <a:effectLst/>
-                <a:latin typeface="+mn-lt"/>
-                <a:ea typeface="+mn-ea"/>
-                <a:cs typeface="+mn-cs"/>
-              </a:rPr>
-              <a:t>bmatrix</a:t>
-            </a:r>
-            <a:r>
-              <a:rPr lang="en-US" sz="1200" kern="1200" dirty="0">
-                <a:solidFill>
-                  <a:schemeClr val="tx1"/>
-                </a:solidFill>
-                <a:effectLst/>
-                <a:latin typeface="+mn-lt"/>
-                <a:ea typeface="+mn-ea"/>
-                <a:cs typeface="+mn-cs"/>
-              </a:rPr>
-              <a:t>}</a:t>
-            </a:r>
-          </a:p>
-          <a:p>
-            <a:pPr marL="0" marR="0" lvl="0" indent="0" algn="l" defTabSz="914400" rtl="0" eaLnBrk="1" fontAlgn="auto" latinLnBrk="0" hangingPunct="1">
-              <a:lnSpc>
-                <a:spcPct val="100000"/>
-              </a:lnSpc>
-              <a:spcBef>
-                <a:spcPts val="0"/>
-              </a:spcBef>
-              <a:spcAft>
-                <a:spcPts val="0"/>
-              </a:spcAft>
-              <a:buClrTx/>
-              <a:buSzTx/>
-              <a:buFontTx/>
-              <a:buNone/>
-              <a:tabLst/>
-              <a:defRPr/>
-            </a:pPr>
-            <a:endParaRPr lang="en-US" sz="1200" kern="1200" dirty="0">
-              <a:solidFill>
-                <a:schemeClr val="tx1"/>
-              </a:solidFill>
-              <a:effectLst/>
-              <a:latin typeface="+mn-lt"/>
-              <a:ea typeface="+mn-ea"/>
-              <a:cs typeface="+mn-cs"/>
-            </a:endParaRPr>
-          </a:p>
-          <a:p>
-            <a:pPr marL="0" marR="0" lvl="0" indent="0" algn="l" defTabSz="914400" rtl="0" eaLnBrk="1" fontAlgn="auto" latinLnBrk="0" hangingPunct="1">
-              <a:lnSpc>
-                <a:spcPct val="100000"/>
-              </a:lnSpc>
-              <a:spcBef>
-                <a:spcPts val="0"/>
-              </a:spcBef>
-              <a:spcAft>
-                <a:spcPts val="0"/>
-              </a:spcAft>
-              <a:buClrTx/>
-              <a:buSzTx/>
-              <a:buFontTx/>
-              <a:buNone/>
-              <a:tabLst/>
-              <a:defRPr/>
-            </a:pPr>
-            <a:endParaRPr lang="en-US" sz="1200" kern="1200" dirty="0">
-              <a:solidFill>
-                <a:schemeClr val="tx1"/>
-              </a:solidFill>
-              <a:effectLst/>
-              <a:latin typeface="+mn-lt"/>
-              <a:ea typeface="+mn-ea"/>
-              <a:cs typeface="+mn-cs"/>
-            </a:endParaRPr>
-          </a:p>
-          <a:p>
-            <a:pPr marL="0" marR="0" lvl="0" indent="0" algn="l" defTabSz="914400" rtl="0" eaLnBrk="1" fontAlgn="auto" latinLnBrk="0" hangingPunct="1">
-              <a:lnSpc>
-                <a:spcPct val="100000"/>
-              </a:lnSpc>
-              <a:spcBef>
-                <a:spcPts val="0"/>
-              </a:spcBef>
-              <a:spcAft>
-                <a:spcPts val="0"/>
-              </a:spcAft>
-              <a:buClrTx/>
-              <a:buSzTx/>
-              <a:buFontTx/>
-              <a:buNone/>
-              <a:tabLst/>
-              <a:defRPr/>
-            </a:pPr>
-            <a:r>
-              <a:rPr lang="en-US" sz="1200" kern="1200" dirty="0">
-                <a:solidFill>
-                  <a:schemeClr val="tx1"/>
-                </a:solidFill>
-                <a:effectLst/>
-                <a:latin typeface="+mn-lt"/>
-                <a:ea typeface="+mn-ea"/>
-                <a:cs typeface="+mn-cs"/>
-              </a:rPr>
-              <a:t>\dot{\</a:t>
-            </a:r>
-            <a:r>
-              <a:rPr lang="en-US" sz="1200" kern="1200" dirty="0" err="1">
-                <a:solidFill>
-                  <a:schemeClr val="tx1"/>
-                </a:solidFill>
-                <a:effectLst/>
-                <a:latin typeface="+mn-lt"/>
-                <a:ea typeface="+mn-ea"/>
-                <a:cs typeface="+mn-cs"/>
-              </a:rPr>
-              <a:t>mathbf</a:t>
-            </a:r>
-            <a:r>
-              <a:rPr lang="en-US" sz="1200" kern="1200" dirty="0">
-                <a:solidFill>
-                  <a:schemeClr val="tx1"/>
-                </a:solidFill>
-                <a:effectLst/>
-                <a:latin typeface="+mn-lt"/>
-                <a:ea typeface="+mn-ea"/>
-                <a:cs typeface="+mn-cs"/>
-              </a:rPr>
-              <a:t>{x(t)}} = A \</a:t>
-            </a:r>
-            <a:r>
-              <a:rPr lang="en-US" sz="1200" kern="1200" dirty="0" err="1">
-                <a:solidFill>
-                  <a:schemeClr val="tx1"/>
-                </a:solidFill>
-                <a:effectLst/>
-                <a:latin typeface="+mn-lt"/>
-                <a:ea typeface="+mn-ea"/>
-                <a:cs typeface="+mn-cs"/>
-              </a:rPr>
-              <a:t>mathbf</a:t>
-            </a:r>
-            <a:r>
-              <a:rPr lang="en-US" sz="1200" kern="1200" dirty="0">
-                <a:solidFill>
-                  <a:schemeClr val="tx1"/>
-                </a:solidFill>
-                <a:effectLst/>
-                <a:latin typeface="+mn-lt"/>
-                <a:ea typeface="+mn-ea"/>
-                <a:cs typeface="+mn-cs"/>
-              </a:rPr>
-              <a:t>{x(t)} + B \</a:t>
-            </a:r>
-            <a:r>
-              <a:rPr lang="en-US" sz="1200" kern="1200" dirty="0" err="1">
-                <a:solidFill>
-                  <a:schemeClr val="tx1"/>
-                </a:solidFill>
-                <a:effectLst/>
-                <a:latin typeface="+mn-lt"/>
-                <a:ea typeface="+mn-ea"/>
-                <a:cs typeface="+mn-cs"/>
-              </a:rPr>
-              <a:t>mathbf</a:t>
-            </a:r>
-            <a:r>
-              <a:rPr lang="en-US" sz="1200" kern="1200" dirty="0">
-                <a:solidFill>
-                  <a:schemeClr val="tx1"/>
-                </a:solidFill>
-                <a:effectLst/>
-                <a:latin typeface="+mn-lt"/>
-                <a:ea typeface="+mn-ea"/>
-                <a:cs typeface="+mn-cs"/>
-              </a:rPr>
-              <a:t>{u(t)}</a:t>
-            </a:r>
-          </a:p>
-          <a:p>
-            <a:pPr marL="0" marR="0" lvl="0" indent="0" algn="l" defTabSz="914400" rtl="0" eaLnBrk="1" fontAlgn="auto" latinLnBrk="0" hangingPunct="1">
-              <a:lnSpc>
-                <a:spcPct val="100000"/>
-              </a:lnSpc>
-              <a:spcBef>
-                <a:spcPts val="0"/>
-              </a:spcBef>
-              <a:spcAft>
-                <a:spcPts val="0"/>
-              </a:spcAft>
-              <a:buClrTx/>
-              <a:buSzTx/>
-              <a:buFontTx/>
-              <a:buNone/>
-              <a:tabLst/>
-              <a:defRPr/>
-            </a:pPr>
-            <a:endParaRPr lang="en-US" sz="1200" kern="1200" dirty="0">
-              <a:solidFill>
-                <a:schemeClr val="tx1"/>
-              </a:solidFill>
-              <a:effectLst/>
-              <a:latin typeface="+mn-lt"/>
-              <a:ea typeface="+mn-ea"/>
-              <a:cs typeface="+mn-cs"/>
-            </a:endParaRPr>
-          </a:p>
-          <a:p>
-            <a:pPr marL="0" marR="0" lvl="0" indent="0" algn="l" defTabSz="914400" rtl="0" eaLnBrk="1" fontAlgn="auto" latinLnBrk="0" hangingPunct="1">
-              <a:lnSpc>
-                <a:spcPct val="100000"/>
-              </a:lnSpc>
-              <a:spcBef>
-                <a:spcPts val="0"/>
-              </a:spcBef>
-              <a:spcAft>
-                <a:spcPts val="0"/>
-              </a:spcAft>
-              <a:buClrTx/>
-              <a:buSzTx/>
-              <a:buFontTx/>
-              <a:buNone/>
-              <a:tabLst/>
-              <a:defRPr/>
-            </a:pPr>
-            <a:r>
-              <a:rPr lang="en-US" sz="1200" kern="1200" dirty="0">
-                <a:solidFill>
-                  <a:schemeClr val="tx1"/>
-                </a:solidFill>
-                <a:effectLst/>
-                <a:latin typeface="+mn-lt"/>
-                <a:ea typeface="+mn-ea"/>
-                <a:cs typeface="+mn-cs"/>
-              </a:rPr>
-              <a:t>\begin{</a:t>
-            </a:r>
-            <a:r>
-              <a:rPr lang="en-US" sz="1200" kern="1200" dirty="0" err="1">
-                <a:solidFill>
-                  <a:schemeClr val="tx1"/>
-                </a:solidFill>
-                <a:effectLst/>
-                <a:latin typeface="+mn-lt"/>
-                <a:ea typeface="+mn-ea"/>
-                <a:cs typeface="+mn-cs"/>
-              </a:rPr>
-              <a:t>bmatrix</a:t>
-            </a:r>
-            <a:r>
-              <a:rPr lang="en-US" sz="1200" kern="1200" dirty="0">
-                <a:solidFill>
-                  <a:schemeClr val="tx1"/>
-                </a:solidFill>
-                <a:effectLst/>
-                <a:latin typeface="+mn-lt"/>
-                <a:ea typeface="+mn-ea"/>
-                <a:cs typeface="+mn-cs"/>
-              </a:rPr>
-              <a:t>} \dot{\</a:t>
-            </a:r>
-            <a:r>
-              <a:rPr lang="en-US" sz="1200" kern="1200" dirty="0" err="1">
-                <a:solidFill>
-                  <a:schemeClr val="tx1"/>
-                </a:solidFill>
-                <a:effectLst/>
-                <a:latin typeface="+mn-lt"/>
-                <a:ea typeface="+mn-ea"/>
-                <a:cs typeface="+mn-cs"/>
-              </a:rPr>
-              <a:t>mathbf</a:t>
-            </a:r>
-            <a:r>
-              <a:rPr lang="en-US" sz="1200" kern="1200" dirty="0">
-                <a:solidFill>
-                  <a:schemeClr val="tx1"/>
-                </a:solidFill>
-                <a:effectLst/>
-                <a:latin typeface="+mn-lt"/>
-                <a:ea typeface="+mn-ea"/>
-                <a:cs typeface="+mn-cs"/>
-              </a:rPr>
-              <a:t>{s}} \\ \dot{\</a:t>
-            </a:r>
-            <a:r>
-              <a:rPr lang="en-US" sz="1200" kern="1200" dirty="0" err="1">
-                <a:solidFill>
-                  <a:schemeClr val="tx1"/>
-                </a:solidFill>
-                <a:effectLst/>
-                <a:latin typeface="+mn-lt"/>
-                <a:ea typeface="+mn-ea"/>
-                <a:cs typeface="+mn-cs"/>
-              </a:rPr>
-              <a:t>mathbf</a:t>
-            </a:r>
-            <a:r>
-              <a:rPr lang="en-US" sz="1200" kern="1200" dirty="0">
-                <a:solidFill>
-                  <a:schemeClr val="tx1"/>
-                </a:solidFill>
-                <a:effectLst/>
-                <a:latin typeface="+mn-lt"/>
-                <a:ea typeface="+mn-ea"/>
-                <a:cs typeface="+mn-cs"/>
-              </a:rPr>
-              <a:t>{v}}\end{</a:t>
-            </a:r>
-            <a:r>
-              <a:rPr lang="en-US" sz="1200" kern="1200" dirty="0" err="1">
-                <a:solidFill>
-                  <a:schemeClr val="tx1"/>
-                </a:solidFill>
-                <a:effectLst/>
-                <a:latin typeface="+mn-lt"/>
-                <a:ea typeface="+mn-ea"/>
-                <a:cs typeface="+mn-cs"/>
-              </a:rPr>
-              <a:t>bmatrix</a:t>
-            </a:r>
-            <a:r>
-              <a:rPr lang="en-US" sz="1200" kern="1200" dirty="0">
-                <a:solidFill>
-                  <a:schemeClr val="tx1"/>
-                </a:solidFill>
-                <a:effectLst/>
-                <a:latin typeface="+mn-lt"/>
-                <a:ea typeface="+mn-ea"/>
-                <a:cs typeface="+mn-cs"/>
-              </a:rPr>
-              <a:t>} = \begin{</a:t>
-            </a:r>
-            <a:r>
-              <a:rPr lang="en-US" sz="1200" kern="1200" dirty="0" err="1">
-                <a:solidFill>
-                  <a:schemeClr val="tx1"/>
-                </a:solidFill>
-                <a:effectLst/>
-                <a:latin typeface="+mn-lt"/>
-                <a:ea typeface="+mn-ea"/>
-                <a:cs typeface="+mn-cs"/>
-              </a:rPr>
-              <a:t>bmatrix</a:t>
-            </a:r>
-            <a:r>
-              <a:rPr lang="en-US" sz="1200" kern="1200" dirty="0">
-                <a:solidFill>
-                  <a:schemeClr val="tx1"/>
-                </a:solidFill>
-                <a:effectLst/>
-                <a:latin typeface="+mn-lt"/>
-                <a:ea typeface="+mn-ea"/>
-                <a:cs typeface="+mn-cs"/>
-              </a:rPr>
-              <a:t>} 0 &amp; I \\ 0 &amp; 0\end{</a:t>
-            </a:r>
-            <a:r>
-              <a:rPr lang="en-US" sz="1200" kern="1200" dirty="0" err="1">
-                <a:solidFill>
-                  <a:schemeClr val="tx1"/>
-                </a:solidFill>
-                <a:effectLst/>
-                <a:latin typeface="+mn-lt"/>
-                <a:ea typeface="+mn-ea"/>
-                <a:cs typeface="+mn-cs"/>
-              </a:rPr>
-              <a:t>bmatrix</a:t>
-            </a:r>
-            <a:r>
-              <a:rPr lang="en-US" sz="1200" kern="1200" dirty="0">
-                <a:solidFill>
-                  <a:schemeClr val="tx1"/>
-                </a:solidFill>
-                <a:effectLst/>
-                <a:latin typeface="+mn-lt"/>
-                <a:ea typeface="+mn-ea"/>
-                <a:cs typeface="+mn-cs"/>
-              </a:rPr>
-              <a:t>} \begin{</a:t>
-            </a:r>
-            <a:r>
-              <a:rPr lang="en-US" sz="1200" kern="1200" dirty="0" err="1">
-                <a:solidFill>
-                  <a:schemeClr val="tx1"/>
-                </a:solidFill>
-                <a:effectLst/>
-                <a:latin typeface="+mn-lt"/>
-                <a:ea typeface="+mn-ea"/>
-                <a:cs typeface="+mn-cs"/>
-              </a:rPr>
-              <a:t>bmatrix</a:t>
-            </a:r>
-            <a:r>
-              <a:rPr lang="en-US" sz="1200" kern="1200" dirty="0">
-                <a:solidFill>
-                  <a:schemeClr val="tx1"/>
-                </a:solidFill>
-                <a:effectLst/>
-                <a:latin typeface="+mn-lt"/>
-                <a:ea typeface="+mn-ea"/>
-                <a:cs typeface="+mn-cs"/>
-              </a:rPr>
-              <a:t>} \</a:t>
-            </a:r>
-            <a:r>
-              <a:rPr lang="en-US" sz="1200" kern="1200" dirty="0" err="1">
-                <a:solidFill>
-                  <a:schemeClr val="tx1"/>
-                </a:solidFill>
-                <a:effectLst/>
-                <a:latin typeface="+mn-lt"/>
-                <a:ea typeface="+mn-ea"/>
-                <a:cs typeface="+mn-cs"/>
-              </a:rPr>
-              <a:t>mathbf</a:t>
-            </a:r>
-            <a:r>
-              <a:rPr lang="en-US" sz="1200" kern="1200" dirty="0">
-                <a:solidFill>
-                  <a:schemeClr val="tx1"/>
-                </a:solidFill>
-                <a:effectLst/>
-                <a:latin typeface="+mn-lt"/>
-                <a:ea typeface="+mn-ea"/>
-                <a:cs typeface="+mn-cs"/>
-              </a:rPr>
-              <a:t>{s} \\ \</a:t>
-            </a:r>
-            <a:r>
-              <a:rPr lang="en-US" sz="1200" kern="1200" dirty="0" err="1">
-                <a:solidFill>
-                  <a:schemeClr val="tx1"/>
-                </a:solidFill>
-                <a:effectLst/>
-                <a:latin typeface="+mn-lt"/>
-                <a:ea typeface="+mn-ea"/>
-                <a:cs typeface="+mn-cs"/>
-              </a:rPr>
-              <a:t>mathbf</a:t>
-            </a:r>
-            <a:r>
-              <a:rPr lang="en-US" sz="1200" kern="1200" dirty="0">
-                <a:solidFill>
-                  <a:schemeClr val="tx1"/>
-                </a:solidFill>
-                <a:effectLst/>
-                <a:latin typeface="+mn-lt"/>
-                <a:ea typeface="+mn-ea"/>
-                <a:cs typeface="+mn-cs"/>
-              </a:rPr>
-              <a:t>{v}\end{</a:t>
-            </a:r>
-            <a:r>
-              <a:rPr lang="en-US" sz="1200" kern="1200" dirty="0" err="1">
-                <a:solidFill>
-                  <a:schemeClr val="tx1"/>
-                </a:solidFill>
-                <a:effectLst/>
-                <a:latin typeface="+mn-lt"/>
-                <a:ea typeface="+mn-ea"/>
-                <a:cs typeface="+mn-cs"/>
-              </a:rPr>
-              <a:t>bmatrix</a:t>
-            </a:r>
-            <a:r>
-              <a:rPr lang="en-US" sz="1200" kern="1200" dirty="0">
-                <a:solidFill>
-                  <a:schemeClr val="tx1"/>
-                </a:solidFill>
-                <a:effectLst/>
-                <a:latin typeface="+mn-lt"/>
-                <a:ea typeface="+mn-ea"/>
-                <a:cs typeface="+mn-cs"/>
-              </a:rPr>
-              <a:t>} + \begin{</a:t>
-            </a:r>
-            <a:r>
-              <a:rPr lang="en-US" sz="1200" kern="1200" dirty="0" err="1">
-                <a:solidFill>
-                  <a:schemeClr val="tx1"/>
-                </a:solidFill>
-                <a:effectLst/>
-                <a:latin typeface="+mn-lt"/>
-                <a:ea typeface="+mn-ea"/>
-                <a:cs typeface="+mn-cs"/>
-              </a:rPr>
-              <a:t>bmatrix</a:t>
-            </a:r>
-            <a:r>
-              <a:rPr lang="en-US" sz="1200" kern="1200" dirty="0">
-                <a:solidFill>
-                  <a:schemeClr val="tx1"/>
-                </a:solidFill>
-                <a:effectLst/>
-                <a:latin typeface="+mn-lt"/>
-                <a:ea typeface="+mn-ea"/>
-                <a:cs typeface="+mn-cs"/>
-              </a:rPr>
-              <a:t>} 0 \\ I\end{</a:t>
-            </a:r>
-            <a:r>
-              <a:rPr lang="en-US" sz="1200" kern="1200" dirty="0" err="1">
-                <a:solidFill>
-                  <a:schemeClr val="tx1"/>
-                </a:solidFill>
-                <a:effectLst/>
-                <a:latin typeface="+mn-lt"/>
-                <a:ea typeface="+mn-ea"/>
-                <a:cs typeface="+mn-cs"/>
-              </a:rPr>
-              <a:t>bmatrix</a:t>
-            </a:r>
-            <a:r>
-              <a:rPr lang="en-US" sz="1200" kern="1200" dirty="0">
-                <a:solidFill>
-                  <a:schemeClr val="tx1"/>
-                </a:solidFill>
-                <a:effectLst/>
-                <a:latin typeface="+mn-lt"/>
-                <a:ea typeface="+mn-ea"/>
-                <a:cs typeface="+mn-cs"/>
-              </a:rPr>
-              <a:t>} \begin{</a:t>
-            </a:r>
-            <a:r>
-              <a:rPr lang="en-US" sz="1200" kern="1200" dirty="0" err="1">
-                <a:solidFill>
-                  <a:schemeClr val="tx1"/>
-                </a:solidFill>
-                <a:effectLst/>
-                <a:latin typeface="+mn-lt"/>
-                <a:ea typeface="+mn-ea"/>
-                <a:cs typeface="+mn-cs"/>
-              </a:rPr>
-              <a:t>bmatrix</a:t>
-            </a:r>
-            <a:r>
-              <a:rPr lang="en-US" sz="1200" kern="1200" dirty="0">
-                <a:solidFill>
-                  <a:schemeClr val="tx1"/>
-                </a:solidFill>
-                <a:effectLst/>
-                <a:latin typeface="+mn-lt"/>
-                <a:ea typeface="+mn-ea"/>
-                <a:cs typeface="+mn-cs"/>
-              </a:rPr>
-              <a:t>} \</a:t>
-            </a:r>
-            <a:r>
-              <a:rPr lang="en-US" sz="1200" kern="1200" dirty="0" err="1">
-                <a:solidFill>
-                  <a:schemeClr val="tx1"/>
-                </a:solidFill>
-                <a:effectLst/>
-                <a:latin typeface="+mn-lt"/>
-                <a:ea typeface="+mn-ea"/>
-                <a:cs typeface="+mn-cs"/>
-              </a:rPr>
-              <a:t>mathbf</a:t>
-            </a:r>
-            <a:r>
-              <a:rPr lang="en-US" sz="1200" kern="1200" dirty="0">
-                <a:solidFill>
-                  <a:schemeClr val="tx1"/>
-                </a:solidFill>
-                <a:effectLst/>
-                <a:latin typeface="+mn-lt"/>
-                <a:ea typeface="+mn-ea"/>
-                <a:cs typeface="+mn-cs"/>
-              </a:rPr>
-              <a:t>{a} \end{</a:t>
-            </a:r>
-            <a:r>
-              <a:rPr lang="en-US" sz="1200" kern="1200" dirty="0" err="1">
-                <a:solidFill>
-                  <a:schemeClr val="tx1"/>
-                </a:solidFill>
-                <a:effectLst/>
-                <a:latin typeface="+mn-lt"/>
-                <a:ea typeface="+mn-ea"/>
-                <a:cs typeface="+mn-cs"/>
-              </a:rPr>
-              <a:t>bmatrix</a:t>
-            </a:r>
-            <a:r>
-              <a:rPr lang="en-US" sz="1200" kern="1200" dirty="0">
-                <a:solidFill>
-                  <a:schemeClr val="tx1"/>
-                </a:solidFill>
-                <a:effectLst/>
-                <a:latin typeface="+mn-lt"/>
-                <a:ea typeface="+mn-ea"/>
-                <a:cs typeface="+mn-cs"/>
-              </a:rPr>
-              <a:t>}</a:t>
-            </a:r>
-          </a:p>
-          <a:p>
             <a:endParaRPr lang="en-US" dirty="0"/>
           </a:p>
         </p:txBody>
@@ -2849,202 +963,7 @@
           <a:bodyPr/>
           <a:lstStyle/>
           <a:p>
-            <a:r>
-              <a:rPr lang="de"/>
-              <a:t>\x(t_0) = \x_0, \</a:t>
-            </a:r>
-            <a:r>
-              <a:rPr lang="de" err="1"/>
-              <a:t>qquad</a:t>
-            </a:r>
-            <a:r>
-              <a:rPr lang="de"/>
-              <a:t> \x(</a:t>
-            </a:r>
-            <a:r>
-              <a:rPr lang="de" err="1"/>
-              <a:t>t_f</a:t>
-            </a:r>
-            <a:r>
-              <a:rPr lang="de"/>
-              <a:t>) = \</a:t>
-            </a:r>
-            <a:r>
-              <a:rPr lang="de" err="1"/>
-              <a:t>x_f</a:t>
-            </a:r>
-            <a:endParaRPr lang="de"/>
-          </a:p>
-          <a:p>
-            <a:endParaRPr lang="de"/>
-          </a:p>
-          <a:p>
-            <a:pPr marL="0" marR="0" lvl="0" indent="0" algn="l" defTabSz="914400" rtl="0" eaLnBrk="1" fontAlgn="auto" latinLnBrk="0" hangingPunct="1">
-              <a:lnSpc>
-                <a:spcPct val="100000"/>
-              </a:lnSpc>
-              <a:spcBef>
-                <a:spcPts val="0"/>
-              </a:spcBef>
-              <a:spcAft>
-                <a:spcPts val="0"/>
-              </a:spcAft>
-              <a:buClrTx/>
-              <a:buSzTx/>
-              <a:buFontTx/>
-              <a:buNone/>
-              <a:tabLst/>
-              <a:defRPr/>
-            </a:pPr>
-            <a:r>
-              <a:rPr lang="de" sz="1200" kern="1200">
-                <a:solidFill>
-                  <a:schemeClr val="tx1"/>
-                </a:solidFill>
-                <a:effectLst/>
-                <a:latin typeface="+mn-lt"/>
-                <a:ea typeface="+mn-ea"/>
-                <a:cs typeface="+mn-cs"/>
-              </a:rPr>
-              <a:t>\</a:t>
-            </a:r>
-            <a:r>
-              <a:rPr lang="de" sz="1200" kern="1200" err="1">
-                <a:solidFill>
-                  <a:schemeClr val="tx1"/>
-                </a:solidFill>
-                <a:effectLst/>
-                <a:latin typeface="+mn-lt"/>
-                <a:ea typeface="+mn-ea"/>
-                <a:cs typeface="+mn-cs"/>
-              </a:rPr>
-              <a:t>underbar</a:t>
-            </a:r>
-            <a:r>
-              <a:rPr lang="de" sz="1200" kern="1200">
-                <a:solidFill>
-                  <a:schemeClr val="tx1"/>
-                </a:solidFill>
-                <a:effectLst/>
-                <a:latin typeface="+mn-lt"/>
-                <a:ea typeface="+mn-ea"/>
-                <a:cs typeface="+mn-cs"/>
-              </a:rPr>
-              <a:t>{$X$}\</a:t>
-            </a:r>
-            <a:r>
-              <a:rPr lang="de" sz="1200" kern="1200" err="1">
-                <a:solidFill>
-                  <a:schemeClr val="tx1"/>
-                </a:solidFill>
-                <a:effectLst/>
-                <a:latin typeface="+mn-lt"/>
-                <a:ea typeface="+mn-ea"/>
-                <a:cs typeface="+mn-cs"/>
-              </a:rPr>
-              <a:t>leq</a:t>
-            </a:r>
-            <a:r>
-              <a:rPr lang="de" sz="1200" kern="1200">
-                <a:solidFill>
-                  <a:schemeClr val="tx1"/>
-                </a:solidFill>
-                <a:effectLst/>
-                <a:latin typeface="+mn-lt"/>
-                <a:ea typeface="+mn-ea"/>
-                <a:cs typeface="+mn-cs"/>
-              </a:rPr>
-              <a:t> \x(t) \</a:t>
-            </a:r>
-            <a:r>
-              <a:rPr lang="de" sz="1200" kern="1200" err="1">
-                <a:solidFill>
-                  <a:schemeClr val="tx1"/>
-                </a:solidFill>
-                <a:effectLst/>
-                <a:latin typeface="+mn-lt"/>
-                <a:ea typeface="+mn-ea"/>
-                <a:cs typeface="+mn-cs"/>
-              </a:rPr>
-              <a:t>leq</a:t>
-            </a:r>
-            <a:r>
-              <a:rPr lang="de" sz="1200" kern="1200">
-                <a:solidFill>
-                  <a:schemeClr val="tx1"/>
-                </a:solidFill>
-                <a:effectLst/>
-                <a:latin typeface="+mn-lt"/>
-                <a:ea typeface="+mn-ea"/>
-                <a:cs typeface="+mn-cs"/>
-              </a:rPr>
-              <a:t> \</a:t>
-            </a:r>
-            <a:r>
-              <a:rPr lang="de" sz="1200" kern="1200" err="1">
-                <a:solidFill>
-                  <a:schemeClr val="tx1"/>
-                </a:solidFill>
-                <a:effectLst/>
-                <a:latin typeface="+mn-lt"/>
-                <a:ea typeface="+mn-ea"/>
-                <a:cs typeface="+mn-cs"/>
-              </a:rPr>
-              <a:t>overline</a:t>
-            </a:r>
-            <a:r>
-              <a:rPr lang="de" sz="1200" kern="1200">
-                <a:solidFill>
-                  <a:schemeClr val="tx1"/>
-                </a:solidFill>
-                <a:effectLst/>
-                <a:latin typeface="+mn-lt"/>
-                <a:ea typeface="+mn-ea"/>
-                <a:cs typeface="+mn-cs"/>
-              </a:rPr>
-              <a:t> X</a:t>
-            </a:r>
-          </a:p>
-          <a:p>
-            <a:endParaRPr lang="en-US"/>
-          </a:p>
-          <a:p>
-            <a:r>
-              <a:rPr lang="en-US"/>
-              <a:t>\</a:t>
-            </a:r>
-            <a:r>
-              <a:rPr lang="en-US" err="1"/>
-              <a:t>underbar</a:t>
-            </a:r>
-            <a:r>
-              <a:rPr lang="en-US"/>
-              <a:t>{$U$}\</a:t>
-            </a:r>
-            <a:r>
-              <a:rPr lang="en-US" err="1"/>
-              <a:t>leq</a:t>
-            </a:r>
-            <a:r>
-              <a:rPr lang="en-US"/>
-              <a:t> \</a:t>
-            </a:r>
-            <a:r>
-              <a:rPr lang="en-US" err="1"/>
-              <a:t>uc</a:t>
-            </a:r>
-            <a:r>
-              <a:rPr lang="en-US"/>
-              <a:t>(t) \</a:t>
-            </a:r>
-            <a:r>
-              <a:rPr lang="en-US" err="1"/>
-              <a:t>leq</a:t>
-            </a:r>
-            <a:r>
-              <a:rPr lang="en-US"/>
-              <a:t> \overline U</a:t>
-            </a:r>
+            <a:endParaRPr lang="en-US" dirty="0"/>
           </a:p>
         </p:txBody>
       </p:sp>
@@ -3128,149 +1047,6 @@
           <a:bodyPr/>
           <a:lstStyle/>
           <a:p>
-            <a:br>
-              <a:rPr lang="en-US" sz="1200" kern="1200" dirty="0">
-                <a:solidFill>
-                  <a:schemeClr val="tx1"/>
-                </a:solidFill>
-                <a:effectLst/>
-                <a:latin typeface="+mn-lt"/>
-                <a:ea typeface="+mn-ea"/>
-                <a:cs typeface="+mn-cs"/>
-              </a:rPr>
-            </a:br>
-            <a:endParaRPr lang="en-US" sz="1200" kern="1200" dirty="0">
-              <a:solidFill>
-                <a:schemeClr val="tx1"/>
-              </a:solidFill>
-              <a:effectLst/>
-              <a:latin typeface="+mn-lt"/>
-              <a:ea typeface="+mn-ea"/>
-              <a:cs typeface="+mn-cs"/>
-            </a:endParaRPr>
-          </a:p>
-          <a:p>
-            <a:r>
-              <a:rPr lang="en-US" sz="1200" kern="1200" dirty="0">
-                <a:solidFill>
-                  <a:schemeClr val="tx1"/>
-                </a:solidFill>
-                <a:effectLst/>
-                <a:latin typeface="+mn-lt"/>
-                <a:ea typeface="+mn-ea"/>
-                <a:cs typeface="+mn-cs"/>
-              </a:rPr>
-              <a:t>f(\x^*) \</a:t>
-            </a:r>
-            <a:r>
-              <a:rPr lang="en-US" sz="1200" kern="1200" dirty="0" err="1">
-                <a:solidFill>
-                  <a:schemeClr val="tx1"/>
-                </a:solidFill>
-                <a:effectLst/>
-                <a:latin typeface="+mn-lt"/>
-                <a:ea typeface="+mn-ea"/>
-                <a:cs typeface="+mn-cs"/>
-              </a:rPr>
-              <a:t>leq</a:t>
-            </a:r>
-            <a:r>
-              <a:rPr lang="en-US" sz="1200" kern="1200" dirty="0">
-                <a:solidFill>
-                  <a:schemeClr val="tx1"/>
-                </a:solidFill>
-                <a:effectLst/>
-                <a:latin typeface="+mn-lt"/>
-                <a:ea typeface="+mn-ea"/>
-                <a:cs typeface="+mn-cs"/>
-              </a:rPr>
-              <a:t> f(\x), \</a:t>
-            </a:r>
-            <a:r>
-              <a:rPr lang="en-US" sz="1200" kern="1200" dirty="0" err="1">
-                <a:solidFill>
-                  <a:schemeClr val="tx1"/>
-                </a:solidFill>
-                <a:effectLst/>
-                <a:latin typeface="+mn-lt"/>
-                <a:ea typeface="+mn-ea"/>
-                <a:cs typeface="+mn-cs"/>
-              </a:rPr>
-              <a:t>qquad</a:t>
-            </a:r>
-            <a:r>
-              <a:rPr lang="en-US" sz="1200" kern="1200" dirty="0">
-                <a:solidFill>
-                  <a:schemeClr val="tx1"/>
-                </a:solidFill>
-                <a:effectLst/>
-                <a:latin typeface="+mn-lt"/>
-                <a:ea typeface="+mn-ea"/>
-                <a:cs typeface="+mn-cs"/>
-              </a:rPr>
-              <a:t> \</a:t>
-            </a:r>
-            <a:r>
-              <a:rPr lang="en-US" sz="1200" kern="1200" dirty="0" err="1">
-                <a:solidFill>
-                  <a:schemeClr val="tx1"/>
-                </a:solidFill>
-                <a:effectLst/>
-                <a:latin typeface="+mn-lt"/>
-                <a:ea typeface="+mn-ea"/>
-                <a:cs typeface="+mn-cs"/>
-              </a:rPr>
-              <a:t>forall</a:t>
-            </a:r>
-            <a:r>
-              <a:rPr lang="en-US" sz="1200" kern="1200" dirty="0">
-                <a:solidFill>
-                  <a:schemeClr val="tx1"/>
-                </a:solidFill>
-                <a:effectLst/>
-                <a:latin typeface="+mn-lt"/>
-                <a:ea typeface="+mn-ea"/>
-                <a:cs typeface="+mn-cs"/>
-              </a:rPr>
-              <a:t> \x \, \big \vert \|\x - \x^*\| &lt; \epsilon</a:t>
-            </a:r>
-          </a:p>
-          <a:p>
-            <a:endParaRPr lang="en-US" dirty="0"/>
-          </a:p>
-          <a:p>
-            <a:r>
-              <a:rPr lang="en-US" dirty="0"/>
-              <a:t>f(\x^*) \</a:t>
-            </a:r>
-            <a:r>
-              <a:rPr lang="en-US" dirty="0" err="1"/>
-              <a:t>leq</a:t>
-            </a:r>
-            <a:r>
-              <a:rPr lang="en-US" dirty="0"/>
-              <a:t> f(\x), \</a:t>
-            </a:r>
-            <a:r>
-              <a:rPr lang="en-US" dirty="0" err="1"/>
-              <a:t>qquad</a:t>
-            </a:r>
-            <a:r>
-              <a:rPr lang="en-US" dirty="0"/>
-              <a:t> \</a:t>
-            </a:r>
-            <a:r>
-              <a:rPr lang="en-US" dirty="0" err="1"/>
-              <a:t>forall</a:t>
-            </a:r>
-            <a:r>
-              <a:rPr lang="en-US" dirty="0"/>
-              <a:t> \x \in \</a:t>
-            </a:r>
-            <a:r>
-              <a:rPr lang="en-US" dirty="0" err="1"/>
-              <a:t>reals^n</a:t>
-            </a:r>
             <a:endParaRPr lang="en-US" dirty="0"/>
           </a:p>
         </p:txBody>
@@ -3292,7 +1068,7 @@
           <a:p>
             <a:fld id="{63B2D7EC-928D-0645-AAE8-498D7443D60E}" type="slidenum">
               <a:rPr lang="en-US" smtClean="0"/>
-              <a:t>35</a:t>
+              <a:t>26</a:t>
             </a:fld>
             <a:endParaRPr lang="en-US"/>
           </a:p>
@@ -3301,7 +1077,7 @@
     </p:spTree>
     <p:extLst>
       <p:ext uri="{BB962C8B-B14F-4D97-AF65-F5344CB8AC3E}">
-        <p14:creationId xmlns:p14="http://schemas.microsoft.com/office/powerpoint/2010/main" val="1454016104"/>
+        <p14:creationId xmlns:p14="http://schemas.microsoft.com/office/powerpoint/2010/main" val="4168400642"/>
       </p:ext>
     </p:extLst>
   </p:cSld>
@@ -3340,682 +1116,25 @@
         </p:nvSpPr>
         <p:spPr/>
       </p:sp>
-      <mc:AlternateContent xmlns:mc="http://schemas.openxmlformats.org/markup-compatibility/2006">
-        <mc:Choice xmlns:a14="http://schemas.microsoft.com/office/drawing/2010/main" Requires="a14">
-          <p:sp>
-            <p:nvSpPr>
-              <p:cNvPr id="3" name="Notes Placeholder 2"/>
-              <p:cNvSpPr>
-                <a:spLocks noGrp="1"/>
-              </p:cNvSpPr>
-              <p:nvPr>
-                <p:ph type="body" idx="1"/>
-              </p:nvPr>
-            </p:nvSpPr>
-            <p:spPr/>
-            <p:txBody>
-              <a:bodyPr/>
-              <a:lstStyle/>
-              <a:p>
-                <a:pPr marL="0" marR="0" lvl="0" indent="0" algn="l" defTabSz="914400" rtl="0" eaLnBrk="1" fontAlgn="auto" latinLnBrk="0" hangingPunct="1">
-                  <a:lnSpc>
-                    <a:spcPct val="100000"/>
-                  </a:lnSpc>
-                  <a:spcBef>
-                    <a:spcPts val="0"/>
-                  </a:spcBef>
-                  <a:spcAft>
-                    <a:spcPts val="0"/>
-                  </a:spcAft>
-                  <a:buClrTx/>
-                  <a:buSzTx/>
-                  <a:buFontTx/>
-                  <a:buNone/>
-                  <a:tabLst/>
-                  <a:defRPr/>
-                </a:pPr>
-                <a:r>
-                  <a:rPr lang="it" sz="1200" kern="1200" dirty="0">
-                    <a:solidFill>
-                      <a:schemeClr val="tx1"/>
-                    </a:solidFill>
-                    <a:effectLst/>
-                    <a:latin typeface="+mn-lt"/>
-                    <a:ea typeface="+mn-ea"/>
-                    <a:cs typeface="+mn-cs"/>
-                  </a:rPr>
-                  <a:t>f(\x^*+\Delta \x) - f(\x^*) \approx \nabla f(\x^*)^\prime\Delta \x</a:t>
-                </a:r>
-              </a:p>
-              <a:p>
-                <a:r>
-                  <a:rPr lang="en-US" dirty="0"/>
-                  <a:t>f(\x^*+\Delta \x) - f(\x^*) \</a:t>
-                </a:r>
-                <a:r>
-                  <a:rPr lang="en-US" dirty="0" err="1"/>
-                  <a:t>approx</a:t>
-                </a:r>
-                <a:r>
-                  <a:rPr lang="en-US" dirty="0"/>
-                  <a:t> \</a:t>
-                </a:r>
-                <a:r>
-                  <a:rPr lang="en-US" dirty="0" err="1"/>
-                  <a:t>nabla</a:t>
-                </a:r>
-                <a:r>
-                  <a:rPr lang="en-US" dirty="0"/>
-                  <a:t> f(\x^*)^\prime\Delta \x +\frac{1}{2}\Delta \x ^{\prime} \nabla^2f(\x^*)\Delta \x </a:t>
-                </a:r>
-              </a:p>
-              <a:p>
-                <a:endParaRPr lang="en-US" dirty="0"/>
-              </a:p>
-              <a:p>
-                <a:r>
-                  <a:rPr lang="en-US" sz="1200" b="0" i="0" kern="1200" dirty="0">
-                    <a:solidFill>
-                      <a:schemeClr val="tx1"/>
-                    </a:solidFill>
-                    <a:effectLst/>
-                    <a:latin typeface="+mn-lt"/>
-                    <a:ea typeface="+mn-ea"/>
-                    <a:cs typeface="+mn-cs"/>
-                  </a:rPr>
-                  <a:t>That is, the entry of the </a:t>
-                </a:r>
-                <a:r>
-                  <a:rPr lang="en-US" sz="1200" b="0" i="1" kern="1200" dirty="0" err="1">
-                    <a:solidFill>
-                      <a:schemeClr val="tx1"/>
-                    </a:solidFill>
-                    <a:effectLst/>
-                    <a:latin typeface="+mn-lt"/>
-                    <a:ea typeface="+mn-ea"/>
-                    <a:cs typeface="+mn-cs"/>
-                  </a:rPr>
-                  <a:t>i</a:t>
-                </a:r>
-                <a:r>
-                  <a:rPr lang="en-US" sz="1200" b="0" i="0" kern="1200" dirty="0" err="1">
-                    <a:solidFill>
-                      <a:schemeClr val="tx1"/>
-                    </a:solidFill>
-                    <a:effectLst/>
-                    <a:latin typeface="+mn-lt"/>
-                    <a:ea typeface="+mn-ea"/>
-                    <a:cs typeface="+mn-cs"/>
-                  </a:rPr>
-                  <a:t>th</a:t>
-                </a:r>
-                <a:r>
-                  <a:rPr lang="en-US" sz="1200" b="0" i="0" kern="1200" dirty="0">
-                    <a:solidFill>
-                      <a:schemeClr val="tx1"/>
-                    </a:solidFill>
-                    <a:effectLst/>
-                    <a:latin typeface="+mn-lt"/>
-                    <a:ea typeface="+mn-ea"/>
-                    <a:cs typeface="+mn-cs"/>
-                  </a:rPr>
-                  <a:t> row and the </a:t>
-                </a:r>
-                <a:r>
-                  <a:rPr lang="en-US" sz="1200" b="0" i="1" kern="1200" dirty="0" err="1">
-                    <a:solidFill>
-                      <a:schemeClr val="tx1"/>
-                    </a:solidFill>
-                    <a:effectLst/>
-                    <a:latin typeface="+mn-lt"/>
-                    <a:ea typeface="+mn-ea"/>
-                    <a:cs typeface="+mn-cs"/>
-                  </a:rPr>
-                  <a:t>j</a:t>
-                </a:r>
-                <a:r>
-                  <a:rPr lang="en-US" sz="1200" b="0" i="0" kern="1200" dirty="0" err="1">
-                    <a:solidFill>
-                      <a:schemeClr val="tx1"/>
-                    </a:solidFill>
-                    <a:effectLst/>
-                    <a:latin typeface="+mn-lt"/>
-                    <a:ea typeface="+mn-ea"/>
-                    <a:cs typeface="+mn-cs"/>
-                  </a:rPr>
-                  <a:t>th</a:t>
-                </a:r>
-                <a:r>
-                  <a:rPr lang="en-US" sz="1200" b="0" i="0" kern="1200" dirty="0">
-                    <a:solidFill>
-                      <a:schemeClr val="tx1"/>
-                    </a:solidFill>
-                    <a:effectLst/>
-                    <a:latin typeface="+mn-lt"/>
-                    <a:ea typeface="+mn-ea"/>
-                    <a:cs typeface="+mn-cs"/>
-                  </a:rPr>
-                  <a:t> column is</a:t>
-                </a:r>
-              </a:p>
-              <a:p>
-                <a14:m>
-                  <m:oMathPara xmlns:m="http://schemas.openxmlformats.org/officeDocument/2006/math">
-                    <m:oMathParaPr>
-                      <m:jc m:val="centerGroup"/>
-                    </m:oMathParaPr>
-                    <m:oMath xmlns:m="http://schemas.openxmlformats.org/officeDocument/2006/math">
-                      <m:sSub>
-                        <m:sSubPr>
-                          <m:ctrlPr>
-                            <a:rPr lang="ar-AE" sz="1200" kern="1200">
-                              <a:solidFill>
-                                <a:schemeClr val="tx1"/>
-                              </a:solidFill>
-                              <a:latin typeface="+mn-lt"/>
-                              <a:ea typeface="+mn-ea"/>
-                              <a:cs typeface="+mn-cs"/>
-                            </a:rPr>
-                          </m:ctrlPr>
-                        </m:sSubPr>
-                        <m:e>
-                          <m:d>
-                            <m:dPr>
-                              <m:ctrlPr>
-                                <a:rPr lang="ar-AE" sz="1200" kern="1200">
-                                  <a:solidFill>
-                                    <a:schemeClr val="tx1"/>
-                                  </a:solidFill>
-                                  <a:latin typeface="+mn-lt"/>
-                                  <a:ea typeface="+mn-ea"/>
-                                  <a:cs typeface="+mn-cs"/>
-                                </a:rPr>
-                              </m:ctrlPr>
-                            </m:dPr>
-                            <m:e>
-                              <m:sSub>
-                                <m:sSubPr>
-                                  <m:ctrlPr>
-                                    <a:rPr lang="ar-AE" sz="1200" i="1" kern="1200">
-                                      <a:solidFill>
-                                        <a:schemeClr val="tx1"/>
-                                      </a:solidFill>
-                                      <a:latin typeface="+mn-lt"/>
-                                      <a:ea typeface="+mn-ea"/>
-                                      <a:cs typeface="+mn-cs"/>
-                                    </a:rPr>
-                                  </m:ctrlPr>
-                                </m:sSubPr>
-                                <m:e>
-                                  <m:r>
-                                    <a:rPr lang="ar-AE" sz="1200" b="1" i="0" kern="1200">
-                                      <a:solidFill>
-                                        <a:schemeClr val="tx1"/>
-                                      </a:solidFill>
-                                      <a:latin typeface="+mn-lt"/>
-                                      <a:ea typeface="+mn-ea"/>
-                                      <a:cs typeface="+mn-cs"/>
-                                    </a:rPr>
-                                    <m:t>𝐇</m:t>
-                                  </m:r>
-                                </m:e>
-                                <m:sub>
-                                  <m:r>
-                                    <a:rPr lang="ar-AE" sz="1200" b="0" i="1" kern="1200">
-                                      <a:solidFill>
-                                        <a:schemeClr val="tx1"/>
-                                      </a:solidFill>
-                                      <a:latin typeface="+mn-lt"/>
-                                      <a:ea typeface="+mn-ea"/>
-                                      <a:cs typeface="+mn-cs"/>
-                                    </a:rPr>
-                                    <m:t>𝑓</m:t>
-                                  </m:r>
-                                </m:sub>
-                              </m:sSub>
-                            </m:e>
-                          </m:d>
-                        </m:e>
-                        <m:sub>
-                          <m:r>
-                            <a:rPr lang="ar-AE" sz="1200" b="0" i="1" kern="1200">
-                              <a:solidFill>
-                                <a:schemeClr val="tx1"/>
-                              </a:solidFill>
-                              <a:latin typeface="+mn-lt"/>
-                              <a:ea typeface="+mn-ea"/>
-                              <a:cs typeface="+mn-cs"/>
-                            </a:rPr>
-                            <m:t>𝑖</m:t>
-                          </m:r>
-                          <m:r>
-                            <a:rPr lang="ar-AE" sz="1200" b="0" i="0" kern="1200">
-                              <a:solidFill>
-                                <a:schemeClr val="tx1"/>
-                              </a:solidFill>
-                              <a:latin typeface="+mn-lt"/>
-                              <a:ea typeface="+mn-ea"/>
-                              <a:cs typeface="+mn-cs"/>
-                            </a:rPr>
-                            <m:t>,</m:t>
-                          </m:r>
-                          <m:r>
-                            <a:rPr lang="ar-AE" sz="1200" b="0" i="1" kern="1200">
-                              <a:solidFill>
-                                <a:schemeClr val="tx1"/>
-                              </a:solidFill>
-                              <a:latin typeface="+mn-lt"/>
-                              <a:ea typeface="+mn-ea"/>
-                              <a:cs typeface="+mn-cs"/>
-                            </a:rPr>
-                            <m:t>𝑗</m:t>
-                          </m:r>
-                        </m:sub>
-                      </m:sSub>
-                      <m:r>
-                        <a:rPr lang="ar-AE" sz="1200" b="0" i="0" kern="1200">
-                          <a:solidFill>
-                            <a:schemeClr val="tx1"/>
-                          </a:solidFill>
-                          <a:latin typeface="+mn-lt"/>
-                          <a:ea typeface="+mn-ea"/>
-                          <a:cs typeface="+mn-cs"/>
-                        </a:rPr>
-                        <m:t>=</m:t>
-                      </m:r>
-                      <m:f>
-                        <m:fPr>
-                          <m:ctrlPr>
-                            <a:rPr lang="ar-AE" sz="1200" b="0" i="1" kern="1200">
-                              <a:solidFill>
-                                <a:schemeClr val="tx1"/>
-                              </a:solidFill>
-                              <a:latin typeface="+mn-lt"/>
-                              <a:ea typeface="+mn-ea"/>
-                              <a:cs typeface="+mn-cs"/>
-                            </a:rPr>
-                          </m:ctrlPr>
-                        </m:fPr>
-                        <m:num>
-                          <m:sSup>
-                            <m:sSupPr>
-                              <m:ctrlPr>
-                                <a:rPr lang="ar-AE" sz="1200" b="0" i="1" kern="1200">
-                                  <a:solidFill>
-                                    <a:schemeClr val="tx1"/>
-                                  </a:solidFill>
-                                  <a:latin typeface="+mn-lt"/>
-                                  <a:ea typeface="+mn-ea"/>
-                                  <a:cs typeface="+mn-cs"/>
-                                </a:rPr>
-                              </m:ctrlPr>
-                            </m:sSupPr>
-                            <m:e>
-                              <m:r>
-                                <a:rPr lang="ar-AE" sz="1200" b="0" i="0" kern="1200">
-                                  <a:solidFill>
-                                    <a:schemeClr val="tx1"/>
-                                  </a:solidFill>
-                                  <a:latin typeface="+mn-lt"/>
-                                  <a:ea typeface="+mn-ea"/>
-                                  <a:cs typeface="+mn-cs"/>
-                                </a:rPr>
-                                <m:t>∂</m:t>
-                              </m:r>
-                            </m:e>
-                            <m:sup>
-                              <m:r>
-                                <a:rPr lang="ar-AE" sz="1200" b="0" i="0" kern="1200">
-                                  <a:solidFill>
-                                    <a:schemeClr val="tx1"/>
-                                  </a:solidFill>
-                                  <a:latin typeface="+mn-lt"/>
-                                  <a:ea typeface="+mn-ea"/>
-                                  <a:cs typeface="+mn-cs"/>
-                                </a:rPr>
-                                <m:t>2</m:t>
-                              </m:r>
-                            </m:sup>
-                          </m:sSup>
-                          <m:r>
-                            <a:rPr lang="ar-AE" sz="1200" b="0" i="1" kern="1200">
-                              <a:solidFill>
-                                <a:schemeClr val="tx1"/>
-                              </a:solidFill>
-                              <a:latin typeface="+mn-lt"/>
-                              <a:ea typeface="+mn-ea"/>
-                              <a:cs typeface="+mn-cs"/>
-                            </a:rPr>
-                            <m:t>𝑓</m:t>
-                          </m:r>
-                        </m:num>
-                        <m:den>
-                          <m:r>
-                            <a:rPr lang="ar-AE" sz="1200" b="0" i="0" kern="1200">
-                              <a:solidFill>
-                                <a:schemeClr val="tx1"/>
-                              </a:solidFill>
-                              <a:latin typeface="+mn-lt"/>
-                              <a:ea typeface="+mn-ea"/>
-                              <a:cs typeface="+mn-cs"/>
-                            </a:rPr>
-                            <m:t>∂</m:t>
-                          </m:r>
-                          <m:sSub>
-                            <m:sSubPr>
-                              <m:ctrlPr>
-                                <a:rPr lang="ar-AE" sz="1200" b="0" i="1" kern="1200">
-                                  <a:solidFill>
-                                    <a:schemeClr val="tx1"/>
-                                  </a:solidFill>
-                                  <a:latin typeface="+mn-lt"/>
-                                  <a:ea typeface="+mn-ea"/>
-                                  <a:cs typeface="+mn-cs"/>
-                                </a:rPr>
-                              </m:ctrlPr>
-                            </m:sSubPr>
-                            <m:e>
-                              <m:r>
-                                <a:rPr lang="ar-AE" sz="1200" b="0" i="1" kern="1200">
-                                  <a:solidFill>
-                                    <a:schemeClr val="tx1"/>
-                                  </a:solidFill>
-                                  <a:latin typeface="+mn-lt"/>
-                                  <a:ea typeface="+mn-ea"/>
-                                  <a:cs typeface="+mn-cs"/>
-                                </a:rPr>
-                                <m:t>𝑥</m:t>
-                              </m:r>
-                            </m:e>
-                            <m:sub>
-                              <m:r>
-                                <a:rPr lang="ar-AE" sz="1200" b="0" i="1" kern="1200">
-                                  <a:solidFill>
-                                    <a:schemeClr val="tx1"/>
-                                  </a:solidFill>
-                                  <a:latin typeface="+mn-lt"/>
-                                  <a:ea typeface="+mn-ea"/>
-                                  <a:cs typeface="+mn-cs"/>
-                                </a:rPr>
-                                <m:t>𝑖</m:t>
-                              </m:r>
-                            </m:sub>
-                          </m:sSub>
-                          <m:r>
-                            <a:rPr lang="ar-AE" sz="1200" b="0" i="0" kern="1200">
-                              <a:solidFill>
-                                <a:schemeClr val="tx1"/>
-                              </a:solidFill>
-                              <a:latin typeface="+mn-lt"/>
-                              <a:ea typeface="+mn-ea"/>
-                              <a:cs typeface="+mn-cs"/>
-                            </a:rPr>
-                            <m:t> ∂</m:t>
-                          </m:r>
-                          <m:sSub>
-                            <m:sSubPr>
-                              <m:ctrlPr>
-                                <a:rPr lang="ar-AE" sz="1200" b="0" i="1" kern="1200">
-                                  <a:solidFill>
-                                    <a:schemeClr val="tx1"/>
-                                  </a:solidFill>
-                                  <a:latin typeface="+mn-lt"/>
-                                  <a:ea typeface="+mn-ea"/>
-                                  <a:cs typeface="+mn-cs"/>
-                                </a:rPr>
-                              </m:ctrlPr>
-                            </m:sSubPr>
-                            <m:e>
-                              <m:r>
-                                <a:rPr lang="ar-AE" sz="1200" b="0" i="1" kern="1200">
-                                  <a:solidFill>
-                                    <a:schemeClr val="tx1"/>
-                                  </a:solidFill>
-                                  <a:latin typeface="+mn-lt"/>
-                                  <a:ea typeface="+mn-ea"/>
-                                  <a:cs typeface="+mn-cs"/>
-                                </a:rPr>
-                                <m:t>𝑥</m:t>
-                              </m:r>
-                            </m:e>
-                            <m:sub>
-                              <m:r>
-                                <a:rPr lang="ar-AE" sz="1200" b="0" i="1" kern="1200">
-                                  <a:solidFill>
-                                    <a:schemeClr val="tx1"/>
-                                  </a:solidFill>
-                                  <a:latin typeface="+mn-lt"/>
-                                  <a:ea typeface="+mn-ea"/>
-                                  <a:cs typeface="+mn-cs"/>
-                                </a:rPr>
-                                <m:t>𝑗</m:t>
-                              </m:r>
-                            </m:sub>
-                          </m:sSub>
-                        </m:den>
-                      </m:f>
-                      <m:r>
-                        <a:rPr lang="ar-AE" sz="1200" b="0" i="0" kern="1200">
-                          <a:solidFill>
-                            <a:schemeClr val="tx1"/>
-                          </a:solidFill>
-                          <a:latin typeface="+mn-lt"/>
-                          <a:ea typeface="+mn-ea"/>
-                          <a:cs typeface="+mn-cs"/>
-                        </a:rPr>
-                        <m:t>.</m:t>
-                      </m:r>
-                    </m:oMath>
-                  </m:oMathPara>
-                </a14:m>
-                <a:endParaRPr lang="ar-AE" b="0" dirty="0"/>
-              </a:p>
-              <a:p>
-                <a:endParaRPr lang="en-US" dirty="0"/>
-              </a:p>
-            </p:txBody>
-          </p:sp>
-        </mc:Choice>
-        <mc:Fallback>
-          <p:sp>
-            <p:nvSpPr>
-              <p:cNvPr id="3" name="Notes Placeholder 2"/>
-              <p:cNvSpPr>
-                <a:spLocks noGrp="1"/>
-              </p:cNvSpPr>
-              <p:nvPr>
-                <p:ph type="body" idx="1"/>
-              </p:nvPr>
-            </p:nvSpPr>
-            <p:spPr/>
-            <p:txBody>
-              <a:bodyPr/>
-              <a:lstStyle/>
-              <a:p>
-                <a:pPr marL="0" marR="0" lvl="0" indent="0" algn="l" defTabSz="914400" rtl="0" eaLnBrk="1" fontAlgn="auto" latinLnBrk="0" hangingPunct="1">
-                  <a:lnSpc>
-                    <a:spcPct val="100000"/>
-                  </a:lnSpc>
-                  <a:spcBef>
-                    <a:spcPts val="0"/>
-                  </a:spcBef>
-                  <a:spcAft>
-                    <a:spcPts val="0"/>
-                  </a:spcAft>
-                  <a:buClrTx/>
-                  <a:buSzTx/>
-                  <a:buFontTx/>
-                  <a:buNone/>
-                  <a:tabLst/>
-                  <a:defRPr/>
-                </a:pPr>
-                <a:r>
-                  <a:rPr lang="it" sz="1200" kern="1200" dirty="0">
-                    <a:solidFill>
-                      <a:schemeClr val="tx1"/>
-                    </a:solidFill>
-                    <a:effectLst/>
-                    <a:latin typeface="+mn-lt"/>
-                    <a:ea typeface="+mn-ea"/>
-                    <a:cs typeface="+mn-cs"/>
-                  </a:rPr>
-                  <a:t>f(\x^*+\Delta \x) - f(\x^*) \approx \nabla f(\x^*)^\prime\Delta \x</a:t>
-                </a:r>
-              </a:p>
-              <a:p>
-                <a:r>
-                  <a:rPr lang="en-US" dirty="0"/>
-                  <a:t>f(\x^*+\Delta \x) - f(\x^*) \</a:t>
-                </a:r>
-                <a:r>
-                  <a:rPr lang="en-US" dirty="0" err="1"/>
-                  <a:t>approx</a:t>
-                </a:r>
-                <a:r>
-                  <a:rPr lang="en-US" dirty="0"/>
-                  <a:t> \</a:t>
-                </a:r>
-                <a:r>
-                  <a:rPr lang="en-US" dirty="0" err="1"/>
-                  <a:t>nabla</a:t>
-                </a:r>
-                <a:r>
-                  <a:rPr lang="en-US" dirty="0"/>
-                  <a:t> f(\x^*)^\prime\Delta \x +\frac{1}{2}\Delta \x ^{\prime} \nabla^2f(\x^*)\Delta \x </a:t>
-                </a:r>
-              </a:p>
-              <a:p>
-                <a:endParaRPr lang="en-US" dirty="0"/>
-              </a:p>
-              <a:p>
-                <a:r>
-                  <a:rPr lang="en-US" sz="1200" b="0" i="0" kern="1200" dirty="0">
-                    <a:solidFill>
-                      <a:schemeClr val="tx1"/>
-                    </a:solidFill>
-                    <a:effectLst/>
-                    <a:latin typeface="+mn-lt"/>
-                    <a:ea typeface="+mn-ea"/>
-                    <a:cs typeface="+mn-cs"/>
-                  </a:rPr>
-                  <a:t>That is, the entry of the </a:t>
-                </a:r>
-                <a:r>
-                  <a:rPr lang="en-US" sz="1200" b="0" i="1" kern="1200" dirty="0" err="1">
-                    <a:solidFill>
-                      <a:schemeClr val="tx1"/>
-                    </a:solidFill>
-                    <a:effectLst/>
-                    <a:latin typeface="+mn-lt"/>
-                    <a:ea typeface="+mn-ea"/>
-                    <a:cs typeface="+mn-cs"/>
-                  </a:rPr>
-                  <a:t>i</a:t>
-                </a:r>
-                <a:r>
-                  <a:rPr lang="en-US" sz="1200" b="0" i="0" kern="1200" dirty="0" err="1">
-                    <a:solidFill>
-                      <a:schemeClr val="tx1"/>
-                    </a:solidFill>
-                    <a:effectLst/>
-                    <a:latin typeface="+mn-lt"/>
-                    <a:ea typeface="+mn-ea"/>
-                    <a:cs typeface="+mn-cs"/>
-                  </a:rPr>
-                  <a:t>th</a:t>
-                </a:r>
-                <a:r>
-                  <a:rPr lang="en-US" sz="1200" b="0" i="0" kern="1200" dirty="0">
-                    <a:solidFill>
-                      <a:schemeClr val="tx1"/>
-                    </a:solidFill>
-                    <a:effectLst/>
-                    <a:latin typeface="+mn-lt"/>
-                    <a:ea typeface="+mn-ea"/>
-                    <a:cs typeface="+mn-cs"/>
-                  </a:rPr>
-                  <a:t> row and the </a:t>
-                </a:r>
-                <a:r>
-                  <a:rPr lang="en-US" sz="1200" b="0" i="1" kern="1200" dirty="0" err="1">
-                    <a:solidFill>
-                      <a:schemeClr val="tx1"/>
-                    </a:solidFill>
-                    <a:effectLst/>
-                    <a:latin typeface="+mn-lt"/>
-                    <a:ea typeface="+mn-ea"/>
-                    <a:cs typeface="+mn-cs"/>
-                  </a:rPr>
-                  <a:t>j</a:t>
-                </a:r>
-                <a:r>
-                  <a:rPr lang="en-US" sz="1200" b="0" i="0" kern="1200" dirty="0" err="1">
-                    <a:solidFill>
-                      <a:schemeClr val="tx1"/>
-                    </a:solidFill>
-                    <a:effectLst/>
-                    <a:latin typeface="+mn-lt"/>
-                    <a:ea typeface="+mn-ea"/>
-                    <a:cs typeface="+mn-cs"/>
-                  </a:rPr>
-                  <a:t>th</a:t>
-                </a:r>
-                <a:r>
-                  <a:rPr lang="en-US" sz="1200" b="0" i="0" kern="1200" dirty="0">
-                    <a:solidFill>
-                      <a:schemeClr val="tx1"/>
-                    </a:solidFill>
-                    <a:effectLst/>
-                    <a:latin typeface="+mn-lt"/>
-                    <a:ea typeface="+mn-ea"/>
-                    <a:cs typeface="+mn-cs"/>
-                  </a:rPr>
-                  <a:t> column is</a:t>
-                </a:r>
-              </a:p>
-              <a:p>
-                <a:r>
-                  <a:rPr lang="ar-AE" sz="1200" i="0" kern="1200">
-                    <a:solidFill>
-                      <a:schemeClr val="tx1"/>
-                    </a:solidFill>
-                    <a:latin typeface="+mn-lt"/>
-                    <a:ea typeface="+mn-ea"/>
-                    <a:cs typeface="+mn-cs"/>
-                  </a:rPr>
-                  <a:t>(</a:t>
-                </a:r>
-                <a:r>
-                  <a:rPr lang="ar-AE" sz="1200" b="1" i="0" kern="1200">
-                    <a:solidFill>
-                      <a:schemeClr val="tx1"/>
-                    </a:solidFill>
-                    <a:latin typeface="+mn-lt"/>
-                    <a:ea typeface="+mn-ea"/>
-                    <a:cs typeface="+mn-cs"/>
-                  </a:rPr>
-                  <a:t>𝐇_</a:t>
-                </a:r>
-                <a:r>
-                  <a:rPr lang="ar-AE" sz="1200" b="0" i="0" kern="1200">
-                    <a:solidFill>
-                      <a:schemeClr val="tx1"/>
-                    </a:solidFill>
-                    <a:latin typeface="+mn-lt"/>
-                    <a:ea typeface="+mn-ea"/>
-                    <a:cs typeface="+mn-cs"/>
-                  </a:rPr>
-                  <a:t>𝑓 )_(𝑖,𝑗)=(∂^2 𝑓)/(∂𝑥_𝑖  ∂𝑥_𝑗 ).</a:t>
-                </a:r>
-                <a:endParaRPr lang="ar-AE" b="0" dirty="0"/>
-              </a:p>
-              <a:p>
-                <a:endParaRPr lang="en-US" dirty="0"/>
-              </a:p>
-            </p:txBody>
-          </p:sp>
-        </mc:Fallback>
-      </mc:AlternateContent>
+      <p:sp>
+        <p:nvSpPr>
+          <p:cNvPr id="3" name="Notes Placeholder 2"/>
+          <p:cNvSpPr>
+            <a:spLocks noGrp="1"/>
+          </p:cNvSpPr>
+          <p:nvPr>
+            <p:ph type="body" idx="1"/>
+          </p:nvPr>
+        </p:nvSpPr>
+        <p:spPr/>
+        <p:txBody>
+          <a:bodyPr/>
+          <a:lstStyle/>
+          <a:p>
+            <a:endParaRPr lang="en-US" dirty="0"/>
+          </a:p>
+        </p:txBody>
+      </p:sp>
       <p:sp>
         <p:nvSpPr>
           <p:cNvPr id="4" name="Slide Number Placeholder 3"/>
@@ -4033,7 +1152,7 @@
           <a:p>
             <a:fld id="{63B2D7EC-928D-0645-AAE8-498D7443D60E}" type="slidenum">
               <a:rPr lang="en-US" smtClean="0"/>
-              <a:t>36</a:t>
+              <a:t>35</a:t>
             </a:fld>
             <a:endParaRPr lang="en-US"/>
           </a:p>
@@ -4042,7 +1161,7 @@
     </p:spTree>
     <p:extLst>
       <p:ext uri="{BB962C8B-B14F-4D97-AF65-F5344CB8AC3E}">
-        <p14:creationId xmlns:p14="http://schemas.microsoft.com/office/powerpoint/2010/main" val="3210259303"/>
+        <p14:creationId xmlns:p14="http://schemas.microsoft.com/office/powerpoint/2010/main" val="1454016104"/>
       </p:ext>
     </p:extLst>
   </p:cSld>
@@ -4096,112 +1215,7 @@
           <a:bodyPr/>
           <a:lstStyle/>
           <a:p>
-            <a:r>
-              <a:rPr lang="en-US" dirty="0"/>
-              <a:t>\</a:t>
-            </a:r>
-            <a:r>
-              <a:rPr lang="en-US" dirty="0" err="1"/>
-              <a:t>nabla</a:t>
-            </a:r>
-            <a:r>
-              <a:rPr lang="en-US" dirty="0"/>
-              <a:t> f(\x^*)^\prime\Delta \x = \sum_{</a:t>
-            </a:r>
-            <a:r>
-              <a:rPr lang="en-US" dirty="0" err="1"/>
-              <a:t>i</a:t>
-            </a:r>
-            <a:r>
-              <a:rPr lang="en-US" dirty="0"/>
-              <a:t>=1}^n \</a:t>
-            </a:r>
-            <a:r>
-              <a:rPr lang="en-US" dirty="0" err="1"/>
-              <a:t>frac</a:t>
-            </a:r>
-            <a:r>
-              <a:rPr lang="en-US" dirty="0"/>
-              <a:t>{\partial f(\x^*)}{\partial </a:t>
-            </a:r>
-            <a:r>
-              <a:rPr lang="en-US" dirty="0" err="1"/>
-              <a:t>x_i</a:t>
-            </a:r>
-            <a:r>
-              <a:rPr lang="en-US" dirty="0"/>
-              <a:t>}\Delta </a:t>
-            </a:r>
-            <a:r>
-              <a:rPr lang="en-US" dirty="0" err="1"/>
-              <a:t>x_i</a:t>
-            </a:r>
-            <a:r>
-              <a:rPr lang="en-US" dirty="0"/>
-              <a:t> \</a:t>
-            </a:r>
-            <a:r>
-              <a:rPr lang="en-US" dirty="0" err="1"/>
-              <a:t>geq</a:t>
-            </a:r>
-            <a:r>
-              <a:rPr lang="en-US" dirty="0"/>
-              <a:t> 0</a:t>
-            </a:r>
-          </a:p>
-          <a:p>
-            <a:r>
-              <a:rPr lang="en-US" dirty="0"/>
-              <a:t>\</a:t>
-            </a:r>
-            <a:r>
-              <a:rPr lang="en-US" dirty="0" err="1"/>
-              <a:t>frac</a:t>
-            </a:r>
-            <a:r>
-              <a:rPr lang="en-US" dirty="0"/>
-              <a:t>{\partial f(\x^*)}{\partial </a:t>
-            </a:r>
-            <a:r>
-              <a:rPr lang="en-US" dirty="0" err="1"/>
-              <a:t>x_i</a:t>
-            </a:r>
-            <a:r>
-              <a:rPr lang="en-US" dirty="0"/>
-              <a:t>}\</a:t>
-            </a:r>
-            <a:r>
-              <a:rPr lang="en-US" dirty="0" err="1"/>
-              <a:t>geq</a:t>
-            </a:r>
-            <a:r>
-              <a:rPr lang="en-US" dirty="0"/>
-              <a:t> 0, \quad \text{and} \quad \</a:t>
-            </a:r>
-            <a:r>
-              <a:rPr lang="en-US" dirty="0" err="1"/>
-              <a:t>frac</a:t>
-            </a:r>
-            <a:r>
-              <a:rPr lang="en-US" dirty="0"/>
-              <a:t>{\partial f(\x^*)}{\partial </a:t>
-            </a:r>
-            <a:r>
-              <a:rPr lang="en-US" dirty="0" err="1"/>
-              <a:t>x_i</a:t>
-            </a:r>
-            <a:r>
-              <a:rPr lang="en-US" dirty="0"/>
-              <a:t>} \</a:t>
-            </a:r>
-            <a:r>
-              <a:rPr lang="en-US" dirty="0" err="1"/>
-              <a:t>leq</a:t>
-            </a:r>
-            <a:r>
-              <a:rPr lang="en-US" dirty="0"/>
-              <a:t> 0</a:t>
-            </a:r>
+            <a:endParaRPr lang="en-US" dirty="0"/>
           </a:p>
         </p:txBody>
       </p:sp>
@@ -4222,7 +1236,7 @@
           <a:p>
             <a:fld id="{63B2D7EC-928D-0645-AAE8-498D7443D60E}" type="slidenum">
               <a:rPr lang="en-US" smtClean="0"/>
-              <a:t>37</a:t>
+              <a:t>36</a:t>
             </a:fld>
             <a:endParaRPr lang="en-US"/>
           </a:p>
@@ -4231,7 +1245,7 @@
     </p:spTree>
     <p:extLst>
       <p:ext uri="{BB962C8B-B14F-4D97-AF65-F5344CB8AC3E}">
-        <p14:creationId xmlns:p14="http://schemas.microsoft.com/office/powerpoint/2010/main" val="2764166590"/>
+        <p14:creationId xmlns:p14="http://schemas.microsoft.com/office/powerpoint/2010/main" val="3210259303"/>
       </p:ext>
     </p:extLst>
   </p:cSld>
@@ -4285,109 +1299,6 @@
           <a:bodyPr/>
           <a:lstStyle/>
           <a:p>
-            <a:pPr marL="0" marR="0" lvl="0" indent="0" algn="l" defTabSz="914400" rtl="0" eaLnBrk="1" fontAlgn="auto" latinLnBrk="0" hangingPunct="1">
-              <a:lnSpc>
-                <a:spcPct val="100000"/>
-              </a:lnSpc>
-              <a:spcBef>
-                <a:spcPts val="0"/>
-              </a:spcBef>
-              <a:spcAft>
-                <a:spcPts val="0"/>
-              </a:spcAft>
-              <a:buClrTx/>
-              <a:buSzTx/>
-              <a:buFontTx/>
-              <a:buNone/>
-              <a:tabLst/>
-              <a:defRPr/>
-            </a:pPr>
-            <a:r>
-              <a:rPr lang="en-US" sz="1200" kern="1200" dirty="0">
-                <a:solidFill>
-                  <a:schemeClr val="tx1"/>
-                </a:solidFill>
-                <a:effectLst/>
-                <a:latin typeface="+mn-lt"/>
-                <a:ea typeface="+mn-ea"/>
-                <a:cs typeface="+mn-cs"/>
-              </a:rPr>
-              <a:t>\</a:t>
-            </a:r>
-            <a:r>
-              <a:rPr lang="en-US" sz="1200" kern="1200" dirty="0" err="1">
-                <a:solidFill>
-                  <a:schemeClr val="tx1"/>
-                </a:solidFill>
-                <a:effectLst/>
-                <a:latin typeface="+mn-lt"/>
-                <a:ea typeface="+mn-ea"/>
-                <a:cs typeface="+mn-cs"/>
-              </a:rPr>
-              <a:t>nabla</a:t>
-            </a:r>
-            <a:r>
-              <a:rPr lang="en-US" sz="1200" kern="1200" dirty="0">
-                <a:solidFill>
-                  <a:schemeClr val="tx1"/>
-                </a:solidFill>
-                <a:effectLst/>
-                <a:latin typeface="+mn-lt"/>
-                <a:ea typeface="+mn-ea"/>
-                <a:cs typeface="+mn-cs"/>
-              </a:rPr>
-              <a:t> f(\x^*)^\prime\Delta \x  + \</a:t>
-            </a:r>
-            <a:r>
-              <a:rPr lang="en-US" sz="1200" kern="1200" dirty="0" err="1">
-                <a:solidFill>
-                  <a:schemeClr val="tx1"/>
-                </a:solidFill>
-                <a:effectLst/>
-                <a:latin typeface="+mn-lt"/>
-                <a:ea typeface="+mn-ea"/>
-                <a:cs typeface="+mn-cs"/>
-              </a:rPr>
-              <a:t>frac</a:t>
-            </a:r>
-            <a:r>
-              <a:rPr lang="en-US" sz="1200" kern="1200" dirty="0">
-                <a:solidFill>
-                  <a:schemeClr val="tx1"/>
-                </a:solidFill>
-                <a:effectLst/>
-                <a:latin typeface="+mn-lt"/>
-                <a:ea typeface="+mn-ea"/>
-                <a:cs typeface="+mn-cs"/>
-              </a:rPr>
-              <a:t>{1}{2}\Delta \x ^{\prime} \nabla^2f(\x^*)\Delta \x \</a:t>
-            </a:r>
-            <a:r>
-              <a:rPr lang="en-US" sz="1200" kern="1200" dirty="0" err="1">
-                <a:solidFill>
-                  <a:schemeClr val="tx1"/>
-                </a:solidFill>
-                <a:effectLst/>
-                <a:latin typeface="+mn-lt"/>
-                <a:ea typeface="+mn-ea"/>
-                <a:cs typeface="+mn-cs"/>
-              </a:rPr>
-              <a:t>geq</a:t>
-            </a:r>
-            <a:r>
-              <a:rPr lang="en-US" sz="1200" kern="1200" dirty="0">
-                <a:solidFill>
-                  <a:schemeClr val="tx1"/>
-                </a:solidFill>
-                <a:effectLst/>
-                <a:latin typeface="+mn-lt"/>
-                <a:ea typeface="+mn-ea"/>
-                <a:cs typeface="+mn-cs"/>
-              </a:rPr>
-              <a:t> 0</a:t>
-            </a:r>
-          </a:p>
-          <a:p>
             <a:endParaRPr lang="en-US" dirty="0"/>
           </a:p>
         </p:txBody>
@@ -4409,7 +1320,7 @@
           <a:p>
             <a:fld id="{63B2D7EC-928D-0645-AAE8-498D7443D60E}" type="slidenum">
               <a:rPr lang="en-US" smtClean="0"/>
-              <a:t>38</a:t>
+              <a:t>37</a:t>
             </a:fld>
             <a:endParaRPr lang="en-US"/>
           </a:p>
@@ -4418,7 +1329,7 @@
     </p:spTree>
     <p:extLst>
       <p:ext uri="{BB962C8B-B14F-4D97-AF65-F5344CB8AC3E}">
-        <p14:creationId xmlns:p14="http://schemas.microsoft.com/office/powerpoint/2010/main" val="1298671482"/>
+        <p14:creationId xmlns:p14="http://schemas.microsoft.com/office/powerpoint/2010/main" val="2764166590"/>
       </p:ext>
     </p:extLst>
   </p:cSld>
@@ -4472,94 +1383,7 @@
           <a:bodyPr/>
           <a:lstStyle/>
           <a:p>
-            <a:r>
-              <a:rPr lang="en-US" sz="1200" b="0" i="0" kern="1200">
-                <a:solidFill>
-                  <a:schemeClr val="tx1"/>
-                </a:solidFill>
-                <a:effectLst/>
-                <a:latin typeface="+mn-lt"/>
-                <a:ea typeface="+mn-ea"/>
-                <a:cs typeface="+mn-cs"/>
-              </a:rPr>
-              <a:t> open sets can be defined as those </a:t>
-            </a:r>
-            <a:r>
-              <a:rPr lang="en-US" sz="1200" b="0" i="0" u="none" strike="noStrike" kern="1200">
-                <a:solidFill>
-                  <a:schemeClr val="tx1"/>
-                </a:solidFill>
-                <a:effectLst/>
-                <a:latin typeface="+mn-lt"/>
-                <a:ea typeface="+mn-ea"/>
-                <a:cs typeface="+mn-cs"/>
-                <a:hlinkClick r:id="rId3" tooltip="Set (mathematics)"/>
-              </a:rPr>
-              <a:t>sets</a:t>
-            </a:r>
-            <a:r>
-              <a:rPr lang="en-US" sz="1200" b="0" i="0" kern="1200">
-                <a:solidFill>
-                  <a:schemeClr val="tx1"/>
-                </a:solidFill>
-                <a:effectLst/>
-                <a:latin typeface="+mn-lt"/>
-                <a:ea typeface="+mn-ea"/>
-                <a:cs typeface="+mn-cs"/>
-              </a:rPr>
-              <a:t> which contain a </a:t>
-            </a:r>
-            <a:r>
-              <a:rPr lang="en-US" sz="1200" b="0" i="0" u="none" strike="noStrike" kern="1200">
-                <a:solidFill>
-                  <a:schemeClr val="tx1"/>
-                </a:solidFill>
-                <a:effectLst/>
-                <a:latin typeface="+mn-lt"/>
-                <a:ea typeface="+mn-ea"/>
-                <a:cs typeface="+mn-cs"/>
-                <a:hlinkClick r:id="rId4" tooltip="Ball (mathematics)"/>
-              </a:rPr>
-              <a:t>ball</a:t>
-            </a:r>
-            <a:r>
-              <a:rPr lang="en-US" sz="1200" b="0" i="0" kern="1200">
-                <a:solidFill>
-                  <a:schemeClr val="tx1"/>
-                </a:solidFill>
-                <a:effectLst/>
-                <a:latin typeface="+mn-lt"/>
-                <a:ea typeface="+mn-ea"/>
-                <a:cs typeface="+mn-cs"/>
-              </a:rPr>
-              <a:t> around each of their points (or, equivalently, a set is open if it doesn't contain any of its </a:t>
-            </a:r>
-            <a:r>
-              <a:rPr lang="en-US" sz="1200" b="0" i="0" u="none" strike="noStrike" kern="1200">
-                <a:solidFill>
-                  <a:schemeClr val="tx1"/>
-                </a:solidFill>
-                <a:effectLst/>
-                <a:latin typeface="+mn-lt"/>
-                <a:ea typeface="+mn-ea"/>
-                <a:cs typeface="+mn-cs"/>
-                <a:hlinkClick r:id="rId5" tooltip="Boundary points"/>
-              </a:rPr>
-              <a:t>boundary points</a:t>
-            </a:r>
-            <a:r>
-              <a:rPr lang="en-US" sz="1200" b="0" i="0" kern="1200">
-                <a:solidFill>
-                  <a:schemeClr val="tx1"/>
-                </a:solidFill>
-                <a:effectLst/>
-                <a:latin typeface="+mn-lt"/>
-                <a:ea typeface="+mn-ea"/>
-                <a:cs typeface="+mn-cs"/>
-              </a:rPr>
-              <a:t>)</a:t>
-            </a:r>
-            <a:endParaRPr lang="en-US"/>
+            <a:endParaRPr lang="en-US" dirty="0"/>
           </a:p>
         </p:txBody>
       </p:sp>
@@ -4580,7 +1404,7 @@
           <a:p>
             <a:fld id="{63B2D7EC-928D-0645-AAE8-498D7443D60E}" type="slidenum">
               <a:rPr lang="en-US" smtClean="0"/>
-              <a:t>39</a:t>
+              <a:t>38</a:t>
             </a:fld>
             <a:endParaRPr lang="en-US"/>
           </a:p>
@@ -4589,7 +1413,7 @@
     </p:spTree>
     <p:extLst>
       <p:ext uri="{BB962C8B-B14F-4D97-AF65-F5344CB8AC3E}">
-        <p14:creationId xmlns:p14="http://schemas.microsoft.com/office/powerpoint/2010/main" val="3770407309"/>
+        <p14:creationId xmlns:p14="http://schemas.microsoft.com/office/powerpoint/2010/main" val="1298671482"/>
       </p:ext>
     </p:extLst>
   </p:cSld>
@@ -4643,140 +1467,6 @@
           <a:bodyPr/>
           <a:lstStyle/>
           <a:p>
-            <a:r>
-              <a:rPr lang="en-US" sz="1200" b="0" i="0" kern="1200" dirty="0">
-                <a:solidFill>
-                  <a:schemeClr val="tx1"/>
-                </a:solidFill>
-                <a:effectLst/>
-                <a:latin typeface="+mn-lt"/>
-                <a:ea typeface="+mn-ea"/>
-                <a:cs typeface="+mn-cs"/>
-              </a:rPr>
-              <a:t> if the </a:t>
-            </a:r>
-            <a:r>
-              <a:rPr lang="en-US" sz="1200" b="0" i="0" u="none" strike="noStrike" kern="1200" dirty="0">
-                <a:solidFill>
-                  <a:schemeClr val="tx1"/>
-                </a:solidFill>
-                <a:effectLst/>
-                <a:latin typeface="+mn-lt"/>
-                <a:ea typeface="+mn-ea"/>
-                <a:cs typeface="+mn-cs"/>
-                <a:hlinkClick r:id="rId3" tooltip="Line segment"/>
-              </a:rPr>
-              <a:t>line segment</a:t>
-            </a:r>
-            <a:r>
-              <a:rPr lang="en-US" sz="1200" b="0" i="0" kern="1200" dirty="0">
-                <a:solidFill>
-                  <a:schemeClr val="tx1"/>
-                </a:solidFill>
-                <a:effectLst/>
-                <a:latin typeface="+mn-lt"/>
-                <a:ea typeface="+mn-ea"/>
-                <a:cs typeface="+mn-cs"/>
-              </a:rPr>
-              <a:t> between any two points on the </a:t>
-            </a:r>
-            <a:r>
-              <a:rPr lang="en-US" sz="1200" b="0" i="0" u="none" strike="noStrike" kern="1200" dirty="0">
-                <a:solidFill>
-                  <a:schemeClr val="tx1"/>
-                </a:solidFill>
-                <a:effectLst/>
-                <a:latin typeface="+mn-lt"/>
-                <a:ea typeface="+mn-ea"/>
-                <a:cs typeface="+mn-cs"/>
-                <a:hlinkClick r:id="rId4" tooltip="Graph of a function"/>
-              </a:rPr>
-              <a:t>graph of the function</a:t>
-            </a:r>
-            <a:r>
-              <a:rPr lang="en-US" sz="1200" b="0" i="0" kern="1200" dirty="0">
-                <a:solidFill>
-                  <a:schemeClr val="tx1"/>
-                </a:solidFill>
-                <a:effectLst/>
-                <a:latin typeface="+mn-lt"/>
-                <a:ea typeface="+mn-ea"/>
-                <a:cs typeface="+mn-cs"/>
-              </a:rPr>
-              <a:t> lies above or on the graph. </a:t>
-            </a:r>
-            <a:endParaRPr lang="en-US" dirty="0"/>
-          </a:p>
-          <a:p>
-            <a:endParaRPr lang="en-US" dirty="0"/>
-          </a:p>
-          <a:p>
-            <a:r>
-              <a:rPr lang="en-US" dirty="0"/>
-              <a:t>\alpha \x  + (1-\alpha)\y\in C, \quad \</a:t>
-            </a:r>
-            <a:r>
-              <a:rPr lang="en-US" dirty="0" err="1"/>
-              <a:t>forall</a:t>
-            </a:r>
-            <a:r>
-              <a:rPr lang="en-US" dirty="0"/>
-              <a:t> \x, \y \in C, \</a:t>
-            </a:r>
-            <a:r>
-              <a:rPr lang="en-US" dirty="0" err="1"/>
-              <a:t>forall</a:t>
-            </a:r>
-            <a:r>
-              <a:rPr lang="en-US" dirty="0"/>
-              <a:t> \alpha \in [0, \,1]</a:t>
-            </a:r>
-          </a:p>
-          <a:p>
-            <a:r>
-              <a:rPr lang="es-ES" dirty="0"/>
-              <a:t>f(\</a:t>
-            </a:r>
-            <a:r>
-              <a:rPr lang="es-ES" dirty="0" err="1"/>
-              <a:t>alpha</a:t>
-            </a:r>
-            <a:r>
-              <a:rPr lang="es-ES" dirty="0"/>
-              <a:t> \x  + (1-\</a:t>
-            </a:r>
-            <a:r>
-              <a:rPr lang="es-ES" dirty="0" err="1"/>
-              <a:t>alpha</a:t>
-            </a:r>
-            <a:r>
-              <a:rPr lang="es-ES" dirty="0"/>
-              <a:t>)\y)\</a:t>
-            </a:r>
-            <a:r>
-              <a:rPr lang="es-ES" dirty="0" err="1"/>
-              <a:t>leq</a:t>
-            </a:r>
-            <a:r>
-              <a:rPr lang="es-ES" dirty="0"/>
-              <a:t> \</a:t>
-            </a:r>
-            <a:r>
-              <a:rPr lang="es-ES" dirty="0" err="1"/>
-              <a:t>alpha</a:t>
-            </a:r>
-            <a:r>
-              <a:rPr lang="es-ES" dirty="0"/>
-              <a:t> f(\x) + (1-\</a:t>
-            </a:r>
-            <a:r>
-              <a:rPr lang="es-ES" dirty="0" err="1"/>
-              <a:t>alpha</a:t>
-            </a:r>
-            <a:r>
-              <a:rPr lang="es-ES" dirty="0"/>
-              <a:t>)f(\y)</a:t>
-            </a:r>
             <a:endParaRPr lang="en-US" dirty="0"/>
           </a:p>
         </p:txBody>
@@ -4798,7 +1488,7 @@
           <a:p>
             <a:fld id="{63B2D7EC-928D-0645-AAE8-498D7443D60E}" type="slidenum">
               <a:rPr lang="en-US" smtClean="0"/>
-              <a:t>42</a:t>
+              <a:t>39</a:t>
             </a:fld>
             <a:endParaRPr lang="en-US"/>
           </a:p>
@@ -4807,7 +1497,91 @@
     </p:spTree>
     <p:extLst>
       <p:ext uri="{BB962C8B-B14F-4D97-AF65-F5344CB8AC3E}">
-        <p14:creationId xmlns:p14="http://schemas.microsoft.com/office/powerpoint/2010/main" val="2342189137"/>
+        <p14:creationId xmlns:p14="http://schemas.microsoft.com/office/powerpoint/2010/main" val="3770407309"/>
+      </p:ext>
+    </p:extLst>
+  </p:cSld>
+  <p:clrMapOvr>
+    <a:masterClrMapping/>
+  </p:clrMapOvr>
+</p:notes>
+</file>
+
+<file path=ppt/notesSlides/notesSlide19.xml><?xml version="1.0" encoding="utf-8"?>
+<p:notes xmlns:a="http://schemas.openxmlformats.org/drawingml/2006/main" xmlns:r="http://schemas.openxmlformats.org/officeDocument/2006/relationships" xmlns:p="http://schemas.openxmlformats.org/presentationml/2006/main">
+  <p:cSld>
+    <p:spTree>
+      <p:nvGrpSpPr>
+        <p:cNvPr id="1" name=""/>
+        <p:cNvGrpSpPr/>
+        <p:nvPr/>
+      </p:nvGrpSpPr>
+      <p:grpSpPr>
+        <a:xfrm>
+          <a:off x="0" y="0"/>
+          <a:ext cx="0" cy="0"/>
+          <a:chOff x="0" y="0"/>
+          <a:chExt cx="0" cy="0"/>
+        </a:xfrm>
+      </p:grpSpPr>
+      <p:sp>
+        <p:nvSpPr>
+          <p:cNvPr id="2" name="Slide Image Placeholder 1"/>
+          <p:cNvSpPr>
+            <a:spLocks noGrp="1" noRot="1" noChangeAspect="1"/>
+          </p:cNvSpPr>
+          <p:nvPr>
+            <p:ph type="sldImg"/>
+          </p:nvPr>
+        </p:nvSpPr>
+        <p:spPr/>
+      </p:sp>
+      <p:sp>
+        <p:nvSpPr>
+          <p:cNvPr id="3" name="Notes Placeholder 2"/>
+          <p:cNvSpPr>
+            <a:spLocks noGrp="1"/>
+          </p:cNvSpPr>
+          <p:nvPr>
+            <p:ph type="body" idx="1"/>
+          </p:nvPr>
+        </p:nvSpPr>
+        <p:spPr/>
+        <p:txBody>
+          <a:bodyPr/>
+          <a:lstStyle/>
+          <a:p>
+            <a:endParaRPr lang="en-US" dirty="0"/>
+          </a:p>
+        </p:txBody>
+      </p:sp>
+      <p:sp>
+        <p:nvSpPr>
+          <p:cNvPr id="4" name="Slide Number Placeholder 3"/>
+          <p:cNvSpPr>
+            <a:spLocks noGrp="1"/>
+          </p:cNvSpPr>
+          <p:nvPr>
+            <p:ph type="sldNum" sz="quarter" idx="5"/>
+          </p:nvPr>
+        </p:nvSpPr>
+        <p:spPr/>
+        <p:txBody>
+          <a:bodyPr/>
+          <a:lstStyle/>
+          <a:p>
+            <a:fld id="{63B2D7EC-928D-0645-AAE8-498D7443D60E}" type="slidenum">
+              <a:rPr lang="en-US" smtClean="0"/>
+              <a:t>40</a:t>
+            </a:fld>
+            <a:endParaRPr lang="en-US"/>
+          </a:p>
+        </p:txBody>
+      </p:sp>
+    </p:spTree>
+    <p:extLst>
+      <p:ext uri="{BB962C8B-B14F-4D97-AF65-F5344CB8AC3E}">
+        <p14:creationId xmlns:p14="http://schemas.microsoft.com/office/powerpoint/2010/main" val="2309242198"/>
       </p:ext>
     </p:extLst>
   </p:cSld>
@@ -4892,6 +1666,174 @@
     <p:extLst>
       <p:ext uri="{BB962C8B-B14F-4D97-AF65-F5344CB8AC3E}">
         <p14:creationId xmlns:p14="http://schemas.microsoft.com/office/powerpoint/2010/main" val="167657902"/>
+      </p:ext>
+    </p:extLst>
+  </p:cSld>
+  <p:clrMapOvr>
+    <a:masterClrMapping/>
+  </p:clrMapOvr>
+</p:notes>
+</file>
+
+<file path=ppt/notesSlides/notesSlide20.xml><?xml version="1.0" encoding="utf-8"?>
+<p:notes xmlns:a="http://schemas.openxmlformats.org/drawingml/2006/main" xmlns:r="http://schemas.openxmlformats.org/officeDocument/2006/relationships" xmlns:p="http://schemas.openxmlformats.org/presentationml/2006/main">
+  <p:cSld>
+    <p:spTree>
+      <p:nvGrpSpPr>
+        <p:cNvPr id="1" name=""/>
+        <p:cNvGrpSpPr/>
+        <p:nvPr/>
+      </p:nvGrpSpPr>
+      <p:grpSpPr>
+        <a:xfrm>
+          <a:off x="0" y="0"/>
+          <a:ext cx="0" cy="0"/>
+          <a:chOff x="0" y="0"/>
+          <a:chExt cx="0" cy="0"/>
+        </a:xfrm>
+      </p:grpSpPr>
+      <p:sp>
+        <p:nvSpPr>
+          <p:cNvPr id="2" name="Slide Image Placeholder 1"/>
+          <p:cNvSpPr>
+            <a:spLocks noGrp="1" noRot="1" noChangeAspect="1"/>
+          </p:cNvSpPr>
+          <p:nvPr>
+            <p:ph type="sldImg"/>
+          </p:nvPr>
+        </p:nvSpPr>
+        <p:spPr/>
+      </p:sp>
+      <p:sp>
+        <p:nvSpPr>
+          <p:cNvPr id="3" name="Notes Placeholder 2"/>
+          <p:cNvSpPr>
+            <a:spLocks noGrp="1"/>
+          </p:cNvSpPr>
+          <p:nvPr>
+            <p:ph type="body" idx="1"/>
+          </p:nvPr>
+        </p:nvSpPr>
+        <p:spPr/>
+        <p:txBody>
+          <a:bodyPr/>
+          <a:lstStyle/>
+          <a:p>
+            <a:endParaRPr lang="en-US" dirty="0"/>
+          </a:p>
+        </p:txBody>
+      </p:sp>
+      <p:sp>
+        <p:nvSpPr>
+          <p:cNvPr id="4" name="Slide Number Placeholder 3"/>
+          <p:cNvSpPr>
+            <a:spLocks noGrp="1"/>
+          </p:cNvSpPr>
+          <p:nvPr>
+            <p:ph type="sldNum" sz="quarter" idx="5"/>
+          </p:nvPr>
+        </p:nvSpPr>
+        <p:spPr/>
+        <p:txBody>
+          <a:bodyPr/>
+          <a:lstStyle/>
+          <a:p>
+            <a:fld id="{63B2D7EC-928D-0645-AAE8-498D7443D60E}" type="slidenum">
+              <a:rPr lang="en-US" smtClean="0"/>
+              <a:t>42</a:t>
+            </a:fld>
+            <a:endParaRPr lang="en-US"/>
+          </a:p>
+        </p:txBody>
+      </p:sp>
+    </p:spTree>
+    <p:extLst>
+      <p:ext uri="{BB962C8B-B14F-4D97-AF65-F5344CB8AC3E}">
+        <p14:creationId xmlns:p14="http://schemas.microsoft.com/office/powerpoint/2010/main" val="2342189137"/>
+      </p:ext>
+    </p:extLst>
+  </p:cSld>
+  <p:clrMapOvr>
+    <a:masterClrMapping/>
+  </p:clrMapOvr>
+</p:notes>
+</file>
+
+<file path=ppt/notesSlides/notesSlide21.xml><?xml version="1.0" encoding="utf-8"?>
+<p:notes xmlns:a="http://schemas.openxmlformats.org/drawingml/2006/main" xmlns:r="http://schemas.openxmlformats.org/officeDocument/2006/relationships" xmlns:p="http://schemas.openxmlformats.org/presentationml/2006/main">
+  <p:cSld>
+    <p:spTree>
+      <p:nvGrpSpPr>
+        <p:cNvPr id="1" name=""/>
+        <p:cNvGrpSpPr/>
+        <p:nvPr/>
+      </p:nvGrpSpPr>
+      <p:grpSpPr>
+        <a:xfrm>
+          <a:off x="0" y="0"/>
+          <a:ext cx="0" cy="0"/>
+          <a:chOff x="0" y="0"/>
+          <a:chExt cx="0" cy="0"/>
+        </a:xfrm>
+      </p:grpSpPr>
+      <p:sp>
+        <p:nvSpPr>
+          <p:cNvPr id="2" name="Slide Image Placeholder 1"/>
+          <p:cNvSpPr>
+            <a:spLocks noGrp="1" noRot="1" noChangeAspect="1"/>
+          </p:cNvSpPr>
+          <p:nvPr>
+            <p:ph type="sldImg"/>
+          </p:nvPr>
+        </p:nvSpPr>
+        <p:spPr/>
+      </p:sp>
+      <p:sp>
+        <p:nvSpPr>
+          <p:cNvPr id="3" name="Notes Placeholder 2"/>
+          <p:cNvSpPr>
+            <a:spLocks noGrp="1"/>
+          </p:cNvSpPr>
+          <p:nvPr>
+            <p:ph type="body" idx="1"/>
+          </p:nvPr>
+        </p:nvSpPr>
+        <p:spPr/>
+        <p:txBody>
+          <a:bodyPr/>
+          <a:lstStyle/>
+          <a:p>
+            <a:endParaRPr lang="en-US" dirty="0"/>
+          </a:p>
+        </p:txBody>
+      </p:sp>
+      <p:sp>
+        <p:nvSpPr>
+          <p:cNvPr id="4" name="Slide Number Placeholder 3"/>
+          <p:cNvSpPr>
+            <a:spLocks noGrp="1"/>
+          </p:cNvSpPr>
+          <p:nvPr>
+            <p:ph type="sldNum" sz="quarter" idx="5"/>
+          </p:nvPr>
+        </p:nvSpPr>
+        <p:spPr/>
+        <p:txBody>
+          <a:bodyPr/>
+          <a:lstStyle/>
+          <a:p>
+            <a:fld id="{63B2D7EC-928D-0645-AAE8-498D7443D60E}" type="slidenum">
+              <a:rPr lang="en-US" smtClean="0"/>
+              <a:t>43</a:t>
+            </a:fld>
+            <a:endParaRPr lang="en-US"/>
+          </a:p>
+        </p:txBody>
+      </p:sp>
+    </p:spTree>
+    <p:extLst>
+      <p:ext uri="{BB962C8B-B14F-4D97-AF65-F5344CB8AC3E}">
+        <p14:creationId xmlns:p14="http://schemas.microsoft.com/office/powerpoint/2010/main" val="2174369894"/>
       </p:ext>
     </p:extLst>
   </p:cSld>
@@ -5197,648 +2139,7 @@
           <a:bodyPr/>
           <a:lstStyle/>
           <a:p>
-            <a:endParaRPr lang="en-US"/>
-          </a:p>
-          <a:p>
-            <a:endParaRPr lang="en-US"/>
-          </a:p>
-          <a:p>
-            <a:endParaRPr lang="en-US"/>
-          </a:p>
-          <a:p>
-            <a:r>
-              <a:rPr lang="en-US" sz="1200" kern="1200">
-                <a:solidFill>
-                  <a:schemeClr val="tx1"/>
-                </a:solidFill>
-                <a:effectLst/>
-                <a:latin typeface="+mn-lt"/>
-                <a:ea typeface="+mn-ea"/>
-                <a:cs typeface="+mn-cs"/>
-              </a:rPr>
-              <a:t>\begin{split}</a:t>
-            </a:r>
-          </a:p>
-          <a:p>
-            <a:r>
-              <a:rPr lang="en-US" sz="1200" kern="1200">
-                <a:solidFill>
-                  <a:schemeClr val="tx1"/>
-                </a:solidFill>
-                <a:effectLst/>
-                <a:latin typeface="+mn-lt"/>
-                <a:ea typeface="+mn-ea"/>
-                <a:cs typeface="+mn-cs"/>
-              </a:rPr>
-              <a:t>\dot{x}_1(t) &amp;= f_1(x_1(t), x_2(t), \</a:t>
-            </a:r>
-            <a:r>
-              <a:rPr lang="en-US" sz="1200" kern="1200" err="1">
-                <a:solidFill>
-                  <a:schemeClr val="tx1"/>
-                </a:solidFill>
-                <a:effectLst/>
-                <a:latin typeface="+mn-lt"/>
-                <a:ea typeface="+mn-ea"/>
-                <a:cs typeface="+mn-cs"/>
-              </a:rPr>
-              <a:t>ldots</a:t>
-            </a:r>
-            <a:r>
-              <a:rPr lang="en-US" sz="1200" kern="1200">
-                <a:solidFill>
-                  <a:schemeClr val="tx1"/>
-                </a:solidFill>
-                <a:effectLst/>
-                <a:latin typeface="+mn-lt"/>
-                <a:ea typeface="+mn-ea"/>
-                <a:cs typeface="+mn-cs"/>
-              </a:rPr>
-              <a:t>, </a:t>
-            </a:r>
-            <a:r>
-              <a:rPr lang="en-US" sz="1200" kern="1200" err="1">
-                <a:solidFill>
-                  <a:schemeClr val="tx1"/>
-                </a:solidFill>
-                <a:effectLst/>
-                <a:latin typeface="+mn-lt"/>
-                <a:ea typeface="+mn-ea"/>
-                <a:cs typeface="+mn-cs"/>
-              </a:rPr>
-              <a:t>x_n</a:t>
-            </a:r>
-            <a:r>
-              <a:rPr lang="en-US" sz="1200" kern="1200">
-                <a:solidFill>
-                  <a:schemeClr val="tx1"/>
-                </a:solidFill>
-                <a:effectLst/>
-                <a:latin typeface="+mn-lt"/>
-                <a:ea typeface="+mn-ea"/>
-                <a:cs typeface="+mn-cs"/>
-              </a:rPr>
-              <a:t>(t), u_1(t), u_2(t), \</a:t>
-            </a:r>
-            <a:r>
-              <a:rPr lang="en-US" sz="1200" kern="1200" err="1">
-                <a:solidFill>
-                  <a:schemeClr val="tx1"/>
-                </a:solidFill>
-                <a:effectLst/>
-                <a:latin typeface="+mn-lt"/>
-                <a:ea typeface="+mn-ea"/>
-                <a:cs typeface="+mn-cs"/>
-              </a:rPr>
-              <a:t>ldots</a:t>
-            </a:r>
-            <a:r>
-              <a:rPr lang="en-US" sz="1200" kern="1200">
-                <a:solidFill>
-                  <a:schemeClr val="tx1"/>
-                </a:solidFill>
-                <a:effectLst/>
-                <a:latin typeface="+mn-lt"/>
-                <a:ea typeface="+mn-ea"/>
-                <a:cs typeface="+mn-cs"/>
-              </a:rPr>
-              <a:t>, </a:t>
-            </a:r>
-            <a:r>
-              <a:rPr lang="en-US" sz="1200" kern="1200" err="1">
-                <a:solidFill>
-                  <a:schemeClr val="tx1"/>
-                </a:solidFill>
-                <a:effectLst/>
-                <a:latin typeface="+mn-lt"/>
-                <a:ea typeface="+mn-ea"/>
-                <a:cs typeface="+mn-cs"/>
-              </a:rPr>
-              <a:t>u_m</a:t>
-            </a:r>
-            <a:r>
-              <a:rPr lang="en-US" sz="1200" kern="1200">
-                <a:solidFill>
-                  <a:schemeClr val="tx1"/>
-                </a:solidFill>
-                <a:effectLst/>
-                <a:latin typeface="+mn-lt"/>
-                <a:ea typeface="+mn-ea"/>
-                <a:cs typeface="+mn-cs"/>
-              </a:rPr>
-              <a:t>(t), t)\\</a:t>
-            </a:r>
-          </a:p>
-          <a:p>
-            <a:r>
-              <a:rPr lang="en-US" sz="1200" kern="1200">
-                <a:solidFill>
-                  <a:schemeClr val="tx1"/>
-                </a:solidFill>
-                <a:effectLst/>
-                <a:latin typeface="+mn-lt"/>
-                <a:ea typeface="+mn-ea"/>
-                <a:cs typeface="+mn-cs"/>
-              </a:rPr>
-              <a:t>\dot{x}_2(t) &amp;= f_2(x_1(t), x_2(t), \</a:t>
-            </a:r>
-            <a:r>
-              <a:rPr lang="en-US" sz="1200" kern="1200" err="1">
-                <a:solidFill>
-                  <a:schemeClr val="tx1"/>
-                </a:solidFill>
-                <a:effectLst/>
-                <a:latin typeface="+mn-lt"/>
-                <a:ea typeface="+mn-ea"/>
-                <a:cs typeface="+mn-cs"/>
-              </a:rPr>
-              <a:t>ldots</a:t>
-            </a:r>
-            <a:r>
-              <a:rPr lang="en-US" sz="1200" kern="1200">
-                <a:solidFill>
-                  <a:schemeClr val="tx1"/>
-                </a:solidFill>
-                <a:effectLst/>
-                <a:latin typeface="+mn-lt"/>
-                <a:ea typeface="+mn-ea"/>
-                <a:cs typeface="+mn-cs"/>
-              </a:rPr>
-              <a:t>, </a:t>
-            </a:r>
-            <a:r>
-              <a:rPr lang="en-US" sz="1200" kern="1200" err="1">
-                <a:solidFill>
-                  <a:schemeClr val="tx1"/>
-                </a:solidFill>
-                <a:effectLst/>
-                <a:latin typeface="+mn-lt"/>
-                <a:ea typeface="+mn-ea"/>
-                <a:cs typeface="+mn-cs"/>
-              </a:rPr>
-              <a:t>x_n</a:t>
-            </a:r>
-            <a:r>
-              <a:rPr lang="en-US" sz="1200" kern="1200">
-                <a:solidFill>
-                  <a:schemeClr val="tx1"/>
-                </a:solidFill>
-                <a:effectLst/>
-                <a:latin typeface="+mn-lt"/>
-                <a:ea typeface="+mn-ea"/>
-                <a:cs typeface="+mn-cs"/>
-              </a:rPr>
-              <a:t>(t), u_1(t), u_2(t), \</a:t>
-            </a:r>
-            <a:r>
-              <a:rPr lang="en-US" sz="1200" kern="1200" err="1">
-                <a:solidFill>
-                  <a:schemeClr val="tx1"/>
-                </a:solidFill>
-                <a:effectLst/>
-                <a:latin typeface="+mn-lt"/>
-                <a:ea typeface="+mn-ea"/>
-                <a:cs typeface="+mn-cs"/>
-              </a:rPr>
-              <a:t>ldots</a:t>
-            </a:r>
-            <a:r>
-              <a:rPr lang="en-US" sz="1200" kern="1200">
-                <a:solidFill>
-                  <a:schemeClr val="tx1"/>
-                </a:solidFill>
-                <a:effectLst/>
-                <a:latin typeface="+mn-lt"/>
-                <a:ea typeface="+mn-ea"/>
-                <a:cs typeface="+mn-cs"/>
-              </a:rPr>
-              <a:t>, </a:t>
-            </a:r>
-            <a:r>
-              <a:rPr lang="en-US" sz="1200" kern="1200" err="1">
-                <a:solidFill>
-                  <a:schemeClr val="tx1"/>
-                </a:solidFill>
-                <a:effectLst/>
-                <a:latin typeface="+mn-lt"/>
-                <a:ea typeface="+mn-ea"/>
-                <a:cs typeface="+mn-cs"/>
-              </a:rPr>
-              <a:t>u_m</a:t>
-            </a:r>
-            <a:r>
-              <a:rPr lang="en-US" sz="1200" kern="1200">
-                <a:solidFill>
-                  <a:schemeClr val="tx1"/>
-                </a:solidFill>
-                <a:effectLst/>
-                <a:latin typeface="+mn-lt"/>
-                <a:ea typeface="+mn-ea"/>
-                <a:cs typeface="+mn-cs"/>
-              </a:rPr>
-              <a:t>(t), t)\\</a:t>
-            </a:r>
-          </a:p>
-          <a:p>
-            <a:r>
-              <a:rPr lang="en-US" sz="1200" kern="1200">
-                <a:solidFill>
-                  <a:schemeClr val="tx1"/>
-                </a:solidFill>
-                <a:effectLst/>
-                <a:latin typeface="+mn-lt"/>
-                <a:ea typeface="+mn-ea"/>
-                <a:cs typeface="+mn-cs"/>
-              </a:rPr>
-              <a:t>\</a:t>
-            </a:r>
-            <a:r>
-              <a:rPr lang="en-US" sz="1200" kern="1200" err="1">
-                <a:solidFill>
-                  <a:schemeClr val="tx1"/>
-                </a:solidFill>
-                <a:effectLst/>
-                <a:latin typeface="+mn-lt"/>
-                <a:ea typeface="+mn-ea"/>
-                <a:cs typeface="+mn-cs"/>
-              </a:rPr>
-              <a:t>vdots</a:t>
-            </a:r>
-            <a:r>
-              <a:rPr lang="en-US" sz="1200" kern="1200">
-                <a:solidFill>
-                  <a:schemeClr val="tx1"/>
-                </a:solidFill>
-                <a:effectLst/>
-                <a:latin typeface="+mn-lt"/>
-                <a:ea typeface="+mn-ea"/>
-                <a:cs typeface="+mn-cs"/>
-              </a:rPr>
-              <a:t> &amp; \</a:t>
-            </a:r>
-            <a:r>
-              <a:rPr lang="en-US" sz="1200" kern="1200" err="1">
-                <a:solidFill>
-                  <a:schemeClr val="tx1"/>
-                </a:solidFill>
-                <a:effectLst/>
-                <a:latin typeface="+mn-lt"/>
-                <a:ea typeface="+mn-ea"/>
-                <a:cs typeface="+mn-cs"/>
-              </a:rPr>
-              <a:t>qquad</a:t>
-            </a:r>
-            <a:r>
-              <a:rPr lang="en-US" sz="1200" kern="1200">
-                <a:solidFill>
-                  <a:schemeClr val="tx1"/>
-                </a:solidFill>
-                <a:effectLst/>
-                <a:latin typeface="+mn-lt"/>
-                <a:ea typeface="+mn-ea"/>
-                <a:cs typeface="+mn-cs"/>
-              </a:rPr>
-              <a:t> \</a:t>
-            </a:r>
-            <a:r>
-              <a:rPr lang="en-US" sz="1200" kern="1200" err="1">
-                <a:solidFill>
-                  <a:schemeClr val="tx1"/>
-                </a:solidFill>
-                <a:effectLst/>
-                <a:latin typeface="+mn-lt"/>
-                <a:ea typeface="+mn-ea"/>
-                <a:cs typeface="+mn-cs"/>
-              </a:rPr>
-              <a:t>qquad</a:t>
-            </a:r>
-            <a:r>
-              <a:rPr lang="en-US" sz="1200" kern="1200">
-                <a:solidFill>
-                  <a:schemeClr val="tx1"/>
-                </a:solidFill>
-                <a:effectLst/>
-                <a:latin typeface="+mn-lt"/>
-                <a:ea typeface="+mn-ea"/>
-                <a:cs typeface="+mn-cs"/>
-              </a:rPr>
-              <a:t> \</a:t>
-            </a:r>
-            <a:r>
-              <a:rPr lang="en-US" sz="1200" kern="1200" err="1">
-                <a:solidFill>
-                  <a:schemeClr val="tx1"/>
-                </a:solidFill>
-                <a:effectLst/>
-                <a:latin typeface="+mn-lt"/>
-                <a:ea typeface="+mn-ea"/>
-                <a:cs typeface="+mn-cs"/>
-              </a:rPr>
-              <a:t>qquad</a:t>
-            </a:r>
-            <a:r>
-              <a:rPr lang="en-US" sz="1200" kern="1200">
-                <a:solidFill>
-                  <a:schemeClr val="tx1"/>
-                </a:solidFill>
-                <a:effectLst/>
-                <a:latin typeface="+mn-lt"/>
-                <a:ea typeface="+mn-ea"/>
-                <a:cs typeface="+mn-cs"/>
-              </a:rPr>
-              <a:t> \</a:t>
-            </a:r>
-            <a:r>
-              <a:rPr lang="en-US" sz="1200" kern="1200" err="1">
-                <a:solidFill>
-                  <a:schemeClr val="tx1"/>
-                </a:solidFill>
-                <a:effectLst/>
-                <a:latin typeface="+mn-lt"/>
-                <a:ea typeface="+mn-ea"/>
-                <a:cs typeface="+mn-cs"/>
-              </a:rPr>
-              <a:t>vdots</a:t>
-            </a:r>
-            <a:r>
-              <a:rPr lang="en-US" sz="1200" kern="1200">
-                <a:solidFill>
-                  <a:schemeClr val="tx1"/>
-                </a:solidFill>
-                <a:effectLst/>
-                <a:latin typeface="+mn-lt"/>
-                <a:ea typeface="+mn-ea"/>
-                <a:cs typeface="+mn-cs"/>
-              </a:rPr>
-              <a:t>\\</a:t>
-            </a:r>
-          </a:p>
-          <a:p>
-            <a:r>
-              <a:rPr lang="en-US" sz="1200" kern="1200">
-                <a:solidFill>
-                  <a:schemeClr val="tx1"/>
-                </a:solidFill>
-                <a:effectLst/>
-                <a:latin typeface="+mn-lt"/>
-                <a:ea typeface="+mn-ea"/>
-                <a:cs typeface="+mn-cs"/>
-              </a:rPr>
-              <a:t>\dot{x}_n(t) &amp;= </a:t>
-            </a:r>
-            <a:r>
-              <a:rPr lang="en-US" sz="1200" kern="1200" err="1">
-                <a:solidFill>
-                  <a:schemeClr val="tx1"/>
-                </a:solidFill>
-                <a:effectLst/>
-                <a:latin typeface="+mn-lt"/>
-                <a:ea typeface="+mn-ea"/>
-                <a:cs typeface="+mn-cs"/>
-              </a:rPr>
-              <a:t>f_n</a:t>
-            </a:r>
-            <a:r>
-              <a:rPr lang="en-US" sz="1200" kern="1200">
-                <a:solidFill>
-                  <a:schemeClr val="tx1"/>
-                </a:solidFill>
-                <a:effectLst/>
-                <a:latin typeface="+mn-lt"/>
-                <a:ea typeface="+mn-ea"/>
-                <a:cs typeface="+mn-cs"/>
-              </a:rPr>
-              <a:t>(x_1(t), x_2(t), \</a:t>
-            </a:r>
-            <a:r>
-              <a:rPr lang="en-US" sz="1200" kern="1200" err="1">
-                <a:solidFill>
-                  <a:schemeClr val="tx1"/>
-                </a:solidFill>
-                <a:effectLst/>
-                <a:latin typeface="+mn-lt"/>
-                <a:ea typeface="+mn-ea"/>
-                <a:cs typeface="+mn-cs"/>
-              </a:rPr>
-              <a:t>ldots</a:t>
-            </a:r>
-            <a:r>
-              <a:rPr lang="en-US" sz="1200" kern="1200">
-                <a:solidFill>
-                  <a:schemeClr val="tx1"/>
-                </a:solidFill>
-                <a:effectLst/>
-                <a:latin typeface="+mn-lt"/>
-                <a:ea typeface="+mn-ea"/>
-                <a:cs typeface="+mn-cs"/>
-              </a:rPr>
-              <a:t>, </a:t>
-            </a:r>
-            <a:r>
-              <a:rPr lang="en-US" sz="1200" kern="1200" err="1">
-                <a:solidFill>
-                  <a:schemeClr val="tx1"/>
-                </a:solidFill>
-                <a:effectLst/>
-                <a:latin typeface="+mn-lt"/>
-                <a:ea typeface="+mn-ea"/>
-                <a:cs typeface="+mn-cs"/>
-              </a:rPr>
-              <a:t>x_n</a:t>
-            </a:r>
-            <a:r>
-              <a:rPr lang="en-US" sz="1200" kern="1200">
-                <a:solidFill>
-                  <a:schemeClr val="tx1"/>
-                </a:solidFill>
-                <a:effectLst/>
-                <a:latin typeface="+mn-lt"/>
-                <a:ea typeface="+mn-ea"/>
-                <a:cs typeface="+mn-cs"/>
-              </a:rPr>
-              <a:t>(t), u_1(t), u_2(t), \</a:t>
-            </a:r>
-            <a:r>
-              <a:rPr lang="en-US" sz="1200" kern="1200" err="1">
-                <a:solidFill>
-                  <a:schemeClr val="tx1"/>
-                </a:solidFill>
-                <a:effectLst/>
-                <a:latin typeface="+mn-lt"/>
-                <a:ea typeface="+mn-ea"/>
-                <a:cs typeface="+mn-cs"/>
-              </a:rPr>
-              <a:t>ldots</a:t>
-            </a:r>
-            <a:r>
-              <a:rPr lang="en-US" sz="1200" kern="1200">
-                <a:solidFill>
-                  <a:schemeClr val="tx1"/>
-                </a:solidFill>
-                <a:effectLst/>
-                <a:latin typeface="+mn-lt"/>
-                <a:ea typeface="+mn-ea"/>
-                <a:cs typeface="+mn-cs"/>
-              </a:rPr>
-              <a:t>, </a:t>
-            </a:r>
-            <a:r>
-              <a:rPr lang="en-US" sz="1200" kern="1200" err="1">
-                <a:solidFill>
-                  <a:schemeClr val="tx1"/>
-                </a:solidFill>
-                <a:effectLst/>
-                <a:latin typeface="+mn-lt"/>
-                <a:ea typeface="+mn-ea"/>
-                <a:cs typeface="+mn-cs"/>
-              </a:rPr>
-              <a:t>u_m</a:t>
-            </a:r>
-            <a:r>
-              <a:rPr lang="en-US" sz="1200" kern="1200">
-                <a:solidFill>
-                  <a:schemeClr val="tx1"/>
-                </a:solidFill>
-                <a:effectLst/>
-                <a:latin typeface="+mn-lt"/>
-                <a:ea typeface="+mn-ea"/>
-                <a:cs typeface="+mn-cs"/>
-              </a:rPr>
-              <a:t>(t), t)\\</a:t>
-            </a:r>
-          </a:p>
-          <a:p>
-            <a:r>
-              <a:rPr lang="en-US" sz="1200" kern="1200">
-                <a:solidFill>
-                  <a:schemeClr val="tx1"/>
-                </a:solidFill>
-                <a:effectLst/>
-                <a:latin typeface="+mn-lt"/>
-                <a:ea typeface="+mn-ea"/>
-                <a:cs typeface="+mn-cs"/>
-              </a:rPr>
-              <a:t>\end{split}</a:t>
-            </a:r>
-          </a:p>
-          <a:p>
-            <a:endParaRPr lang="en-US"/>
-          </a:p>
-          <a:p>
-            <a:r>
-              <a:rPr lang="en-US"/>
-              <a:t>x_1(t), x_2(t), \</a:t>
-            </a:r>
-            <a:r>
-              <a:rPr lang="en-US" err="1"/>
-              <a:t>ldots</a:t>
-            </a:r>
-            <a:r>
-              <a:rPr lang="en-US"/>
-              <a:t>, </a:t>
-            </a:r>
-            <a:r>
-              <a:rPr lang="en-US" err="1"/>
-              <a:t>x_n</a:t>
-            </a:r>
-            <a:r>
-              <a:rPr lang="en-US"/>
-              <a:t>(t)</a:t>
-            </a:r>
-          </a:p>
-          <a:p>
-            <a:endParaRPr lang="en-US"/>
-          </a:p>
-          <a:p>
-            <a:pPr marL="0" marR="0" lvl="0" indent="0" algn="l" defTabSz="914400" rtl="0" eaLnBrk="1" fontAlgn="auto" latinLnBrk="0" hangingPunct="1">
-              <a:lnSpc>
-                <a:spcPct val="100000"/>
-              </a:lnSpc>
-              <a:spcBef>
-                <a:spcPts val="0"/>
-              </a:spcBef>
-              <a:spcAft>
-                <a:spcPts val="0"/>
-              </a:spcAft>
-              <a:buClrTx/>
-              <a:buSzTx/>
-              <a:buFontTx/>
-              <a:buNone/>
-              <a:tabLst/>
-              <a:defRPr/>
-            </a:pPr>
-            <a:r>
-              <a:rPr lang="en-US" sz="1200" kern="1200">
-                <a:solidFill>
-                  <a:schemeClr val="tx1"/>
-                </a:solidFill>
-                <a:effectLst/>
-                <a:latin typeface="+mn-lt"/>
-                <a:ea typeface="+mn-ea"/>
-                <a:cs typeface="+mn-cs"/>
-              </a:rPr>
-              <a:t>u_1(t), u_2(t), \</a:t>
-            </a:r>
-            <a:r>
-              <a:rPr lang="en-US" sz="1200" kern="1200" err="1">
-                <a:solidFill>
-                  <a:schemeClr val="tx1"/>
-                </a:solidFill>
-                <a:effectLst/>
-                <a:latin typeface="+mn-lt"/>
-                <a:ea typeface="+mn-ea"/>
-                <a:cs typeface="+mn-cs"/>
-              </a:rPr>
-              <a:t>ldots</a:t>
-            </a:r>
-            <a:r>
-              <a:rPr lang="en-US" sz="1200" kern="1200">
-                <a:solidFill>
-                  <a:schemeClr val="tx1"/>
-                </a:solidFill>
-                <a:effectLst/>
-                <a:latin typeface="+mn-lt"/>
-                <a:ea typeface="+mn-ea"/>
-                <a:cs typeface="+mn-cs"/>
-              </a:rPr>
-              <a:t>, </a:t>
-            </a:r>
-            <a:r>
-              <a:rPr lang="en-US" sz="1200" kern="1200" err="1">
-                <a:solidFill>
-                  <a:schemeClr val="tx1"/>
-                </a:solidFill>
-                <a:effectLst/>
-                <a:latin typeface="+mn-lt"/>
-                <a:ea typeface="+mn-ea"/>
-                <a:cs typeface="+mn-cs"/>
-              </a:rPr>
-              <a:t>u_m</a:t>
-            </a:r>
-            <a:r>
-              <a:rPr lang="en-US" sz="1200" kern="1200">
-                <a:solidFill>
-                  <a:schemeClr val="tx1"/>
-                </a:solidFill>
-                <a:effectLst/>
-                <a:latin typeface="+mn-lt"/>
-                <a:ea typeface="+mn-ea"/>
-                <a:cs typeface="+mn-cs"/>
-              </a:rPr>
-              <a:t>(t)</a:t>
-            </a:r>
-          </a:p>
-          <a:p>
-            <a:endParaRPr lang="en-US"/>
-          </a:p>
-          <a:p>
-            <a:endParaRPr lang="en-US"/>
-          </a:p>
-          <a:p>
-            <a:endParaRPr lang="en-US"/>
-          </a:p>
-          <a:p>
-            <a:endParaRPr lang="en-US"/>
+            <a:endParaRPr lang="en-US" dirty="0"/>
           </a:p>
         </p:txBody>
       </p:sp>
@@ -5922,316 +2223,7 @@
           <a:bodyPr/>
           <a:lstStyle/>
           <a:p>
-            <a:r>
-              <a:rPr lang="en-US" sz="1200" kern="1200">
-                <a:solidFill>
-                  <a:schemeClr val="tx1"/>
-                </a:solidFill>
-                <a:effectLst/>
-                <a:latin typeface="+mn-lt"/>
-                <a:ea typeface="+mn-ea"/>
-                <a:cs typeface="+mn-cs"/>
-              </a:rPr>
-              <a:t>\</a:t>
-            </a:r>
-            <a:r>
-              <a:rPr lang="en-US" sz="1200" kern="1200" err="1">
-                <a:solidFill>
-                  <a:schemeClr val="tx1"/>
-                </a:solidFill>
-                <a:effectLst/>
-                <a:latin typeface="+mn-lt"/>
-                <a:ea typeface="+mn-ea"/>
-                <a:cs typeface="+mn-cs"/>
-              </a:rPr>
-              <a:t>newcommand</a:t>
-            </a:r>
-            <a:r>
-              <a:rPr lang="en-US" sz="1200" kern="1200">
-                <a:solidFill>
-                  <a:schemeClr val="tx1"/>
-                </a:solidFill>
-                <a:effectLst/>
-                <a:latin typeface="+mn-lt"/>
-                <a:ea typeface="+mn-ea"/>
-                <a:cs typeface="+mn-cs"/>
-              </a:rPr>
-              <a:t>{\ad}{\</a:t>
-            </a:r>
-            <a:r>
-              <a:rPr lang="en-US" sz="1200" kern="1200" err="1">
-                <a:solidFill>
-                  <a:schemeClr val="tx1"/>
-                </a:solidFill>
-                <a:effectLst/>
-                <a:latin typeface="+mn-lt"/>
-                <a:ea typeface="+mn-ea"/>
-                <a:cs typeface="+mn-cs"/>
-              </a:rPr>
-              <a:t>mathbf</a:t>
-            </a:r>
-            <a:r>
-              <a:rPr lang="en-US" sz="1200" kern="1200">
-                <a:solidFill>
-                  <a:schemeClr val="tx1"/>
-                </a:solidFill>
-                <a:effectLst/>
-                <a:latin typeface="+mn-lt"/>
-                <a:ea typeface="+mn-ea"/>
-                <a:cs typeface="+mn-cs"/>
-              </a:rPr>
-              <a:t>{f}}</a:t>
-            </a:r>
-          </a:p>
-          <a:p>
-            <a:r>
-              <a:rPr lang="en-US" sz="1200" kern="1200">
-                <a:solidFill>
-                  <a:schemeClr val="tx1"/>
-                </a:solidFill>
-                <a:effectLst/>
-                <a:latin typeface="+mn-lt"/>
-                <a:ea typeface="+mn-ea"/>
-                <a:cs typeface="+mn-cs"/>
-              </a:rPr>
-              <a:t>\</a:t>
-            </a:r>
-            <a:r>
-              <a:rPr lang="en-US" sz="1200" kern="1200" err="1">
-                <a:solidFill>
-                  <a:schemeClr val="tx1"/>
-                </a:solidFill>
-                <a:effectLst/>
-                <a:latin typeface="+mn-lt"/>
-                <a:ea typeface="+mn-ea"/>
-                <a:cs typeface="+mn-cs"/>
-              </a:rPr>
-              <a:t>newcommand</a:t>
-            </a:r>
-            <a:r>
-              <a:rPr lang="en-US" sz="1200" kern="1200">
-                <a:solidFill>
-                  <a:schemeClr val="tx1"/>
-                </a:solidFill>
-                <a:effectLst/>
-                <a:latin typeface="+mn-lt"/>
-                <a:ea typeface="+mn-ea"/>
-                <a:cs typeface="+mn-cs"/>
-              </a:rPr>
-              <a:t>{\</a:t>
-            </a:r>
-            <a:r>
-              <a:rPr lang="en-US" sz="1200" kern="1200" err="1">
-                <a:solidFill>
-                  <a:schemeClr val="tx1"/>
-                </a:solidFill>
-                <a:effectLst/>
-                <a:latin typeface="+mn-lt"/>
-                <a:ea typeface="+mn-ea"/>
-                <a:cs typeface="+mn-cs"/>
-              </a:rPr>
-              <a:t>uc</a:t>
-            </a:r>
-            <a:r>
-              <a:rPr lang="en-US" sz="1200" kern="1200">
-                <a:solidFill>
-                  <a:schemeClr val="tx1"/>
-                </a:solidFill>
-                <a:effectLst/>
-                <a:latin typeface="+mn-lt"/>
-                <a:ea typeface="+mn-ea"/>
-                <a:cs typeface="+mn-cs"/>
-              </a:rPr>
-              <a:t>}{\</a:t>
-            </a:r>
-            <a:r>
-              <a:rPr lang="en-US" sz="1200" kern="1200" err="1">
-                <a:solidFill>
-                  <a:schemeClr val="tx1"/>
-                </a:solidFill>
-                <a:effectLst/>
-                <a:latin typeface="+mn-lt"/>
-                <a:ea typeface="+mn-ea"/>
-                <a:cs typeface="+mn-cs"/>
-              </a:rPr>
-              <a:t>mathbf</a:t>
-            </a:r>
-            <a:r>
-              <a:rPr lang="en-US" sz="1200" kern="1200">
-                <a:solidFill>
-                  <a:schemeClr val="tx1"/>
-                </a:solidFill>
-                <a:effectLst/>
-                <a:latin typeface="+mn-lt"/>
-                <a:ea typeface="+mn-ea"/>
-                <a:cs typeface="+mn-cs"/>
-              </a:rPr>
-              <a:t>{u}}</a:t>
-            </a:r>
-          </a:p>
-          <a:p>
-            <a:r>
-              <a:rPr lang="en-US" sz="1200" kern="1200">
-                <a:solidFill>
-                  <a:schemeClr val="tx1"/>
-                </a:solidFill>
-                <a:effectLst/>
-                <a:latin typeface="+mn-lt"/>
-                <a:ea typeface="+mn-ea"/>
-                <a:cs typeface="+mn-cs"/>
-              </a:rPr>
-              <a:t>\</a:t>
-            </a:r>
-            <a:r>
-              <a:rPr lang="en-US" sz="1200" kern="1200" err="1">
-                <a:solidFill>
-                  <a:schemeClr val="tx1"/>
-                </a:solidFill>
-                <a:effectLst/>
-                <a:latin typeface="+mn-lt"/>
-                <a:ea typeface="+mn-ea"/>
-                <a:cs typeface="+mn-cs"/>
-              </a:rPr>
-              <a:t>newcommand</a:t>
-            </a:r>
-            <a:r>
-              <a:rPr lang="en-US" sz="1200" kern="1200">
-                <a:solidFill>
-                  <a:schemeClr val="tx1"/>
-                </a:solidFill>
-                <a:effectLst/>
-                <a:latin typeface="+mn-lt"/>
-                <a:ea typeface="+mn-ea"/>
-                <a:cs typeface="+mn-cs"/>
-              </a:rPr>
-              <a:t>{\x}{\</a:t>
-            </a:r>
-            <a:r>
-              <a:rPr lang="en-US" sz="1200" kern="1200" err="1">
-                <a:solidFill>
-                  <a:schemeClr val="tx1"/>
-                </a:solidFill>
-                <a:effectLst/>
-                <a:latin typeface="+mn-lt"/>
-                <a:ea typeface="+mn-ea"/>
-                <a:cs typeface="+mn-cs"/>
-              </a:rPr>
-              <a:t>mathbf</a:t>
-            </a:r>
-            <a:r>
-              <a:rPr lang="en-US" sz="1200" kern="1200">
-                <a:solidFill>
-                  <a:schemeClr val="tx1"/>
-                </a:solidFill>
-                <a:effectLst/>
-                <a:latin typeface="+mn-lt"/>
-                <a:ea typeface="+mn-ea"/>
-                <a:cs typeface="+mn-cs"/>
-              </a:rPr>
-              <a:t>{x}}</a:t>
-            </a:r>
-          </a:p>
-          <a:p>
-            <a:endParaRPr lang="en-US" sz="1200" kern="1200">
-              <a:solidFill>
-                <a:schemeClr val="tx1"/>
-              </a:solidFill>
-              <a:effectLst/>
-              <a:latin typeface="+mn-lt"/>
-              <a:ea typeface="+mn-ea"/>
-              <a:cs typeface="+mn-cs"/>
-            </a:endParaRPr>
-          </a:p>
-          <a:p>
-            <a:pPr marL="0" marR="0" lvl="0" indent="0" algn="l" defTabSz="914400" rtl="0" eaLnBrk="1" fontAlgn="auto" latinLnBrk="0" hangingPunct="1">
-              <a:lnSpc>
-                <a:spcPct val="100000"/>
-              </a:lnSpc>
-              <a:spcBef>
-                <a:spcPts val="0"/>
-              </a:spcBef>
-              <a:spcAft>
-                <a:spcPts val="0"/>
-              </a:spcAft>
-              <a:buClrTx/>
-              <a:buSzTx/>
-              <a:buFontTx/>
-              <a:buNone/>
-              <a:tabLst/>
-              <a:defRPr/>
-            </a:pPr>
-            <a:r>
-              <a:rPr lang="en-US" sz="1200" kern="1200">
-                <a:solidFill>
-                  <a:schemeClr val="tx1"/>
-                </a:solidFill>
-                <a:effectLst/>
-                <a:latin typeface="+mn-lt"/>
-                <a:ea typeface="+mn-ea"/>
-                <a:cs typeface="+mn-cs"/>
-              </a:rPr>
-              <a:t>\dot\x(t) = \ad(\x(t), \</a:t>
-            </a:r>
-            <a:r>
-              <a:rPr lang="en-US" sz="1200" kern="1200" err="1">
-                <a:solidFill>
-                  <a:schemeClr val="tx1"/>
-                </a:solidFill>
-                <a:effectLst/>
-                <a:latin typeface="+mn-lt"/>
-                <a:ea typeface="+mn-ea"/>
-                <a:cs typeface="+mn-cs"/>
-              </a:rPr>
-              <a:t>uc</a:t>
-            </a:r>
-            <a:r>
-              <a:rPr lang="en-US" sz="1200" kern="1200">
-                <a:solidFill>
-                  <a:schemeClr val="tx1"/>
-                </a:solidFill>
-                <a:effectLst/>
-                <a:latin typeface="+mn-lt"/>
-                <a:ea typeface="+mn-ea"/>
-                <a:cs typeface="+mn-cs"/>
-              </a:rPr>
-              <a:t>(t), t)</a:t>
-            </a:r>
-          </a:p>
-          <a:p>
-            <a:endParaRPr lang="en-US" sz="1200" kern="1200">
-              <a:solidFill>
-                <a:schemeClr val="tx1"/>
-              </a:solidFill>
-              <a:effectLst/>
-              <a:latin typeface="+mn-lt"/>
-              <a:ea typeface="+mn-ea"/>
-              <a:cs typeface="+mn-cs"/>
-            </a:endParaRPr>
-          </a:p>
-          <a:p>
-            <a:endParaRPr lang="en-US" sz="1200" kern="1200">
-              <a:solidFill>
-                <a:schemeClr val="tx1"/>
-              </a:solidFill>
-              <a:effectLst/>
-              <a:latin typeface="+mn-lt"/>
-              <a:ea typeface="+mn-ea"/>
-              <a:cs typeface="+mn-cs"/>
-            </a:endParaRPr>
-          </a:p>
-          <a:p>
-            <a:endParaRPr lang="en-US" sz="1200" kern="1200">
-              <a:solidFill>
-                <a:schemeClr val="tx1"/>
-              </a:solidFill>
-              <a:effectLst/>
-              <a:latin typeface="+mn-lt"/>
-              <a:ea typeface="+mn-ea"/>
-              <a:cs typeface="+mn-cs"/>
-            </a:endParaRPr>
-          </a:p>
-          <a:p>
-            <a:endParaRPr lang="en-US"/>
+            <a:endParaRPr lang="en-US" dirty="0"/>
           </a:p>
         </p:txBody>
       </p:sp>
@@ -6315,444 +2307,6 @@
           <a:bodyPr/>
           <a:lstStyle/>
           <a:p>
-            <a:pPr marL="0" marR="0" lvl="0" indent="0" algn="l" defTabSz="914400" rtl="0" eaLnBrk="1" fontAlgn="auto" latinLnBrk="0" hangingPunct="1">
-              <a:lnSpc>
-                <a:spcPct val="100000"/>
-              </a:lnSpc>
-              <a:spcBef>
-                <a:spcPts val="0"/>
-              </a:spcBef>
-              <a:spcAft>
-                <a:spcPts val="0"/>
-              </a:spcAft>
-              <a:buClrTx/>
-              <a:buSzTx/>
-              <a:buFontTx/>
-              <a:buNone/>
-              <a:tabLst/>
-              <a:defRPr/>
-            </a:pPr>
-            <a:r>
-              <a:rPr lang="en-US" sz="1200" kern="1200" dirty="0">
-                <a:solidFill>
-                  <a:schemeClr val="tx1"/>
-                </a:solidFill>
-                <a:effectLst/>
-                <a:latin typeface="+mn-lt"/>
-                <a:ea typeface="+mn-ea"/>
-                <a:cs typeface="+mn-cs"/>
-              </a:rPr>
-              <a:t>\</a:t>
-            </a:r>
-            <a:r>
-              <a:rPr lang="en-US" sz="1200" kern="1200" dirty="0" err="1">
-                <a:solidFill>
-                  <a:schemeClr val="tx1"/>
-                </a:solidFill>
-                <a:effectLst/>
-                <a:latin typeface="+mn-lt"/>
-                <a:ea typeface="+mn-ea"/>
-                <a:cs typeface="+mn-cs"/>
-              </a:rPr>
-              <a:t>ddot</a:t>
-            </a:r>
-            <a:r>
-              <a:rPr lang="en-US" sz="1200" kern="1200" dirty="0">
-                <a:solidFill>
-                  <a:schemeClr val="tx1"/>
-                </a:solidFill>
-                <a:effectLst/>
-                <a:latin typeface="+mn-lt"/>
-                <a:ea typeface="+mn-ea"/>
-                <a:cs typeface="+mn-cs"/>
-              </a:rPr>
-              <a:t> s = a</a:t>
-            </a:r>
-          </a:p>
-          <a:p>
-            <a:pPr marL="0" marR="0" lvl="0" indent="0" algn="l" defTabSz="914400" rtl="0" eaLnBrk="1" fontAlgn="auto" latinLnBrk="0" hangingPunct="1">
-              <a:lnSpc>
-                <a:spcPct val="100000"/>
-              </a:lnSpc>
-              <a:spcBef>
-                <a:spcPts val="0"/>
-              </a:spcBef>
-              <a:spcAft>
-                <a:spcPts val="0"/>
-              </a:spcAft>
-              <a:buClrTx/>
-              <a:buSzTx/>
-              <a:buFontTx/>
-              <a:buNone/>
-              <a:tabLst/>
-              <a:defRPr/>
-            </a:pPr>
-            <a:endParaRPr lang="en-US" sz="1200" kern="1200" dirty="0">
-              <a:solidFill>
-                <a:schemeClr val="tx1"/>
-              </a:solidFill>
-              <a:effectLst/>
-              <a:latin typeface="+mn-lt"/>
-              <a:ea typeface="+mn-ea"/>
-              <a:cs typeface="+mn-cs"/>
-            </a:endParaRPr>
-          </a:p>
-          <a:p>
-            <a:pPr marL="0" marR="0" lvl="0" indent="0" algn="l" defTabSz="914400" rtl="0" eaLnBrk="1" fontAlgn="auto" latinLnBrk="0" hangingPunct="1">
-              <a:lnSpc>
-                <a:spcPct val="100000"/>
-              </a:lnSpc>
-              <a:spcBef>
-                <a:spcPts val="0"/>
-              </a:spcBef>
-              <a:spcAft>
-                <a:spcPts val="0"/>
-              </a:spcAft>
-              <a:buClrTx/>
-              <a:buSzTx/>
-              <a:buFontTx/>
-              <a:buNone/>
-              <a:tabLst/>
-              <a:defRPr/>
-            </a:pPr>
-            <a:r>
-              <a:rPr lang="en-US" sz="1200" kern="1200" dirty="0">
-                <a:solidFill>
-                  <a:schemeClr val="tx1"/>
-                </a:solidFill>
-                <a:effectLst/>
-                <a:latin typeface="+mn-lt"/>
-                <a:ea typeface="+mn-ea"/>
-                <a:cs typeface="+mn-cs"/>
-              </a:rPr>
-              <a:t>\begin{</a:t>
-            </a:r>
-            <a:r>
-              <a:rPr lang="en-US" sz="1200" kern="1200" dirty="0" err="1">
-                <a:solidFill>
-                  <a:schemeClr val="tx1"/>
-                </a:solidFill>
-                <a:effectLst/>
-                <a:latin typeface="+mn-lt"/>
-                <a:ea typeface="+mn-ea"/>
-                <a:cs typeface="+mn-cs"/>
-              </a:rPr>
-              <a:t>bmatrix</a:t>
-            </a:r>
-            <a:r>
-              <a:rPr lang="en-US" sz="1200" kern="1200" dirty="0">
-                <a:solidFill>
-                  <a:schemeClr val="tx1"/>
-                </a:solidFill>
-                <a:effectLst/>
-                <a:latin typeface="+mn-lt"/>
-                <a:ea typeface="+mn-ea"/>
-                <a:cs typeface="+mn-cs"/>
-              </a:rPr>
-              <a:t>} \dot s \\ \dot v\end{</a:t>
-            </a:r>
-            <a:r>
-              <a:rPr lang="en-US" sz="1200" kern="1200" dirty="0" err="1">
-                <a:solidFill>
-                  <a:schemeClr val="tx1"/>
-                </a:solidFill>
-                <a:effectLst/>
-                <a:latin typeface="+mn-lt"/>
-                <a:ea typeface="+mn-ea"/>
-                <a:cs typeface="+mn-cs"/>
-              </a:rPr>
-              <a:t>bmatrix</a:t>
-            </a:r>
-            <a:r>
-              <a:rPr lang="en-US" sz="1200" kern="1200" dirty="0">
-                <a:solidFill>
-                  <a:schemeClr val="tx1"/>
-                </a:solidFill>
-                <a:effectLst/>
-                <a:latin typeface="+mn-lt"/>
-                <a:ea typeface="+mn-ea"/>
-                <a:cs typeface="+mn-cs"/>
-              </a:rPr>
-              <a:t>} = \begin{</a:t>
-            </a:r>
-            <a:r>
-              <a:rPr lang="en-US" sz="1200" kern="1200" dirty="0" err="1">
-                <a:solidFill>
-                  <a:schemeClr val="tx1"/>
-                </a:solidFill>
-                <a:effectLst/>
-                <a:latin typeface="+mn-lt"/>
-                <a:ea typeface="+mn-ea"/>
-                <a:cs typeface="+mn-cs"/>
-              </a:rPr>
-              <a:t>bmatrix</a:t>
-            </a:r>
-            <a:r>
-              <a:rPr lang="en-US" sz="1200" kern="1200" dirty="0">
-                <a:solidFill>
-                  <a:schemeClr val="tx1"/>
-                </a:solidFill>
-                <a:effectLst/>
-                <a:latin typeface="+mn-lt"/>
-                <a:ea typeface="+mn-ea"/>
-                <a:cs typeface="+mn-cs"/>
-              </a:rPr>
-              <a:t>} 0 &amp; 1 \\ 0 &amp; 0\end{</a:t>
-            </a:r>
-            <a:r>
-              <a:rPr lang="en-US" sz="1200" kern="1200" dirty="0" err="1">
-                <a:solidFill>
-                  <a:schemeClr val="tx1"/>
-                </a:solidFill>
-                <a:effectLst/>
-                <a:latin typeface="+mn-lt"/>
-                <a:ea typeface="+mn-ea"/>
-                <a:cs typeface="+mn-cs"/>
-              </a:rPr>
-              <a:t>bmatrix</a:t>
-            </a:r>
-            <a:r>
-              <a:rPr lang="en-US" sz="1200" kern="1200" dirty="0">
-                <a:solidFill>
-                  <a:schemeClr val="tx1"/>
-                </a:solidFill>
-                <a:effectLst/>
-                <a:latin typeface="+mn-lt"/>
-                <a:ea typeface="+mn-ea"/>
-                <a:cs typeface="+mn-cs"/>
-              </a:rPr>
-              <a:t>} \begin{</a:t>
-            </a:r>
-            <a:r>
-              <a:rPr lang="en-US" sz="1200" kern="1200" dirty="0" err="1">
-                <a:solidFill>
-                  <a:schemeClr val="tx1"/>
-                </a:solidFill>
-                <a:effectLst/>
-                <a:latin typeface="+mn-lt"/>
-                <a:ea typeface="+mn-ea"/>
-                <a:cs typeface="+mn-cs"/>
-              </a:rPr>
-              <a:t>bmatrix</a:t>
-            </a:r>
-            <a:r>
-              <a:rPr lang="en-US" sz="1200" kern="1200" dirty="0">
-                <a:solidFill>
-                  <a:schemeClr val="tx1"/>
-                </a:solidFill>
-                <a:effectLst/>
-                <a:latin typeface="+mn-lt"/>
-                <a:ea typeface="+mn-ea"/>
-                <a:cs typeface="+mn-cs"/>
-              </a:rPr>
-              <a:t>} s \\ v\end{</a:t>
-            </a:r>
-            <a:r>
-              <a:rPr lang="en-US" sz="1200" kern="1200" dirty="0" err="1">
-                <a:solidFill>
-                  <a:schemeClr val="tx1"/>
-                </a:solidFill>
-                <a:effectLst/>
-                <a:latin typeface="+mn-lt"/>
-                <a:ea typeface="+mn-ea"/>
-                <a:cs typeface="+mn-cs"/>
-              </a:rPr>
-              <a:t>bmatrix</a:t>
-            </a:r>
-            <a:r>
-              <a:rPr lang="en-US" sz="1200" kern="1200" dirty="0">
-                <a:solidFill>
-                  <a:schemeClr val="tx1"/>
-                </a:solidFill>
-                <a:effectLst/>
-                <a:latin typeface="+mn-lt"/>
-                <a:ea typeface="+mn-ea"/>
-                <a:cs typeface="+mn-cs"/>
-              </a:rPr>
-              <a:t>} + \begin{</a:t>
-            </a:r>
-            <a:r>
-              <a:rPr lang="en-US" sz="1200" kern="1200" dirty="0" err="1">
-                <a:solidFill>
-                  <a:schemeClr val="tx1"/>
-                </a:solidFill>
-                <a:effectLst/>
-                <a:latin typeface="+mn-lt"/>
-                <a:ea typeface="+mn-ea"/>
-                <a:cs typeface="+mn-cs"/>
-              </a:rPr>
-              <a:t>bmatrix</a:t>
-            </a:r>
-            <a:r>
-              <a:rPr lang="en-US" sz="1200" kern="1200" dirty="0">
-                <a:solidFill>
-                  <a:schemeClr val="tx1"/>
-                </a:solidFill>
-                <a:effectLst/>
-                <a:latin typeface="+mn-lt"/>
-                <a:ea typeface="+mn-ea"/>
-                <a:cs typeface="+mn-cs"/>
-              </a:rPr>
-              <a:t>} 0 \\ 1\end{</a:t>
-            </a:r>
-            <a:r>
-              <a:rPr lang="en-US" sz="1200" kern="1200" dirty="0" err="1">
-                <a:solidFill>
-                  <a:schemeClr val="tx1"/>
-                </a:solidFill>
-                <a:effectLst/>
-                <a:latin typeface="+mn-lt"/>
-                <a:ea typeface="+mn-ea"/>
-                <a:cs typeface="+mn-cs"/>
-              </a:rPr>
-              <a:t>bmatrix</a:t>
-            </a:r>
-            <a:r>
-              <a:rPr lang="en-US" sz="1200" kern="1200" dirty="0">
-                <a:solidFill>
-                  <a:schemeClr val="tx1"/>
-                </a:solidFill>
-                <a:effectLst/>
-                <a:latin typeface="+mn-lt"/>
-                <a:ea typeface="+mn-ea"/>
-                <a:cs typeface="+mn-cs"/>
-              </a:rPr>
-              <a:t>} \begin{</a:t>
-            </a:r>
-            <a:r>
-              <a:rPr lang="en-US" sz="1200" kern="1200" dirty="0" err="1">
-                <a:solidFill>
-                  <a:schemeClr val="tx1"/>
-                </a:solidFill>
-                <a:effectLst/>
-                <a:latin typeface="+mn-lt"/>
-                <a:ea typeface="+mn-ea"/>
-                <a:cs typeface="+mn-cs"/>
-              </a:rPr>
-              <a:t>bmatrix</a:t>
-            </a:r>
-            <a:r>
-              <a:rPr lang="en-US" sz="1200" kern="1200" dirty="0">
-                <a:solidFill>
-                  <a:schemeClr val="tx1"/>
-                </a:solidFill>
-                <a:effectLst/>
-                <a:latin typeface="+mn-lt"/>
-                <a:ea typeface="+mn-ea"/>
-                <a:cs typeface="+mn-cs"/>
-              </a:rPr>
-              <a:t>} a \end{</a:t>
-            </a:r>
-            <a:r>
-              <a:rPr lang="en-US" sz="1200" kern="1200" dirty="0" err="1">
-                <a:solidFill>
-                  <a:schemeClr val="tx1"/>
-                </a:solidFill>
-                <a:effectLst/>
-                <a:latin typeface="+mn-lt"/>
-                <a:ea typeface="+mn-ea"/>
-                <a:cs typeface="+mn-cs"/>
-              </a:rPr>
-              <a:t>bmatrix</a:t>
-            </a:r>
-            <a:r>
-              <a:rPr lang="en-US" sz="1200" kern="1200" dirty="0">
-                <a:solidFill>
-                  <a:schemeClr val="tx1"/>
-                </a:solidFill>
-                <a:effectLst/>
-                <a:latin typeface="+mn-lt"/>
-                <a:ea typeface="+mn-ea"/>
-                <a:cs typeface="+mn-cs"/>
-              </a:rPr>
-              <a:t>}</a:t>
-            </a:r>
-          </a:p>
-          <a:p>
-            <a:pPr marL="0" marR="0" lvl="0" indent="0" algn="l" defTabSz="914400" rtl="0" eaLnBrk="1" fontAlgn="auto" latinLnBrk="0" hangingPunct="1">
-              <a:lnSpc>
-                <a:spcPct val="100000"/>
-              </a:lnSpc>
-              <a:spcBef>
-                <a:spcPts val="0"/>
-              </a:spcBef>
-              <a:spcAft>
-                <a:spcPts val="0"/>
-              </a:spcAft>
-              <a:buClrTx/>
-              <a:buSzTx/>
-              <a:buFontTx/>
-              <a:buNone/>
-              <a:tabLst/>
-              <a:defRPr/>
-            </a:pPr>
-            <a:endParaRPr lang="en-US" sz="1200" kern="1200" dirty="0">
-              <a:solidFill>
-                <a:schemeClr val="tx1"/>
-              </a:solidFill>
-              <a:effectLst/>
-              <a:latin typeface="+mn-lt"/>
-              <a:ea typeface="+mn-ea"/>
-              <a:cs typeface="+mn-cs"/>
-            </a:endParaRPr>
-          </a:p>
-          <a:p>
-            <a:pPr marL="0" marR="0" lvl="0" indent="0" algn="l" defTabSz="914400" rtl="0" eaLnBrk="1" fontAlgn="auto" latinLnBrk="0" hangingPunct="1">
-              <a:lnSpc>
-                <a:spcPct val="100000"/>
-              </a:lnSpc>
-              <a:spcBef>
-                <a:spcPts val="0"/>
-              </a:spcBef>
-              <a:spcAft>
-                <a:spcPts val="0"/>
-              </a:spcAft>
-              <a:buClrTx/>
-              <a:buSzTx/>
-              <a:buFontTx/>
-              <a:buNone/>
-              <a:tabLst/>
-              <a:defRPr/>
-            </a:pPr>
-            <a:endParaRPr lang="en-US" sz="1200" kern="1200" dirty="0">
-              <a:solidFill>
-                <a:schemeClr val="tx1"/>
-              </a:solidFill>
-              <a:effectLst/>
-              <a:latin typeface="+mn-lt"/>
-              <a:ea typeface="+mn-ea"/>
-              <a:cs typeface="+mn-cs"/>
-            </a:endParaRPr>
-          </a:p>
-          <a:p>
-            <a:pPr marL="0" marR="0" lvl="0" indent="0" algn="l" defTabSz="914400" rtl="0" eaLnBrk="1" fontAlgn="auto" latinLnBrk="0" hangingPunct="1">
-              <a:lnSpc>
-                <a:spcPct val="100000"/>
-              </a:lnSpc>
-              <a:spcBef>
-                <a:spcPts val="0"/>
-              </a:spcBef>
-              <a:spcAft>
-                <a:spcPts val="0"/>
-              </a:spcAft>
-              <a:buClrTx/>
-              <a:buSzTx/>
-              <a:buFontTx/>
-              <a:buNone/>
-              <a:tabLst/>
-              <a:defRPr/>
-            </a:pPr>
-            <a:endParaRPr lang="en-US" sz="1200" kern="1200" dirty="0">
-              <a:solidFill>
-                <a:schemeClr val="tx1"/>
-              </a:solidFill>
-              <a:effectLst/>
-              <a:latin typeface="+mn-lt"/>
-              <a:ea typeface="+mn-ea"/>
-              <a:cs typeface="+mn-cs"/>
-            </a:endParaRPr>
-          </a:p>
-          <a:p>
             <a:endParaRPr lang="en-US" dirty="0"/>
           </a:p>
         </p:txBody>
@@ -6836,444 +2390,6 @@
         <p:txBody>
           <a:bodyPr/>
           <a:lstStyle/>
-          <a:p>
-            <a:pPr marL="0" marR="0" lvl="0" indent="0" algn="l" defTabSz="914400" rtl="0" eaLnBrk="1" fontAlgn="auto" latinLnBrk="0" hangingPunct="1">
-              <a:lnSpc>
-                <a:spcPct val="100000"/>
-              </a:lnSpc>
-              <a:spcBef>
-                <a:spcPts val="0"/>
-              </a:spcBef>
-              <a:spcAft>
-                <a:spcPts val="0"/>
-              </a:spcAft>
-              <a:buClrTx/>
-              <a:buSzTx/>
-              <a:buFontTx/>
-              <a:buNone/>
-              <a:tabLst/>
-              <a:defRPr/>
-            </a:pPr>
-            <a:r>
-              <a:rPr lang="en-US" sz="1200" kern="1200" dirty="0">
-                <a:solidFill>
-                  <a:schemeClr val="tx1"/>
-                </a:solidFill>
-                <a:effectLst/>
-                <a:latin typeface="+mn-lt"/>
-                <a:ea typeface="+mn-ea"/>
-                <a:cs typeface="+mn-cs"/>
-              </a:rPr>
-              <a:t>\</a:t>
-            </a:r>
-            <a:r>
-              <a:rPr lang="en-US" sz="1200" kern="1200" dirty="0" err="1">
-                <a:solidFill>
-                  <a:schemeClr val="tx1"/>
-                </a:solidFill>
-                <a:effectLst/>
-                <a:latin typeface="+mn-lt"/>
-                <a:ea typeface="+mn-ea"/>
-                <a:cs typeface="+mn-cs"/>
-              </a:rPr>
-              <a:t>ddot</a:t>
-            </a:r>
-            <a:r>
-              <a:rPr lang="en-US" sz="1200" kern="1200" dirty="0">
-                <a:solidFill>
-                  <a:schemeClr val="tx1"/>
-                </a:solidFill>
-                <a:effectLst/>
-                <a:latin typeface="+mn-lt"/>
-                <a:ea typeface="+mn-ea"/>
-                <a:cs typeface="+mn-cs"/>
-              </a:rPr>
-              <a:t> s = a</a:t>
-            </a:r>
-          </a:p>
-          <a:p>
-            <a:pPr marL="0" marR="0" lvl="0" indent="0" algn="l" defTabSz="914400" rtl="0" eaLnBrk="1" fontAlgn="auto" latinLnBrk="0" hangingPunct="1">
-              <a:lnSpc>
-                <a:spcPct val="100000"/>
-              </a:lnSpc>
-              <a:spcBef>
-                <a:spcPts val="0"/>
-              </a:spcBef>
-              <a:spcAft>
-                <a:spcPts val="0"/>
-              </a:spcAft>
-              <a:buClrTx/>
-              <a:buSzTx/>
-              <a:buFontTx/>
-              <a:buNone/>
-              <a:tabLst/>
-              <a:defRPr/>
-            </a:pPr>
-            <a:endParaRPr lang="en-US" sz="1200" kern="1200" dirty="0">
-              <a:solidFill>
-                <a:schemeClr val="tx1"/>
-              </a:solidFill>
-              <a:effectLst/>
-              <a:latin typeface="+mn-lt"/>
-              <a:ea typeface="+mn-ea"/>
-              <a:cs typeface="+mn-cs"/>
-            </a:endParaRPr>
-          </a:p>
-          <a:p>
-            <a:pPr marL="0" marR="0" lvl="0" indent="0" algn="l" defTabSz="914400" rtl="0" eaLnBrk="1" fontAlgn="auto" latinLnBrk="0" hangingPunct="1">
-              <a:lnSpc>
-                <a:spcPct val="100000"/>
-              </a:lnSpc>
-              <a:spcBef>
-                <a:spcPts val="0"/>
-              </a:spcBef>
-              <a:spcAft>
-                <a:spcPts val="0"/>
-              </a:spcAft>
-              <a:buClrTx/>
-              <a:buSzTx/>
-              <a:buFontTx/>
-              <a:buNone/>
-              <a:tabLst/>
-              <a:defRPr/>
-            </a:pPr>
-            <a:r>
-              <a:rPr lang="en-US" sz="1200" kern="1200" dirty="0">
-                <a:solidFill>
-                  <a:schemeClr val="tx1"/>
-                </a:solidFill>
-                <a:effectLst/>
-                <a:latin typeface="+mn-lt"/>
-                <a:ea typeface="+mn-ea"/>
-                <a:cs typeface="+mn-cs"/>
-              </a:rPr>
-              <a:t>\begin{</a:t>
-            </a:r>
-            <a:r>
-              <a:rPr lang="en-US" sz="1200" kern="1200" dirty="0" err="1">
-                <a:solidFill>
-                  <a:schemeClr val="tx1"/>
-                </a:solidFill>
-                <a:effectLst/>
-                <a:latin typeface="+mn-lt"/>
-                <a:ea typeface="+mn-ea"/>
-                <a:cs typeface="+mn-cs"/>
-              </a:rPr>
-              <a:t>bmatrix</a:t>
-            </a:r>
-            <a:r>
-              <a:rPr lang="en-US" sz="1200" kern="1200" dirty="0">
-                <a:solidFill>
-                  <a:schemeClr val="tx1"/>
-                </a:solidFill>
-                <a:effectLst/>
-                <a:latin typeface="+mn-lt"/>
-                <a:ea typeface="+mn-ea"/>
-                <a:cs typeface="+mn-cs"/>
-              </a:rPr>
-              <a:t>} \dot s \\ \dot v\end{</a:t>
-            </a:r>
-            <a:r>
-              <a:rPr lang="en-US" sz="1200" kern="1200" dirty="0" err="1">
-                <a:solidFill>
-                  <a:schemeClr val="tx1"/>
-                </a:solidFill>
-                <a:effectLst/>
-                <a:latin typeface="+mn-lt"/>
-                <a:ea typeface="+mn-ea"/>
-                <a:cs typeface="+mn-cs"/>
-              </a:rPr>
-              <a:t>bmatrix</a:t>
-            </a:r>
-            <a:r>
-              <a:rPr lang="en-US" sz="1200" kern="1200" dirty="0">
-                <a:solidFill>
-                  <a:schemeClr val="tx1"/>
-                </a:solidFill>
-                <a:effectLst/>
-                <a:latin typeface="+mn-lt"/>
-                <a:ea typeface="+mn-ea"/>
-                <a:cs typeface="+mn-cs"/>
-              </a:rPr>
-              <a:t>} = \begin{</a:t>
-            </a:r>
-            <a:r>
-              <a:rPr lang="en-US" sz="1200" kern="1200" dirty="0" err="1">
-                <a:solidFill>
-                  <a:schemeClr val="tx1"/>
-                </a:solidFill>
-                <a:effectLst/>
-                <a:latin typeface="+mn-lt"/>
-                <a:ea typeface="+mn-ea"/>
-                <a:cs typeface="+mn-cs"/>
-              </a:rPr>
-              <a:t>bmatrix</a:t>
-            </a:r>
-            <a:r>
-              <a:rPr lang="en-US" sz="1200" kern="1200" dirty="0">
-                <a:solidFill>
-                  <a:schemeClr val="tx1"/>
-                </a:solidFill>
-                <a:effectLst/>
-                <a:latin typeface="+mn-lt"/>
-                <a:ea typeface="+mn-ea"/>
-                <a:cs typeface="+mn-cs"/>
-              </a:rPr>
-              <a:t>} 0 &amp; 1 \\ 0 &amp; 0\end{</a:t>
-            </a:r>
-            <a:r>
-              <a:rPr lang="en-US" sz="1200" kern="1200" dirty="0" err="1">
-                <a:solidFill>
-                  <a:schemeClr val="tx1"/>
-                </a:solidFill>
-                <a:effectLst/>
-                <a:latin typeface="+mn-lt"/>
-                <a:ea typeface="+mn-ea"/>
-                <a:cs typeface="+mn-cs"/>
-              </a:rPr>
-              <a:t>bmatrix</a:t>
-            </a:r>
-            <a:r>
-              <a:rPr lang="en-US" sz="1200" kern="1200" dirty="0">
-                <a:solidFill>
-                  <a:schemeClr val="tx1"/>
-                </a:solidFill>
-                <a:effectLst/>
-                <a:latin typeface="+mn-lt"/>
-                <a:ea typeface="+mn-ea"/>
-                <a:cs typeface="+mn-cs"/>
-              </a:rPr>
-              <a:t>} \begin{</a:t>
-            </a:r>
-            <a:r>
-              <a:rPr lang="en-US" sz="1200" kern="1200" dirty="0" err="1">
-                <a:solidFill>
-                  <a:schemeClr val="tx1"/>
-                </a:solidFill>
-                <a:effectLst/>
-                <a:latin typeface="+mn-lt"/>
-                <a:ea typeface="+mn-ea"/>
-                <a:cs typeface="+mn-cs"/>
-              </a:rPr>
-              <a:t>bmatrix</a:t>
-            </a:r>
-            <a:r>
-              <a:rPr lang="en-US" sz="1200" kern="1200" dirty="0">
-                <a:solidFill>
-                  <a:schemeClr val="tx1"/>
-                </a:solidFill>
-                <a:effectLst/>
-                <a:latin typeface="+mn-lt"/>
-                <a:ea typeface="+mn-ea"/>
-                <a:cs typeface="+mn-cs"/>
-              </a:rPr>
-              <a:t>} s \\ v\end{</a:t>
-            </a:r>
-            <a:r>
-              <a:rPr lang="en-US" sz="1200" kern="1200" dirty="0" err="1">
-                <a:solidFill>
-                  <a:schemeClr val="tx1"/>
-                </a:solidFill>
-                <a:effectLst/>
-                <a:latin typeface="+mn-lt"/>
-                <a:ea typeface="+mn-ea"/>
-                <a:cs typeface="+mn-cs"/>
-              </a:rPr>
-              <a:t>bmatrix</a:t>
-            </a:r>
-            <a:r>
-              <a:rPr lang="en-US" sz="1200" kern="1200" dirty="0">
-                <a:solidFill>
-                  <a:schemeClr val="tx1"/>
-                </a:solidFill>
-                <a:effectLst/>
-                <a:latin typeface="+mn-lt"/>
-                <a:ea typeface="+mn-ea"/>
-                <a:cs typeface="+mn-cs"/>
-              </a:rPr>
-              <a:t>} + \begin{</a:t>
-            </a:r>
-            <a:r>
-              <a:rPr lang="en-US" sz="1200" kern="1200" dirty="0" err="1">
-                <a:solidFill>
-                  <a:schemeClr val="tx1"/>
-                </a:solidFill>
-                <a:effectLst/>
-                <a:latin typeface="+mn-lt"/>
-                <a:ea typeface="+mn-ea"/>
-                <a:cs typeface="+mn-cs"/>
-              </a:rPr>
-              <a:t>bmatrix</a:t>
-            </a:r>
-            <a:r>
-              <a:rPr lang="en-US" sz="1200" kern="1200" dirty="0">
-                <a:solidFill>
-                  <a:schemeClr val="tx1"/>
-                </a:solidFill>
-                <a:effectLst/>
-                <a:latin typeface="+mn-lt"/>
-                <a:ea typeface="+mn-ea"/>
-                <a:cs typeface="+mn-cs"/>
-              </a:rPr>
-              <a:t>} 0 \\ 1\end{</a:t>
-            </a:r>
-            <a:r>
-              <a:rPr lang="en-US" sz="1200" kern="1200" dirty="0" err="1">
-                <a:solidFill>
-                  <a:schemeClr val="tx1"/>
-                </a:solidFill>
-                <a:effectLst/>
-                <a:latin typeface="+mn-lt"/>
-                <a:ea typeface="+mn-ea"/>
-                <a:cs typeface="+mn-cs"/>
-              </a:rPr>
-              <a:t>bmatrix</a:t>
-            </a:r>
-            <a:r>
-              <a:rPr lang="en-US" sz="1200" kern="1200" dirty="0">
-                <a:solidFill>
-                  <a:schemeClr val="tx1"/>
-                </a:solidFill>
-                <a:effectLst/>
-                <a:latin typeface="+mn-lt"/>
-                <a:ea typeface="+mn-ea"/>
-                <a:cs typeface="+mn-cs"/>
-              </a:rPr>
-              <a:t>} \begin{</a:t>
-            </a:r>
-            <a:r>
-              <a:rPr lang="en-US" sz="1200" kern="1200" dirty="0" err="1">
-                <a:solidFill>
-                  <a:schemeClr val="tx1"/>
-                </a:solidFill>
-                <a:effectLst/>
-                <a:latin typeface="+mn-lt"/>
-                <a:ea typeface="+mn-ea"/>
-                <a:cs typeface="+mn-cs"/>
-              </a:rPr>
-              <a:t>bmatrix</a:t>
-            </a:r>
-            <a:r>
-              <a:rPr lang="en-US" sz="1200" kern="1200" dirty="0">
-                <a:solidFill>
-                  <a:schemeClr val="tx1"/>
-                </a:solidFill>
-                <a:effectLst/>
-                <a:latin typeface="+mn-lt"/>
-                <a:ea typeface="+mn-ea"/>
-                <a:cs typeface="+mn-cs"/>
-              </a:rPr>
-              <a:t>} a \end{</a:t>
-            </a:r>
-            <a:r>
-              <a:rPr lang="en-US" sz="1200" kern="1200" dirty="0" err="1">
-                <a:solidFill>
-                  <a:schemeClr val="tx1"/>
-                </a:solidFill>
-                <a:effectLst/>
-                <a:latin typeface="+mn-lt"/>
-                <a:ea typeface="+mn-ea"/>
-                <a:cs typeface="+mn-cs"/>
-              </a:rPr>
-              <a:t>bmatrix</a:t>
-            </a:r>
-            <a:r>
-              <a:rPr lang="en-US" sz="1200" kern="1200" dirty="0">
-                <a:solidFill>
-                  <a:schemeClr val="tx1"/>
-                </a:solidFill>
-                <a:effectLst/>
-                <a:latin typeface="+mn-lt"/>
-                <a:ea typeface="+mn-ea"/>
-                <a:cs typeface="+mn-cs"/>
-              </a:rPr>
-              <a:t>}</a:t>
-            </a:r>
-          </a:p>
-          <a:p>
-            <a:pPr marL="0" marR="0" lvl="0" indent="0" algn="l" defTabSz="914400" rtl="0" eaLnBrk="1" fontAlgn="auto" latinLnBrk="0" hangingPunct="1">
-              <a:lnSpc>
-                <a:spcPct val="100000"/>
-              </a:lnSpc>
-              <a:spcBef>
-                <a:spcPts val="0"/>
-              </a:spcBef>
-              <a:spcAft>
-                <a:spcPts val="0"/>
-              </a:spcAft>
-              <a:buClrTx/>
-              <a:buSzTx/>
-              <a:buFontTx/>
-              <a:buNone/>
-              <a:tabLst/>
-              <a:defRPr/>
-            </a:pPr>
-            <a:endParaRPr lang="en-US" sz="1200" kern="1200" dirty="0">
-              <a:solidFill>
-                <a:schemeClr val="tx1"/>
-              </a:solidFill>
-              <a:effectLst/>
-              <a:latin typeface="+mn-lt"/>
-              <a:ea typeface="+mn-ea"/>
-              <a:cs typeface="+mn-cs"/>
-            </a:endParaRPr>
-          </a:p>
-          <a:p>
-            <a:pPr marL="0" marR="0" lvl="0" indent="0" algn="l" defTabSz="914400" rtl="0" eaLnBrk="1" fontAlgn="auto" latinLnBrk="0" hangingPunct="1">
-              <a:lnSpc>
-                <a:spcPct val="100000"/>
-              </a:lnSpc>
-              <a:spcBef>
-                <a:spcPts val="0"/>
-              </a:spcBef>
-              <a:spcAft>
-                <a:spcPts val="0"/>
-              </a:spcAft>
-              <a:buClrTx/>
-              <a:buSzTx/>
-              <a:buFontTx/>
-              <a:buNone/>
-              <a:tabLst/>
-              <a:defRPr/>
-            </a:pPr>
-            <a:endParaRPr lang="en-US" sz="1200" kern="1200" dirty="0">
-              <a:solidFill>
-                <a:schemeClr val="tx1"/>
-              </a:solidFill>
-              <a:effectLst/>
-              <a:latin typeface="+mn-lt"/>
-              <a:ea typeface="+mn-ea"/>
-              <a:cs typeface="+mn-cs"/>
-            </a:endParaRPr>
-          </a:p>
-          <a:p>
-            <a:pPr marL="0" marR="0" lvl="0" indent="0" algn="l" defTabSz="914400" rtl="0" eaLnBrk="1" fontAlgn="auto" latinLnBrk="0" hangingPunct="1">
-              <a:lnSpc>
-                <a:spcPct val="100000"/>
-              </a:lnSpc>
-              <a:spcBef>
-                <a:spcPts val="0"/>
-              </a:spcBef>
-              <a:spcAft>
-                <a:spcPts val="0"/>
-              </a:spcAft>
-              <a:buClrTx/>
-              <a:buSzTx/>
-              <a:buFontTx/>
-              <a:buNone/>
-              <a:tabLst/>
-              <a:defRPr/>
-            </a:pPr>
-            <a:endParaRPr lang="en-US" sz="1200" kern="1200" dirty="0">
-              <a:solidFill>
-                <a:schemeClr val="tx1"/>
-              </a:solidFill>
-              <a:effectLst/>
-              <a:latin typeface="+mn-lt"/>
-              <a:ea typeface="+mn-ea"/>
-              <a:cs typeface="+mn-cs"/>
-            </a:endParaRPr>
-          </a:p>
           <a:p>
             <a:endParaRPr lang="en-US" dirty="0"/>
           </a:p>
@@ -7457,7 +2573,7 @@
           <a:p>
             <a:fld id="{F8F291FF-50FC-884B-8D02-F8DAE4532FEC}" type="datetime1">
               <a:rPr lang="en-US" smtClean="0"/>
-              <a:t>3/28/26</a:t>
+              <a:t>8/13/26</a:t>
             </a:fld>
             <a:endParaRPr lang="en-US"/>
           </a:p>
@@ -7733,7 +2849,7 @@
           <a:p>
             <a:fld id="{B1DFE054-40FB-4F4A-868A-588932C881B4}" type="datetime1">
               <a:rPr lang="en-US" smtClean="0"/>
-              <a:t>3/28/26</a:t>
+              <a:t>8/13/26</a:t>
             </a:fld>
             <a:endParaRPr lang="en-US"/>
           </a:p>
@@ -8004,7 +3120,7 @@
           <a:p>
             <a:fld id="{B2AC8430-AA18-1E41-867A-0FBC590ABE15}" type="datetime1">
               <a:rPr lang="en-US" smtClean="0"/>
-              <a:t>3/28/26</a:t>
+              <a:t>8/13/26</a:t>
             </a:fld>
             <a:endParaRPr lang="en-US"/>
           </a:p>
@@ -8563,7 +3679,7 @@
           <a:p>
             <a:fld id="{68C0BE3F-BDD3-5443-8034-7196D2C63B91}" type="datetime1">
               <a:rPr lang="en-US" smtClean="0"/>
-              <a:t>3/28/26</a:t>
+              <a:t>8/13/26</a:t>
             </a:fld>
             <a:endParaRPr lang="en-US"/>
           </a:p>
@@ -9473,7 +4589,7 @@
           <a:p>
             <a:fld id="{A59C4363-4E34-E843-8D97-E5C066CDABF6}" type="datetime1">
               <a:rPr lang="en-US" smtClean="0"/>
-              <a:t>3/28/26</a:t>
+              <a:t>8/13/26</a:t>
             </a:fld>
             <a:endParaRPr lang="en-US"/>
           </a:p>
@@ -10527,7 +5643,7 @@
           <a:p>
             <a:fld id="{29807E52-AB11-514C-B6B8-071B6D2AA9F9}" type="datetime1">
               <a:rPr lang="en-US" smtClean="0"/>
-              <a:t>3/28/26</a:t>
+              <a:t>8/13/26</a:t>
             </a:fld>
             <a:endParaRPr lang="en-US"/>
           </a:p>
@@ -10731,7 +5847,7 @@
           <a:p>
             <a:fld id="{BA2A0350-269F-B84F-8C91-54E54076C6E4}" type="datetime1">
               <a:rPr lang="en-US" smtClean="0"/>
-              <a:t>3/28/26</a:t>
+              <a:t>8/13/26</a:t>
             </a:fld>
             <a:endParaRPr lang="en-US"/>
           </a:p>
@@ -10921,7 +6037,7 @@
           <a:p>
             <a:fld id="{E567D6CB-95CD-0E44-9896-00FA6ADBB881}" type="datetime1">
               <a:rPr lang="en-US" smtClean="0"/>
-              <a:t>3/29/26</a:t>
+              <a:t>8/13/26</a:t>
             </a:fld>
             <a:endParaRPr lang="en-US"/>
           </a:p>
@@ -13016,7 +8132,7 @@
           <a:p>
             <a:fld id="{D52AC30A-D477-BF45-90B4-0D8C1C0256E7}" type="datetime1">
               <a:rPr lang="en-US" smtClean="0"/>
-              <a:t>3/28/26</a:t>
+              <a:t>8/13/26</a:t>
             </a:fld>
             <a:endParaRPr lang="en-US"/>
           </a:p>
@@ -13219,7 +8335,7 @@
           <a:p>
             <a:fld id="{C5E8BDFC-D907-E640-A36D-BE4B01217C84}" type="datetime1">
               <a:rPr lang="en-US" smtClean="0"/>
-              <a:t>3/28/26</a:t>
+              <a:t>8/13/26</a:t>
             </a:fld>
             <a:endParaRPr lang="en-US"/>
           </a:p>
@@ -13397,7 +8513,7 @@
           <a:p>
             <a:fld id="{BDE90887-567C-B54F-A6A4-38CBBBCF6241}" type="datetime1">
               <a:rPr lang="en-US" smtClean="0"/>
-              <a:t>3/28/26</a:t>
+              <a:t>8/13/26</a:t>
             </a:fld>
             <a:endParaRPr lang="en-US"/>
           </a:p>
@@ -13517,7 +8633,7 @@
           <a:p>
             <a:fld id="{0483264F-6A62-7B4D-B904-13B688C5A15C}" type="datetime1">
               <a:rPr lang="en-US" smtClean="0"/>
-              <a:t>3/28/26</a:t>
+              <a:t>8/13/26</a:t>
             </a:fld>
             <a:endParaRPr lang="en-US"/>
           </a:p>
@@ -13746,7 +8862,7 @@
           <a:p>
             <a:fld id="{6077FA61-B475-B842-A114-D25A62D69B07}" type="datetime1">
               <a:rPr lang="en-US" smtClean="0"/>
-              <a:t>3/28/26</a:t>
+              <a:t>8/13/26</a:t>
             </a:fld>
             <a:endParaRPr lang="en-US"/>
           </a:p>
@@ -14146,7 +9262,7 @@
           <a:p>
             <a:fld id="{77FC06F2-821C-B043-95C1-A749E5FB21A5}" type="datetime1">
               <a:rPr lang="en-US" smtClean="0"/>
-              <a:t>3/28/26</a:t>
+              <a:t>8/13/26</a:t>
             </a:fld>
             <a:endParaRPr lang="en-US"/>
           </a:p>
@@ -14531,7 +9647,7 @@
           <a:p>
             <a:fld id="{3B8F7E3D-65BE-9F40-AF33-8C32B125E40F}" type="datetime1">
               <a:rPr lang="en-US" smtClean="0"/>
-              <a:t>3/28/26</a:t>
+              <a:t>8/13/26</a:t>
             </a:fld>
             <a:endParaRPr lang="en-US"/>
           </a:p>
@@ -14882,7 +9998,7 @@
           <a:p>
             <a:fld id="{2DE2957B-AE6A-0E48-B03F-57E146E3B317}" type="datetime1">
               <a:rPr lang="en-US" smtClean="0"/>
-              <a:t>3/28/26</a:t>
+              <a:t>8/13/26</a:t>
             </a:fld>
             <a:endParaRPr lang="en-US"/>
           </a:p>
@@ -15624,7 +10740,7 @@
           <a:p>
             <a:fld id="{57677793-3A45-4949-B5A4-A02A1AF5CAF1}" type="datetime1">
               <a:rPr lang="en-US" smtClean="0"/>
-              <a:t>3/28/26</a:t>
+              <a:t>8/13/26</a:t>
             </a:fld>
             <a:endParaRPr lang="en-US"/>
           </a:p>
@@ -16396,7 +11512,7 @@
           <a:p>
             <a:fld id="{6C2C31C3-6E44-CE40-B71C-067C108AD629}" type="datetime1">
               <a:rPr lang="en-US" smtClean="0"/>
-              <a:t>3/28/26</a:t>
+              <a:t>8/13/26</a:t>
             </a:fld>
             <a:endParaRPr lang="en-US"/>
           </a:p>
@@ -17138,7 +12254,7 @@
           <a:p>
             <a:fld id="{4E3BDD95-0E0F-E84B-8EE1-D2728A8C183B}" type="datetime1">
               <a:rPr lang="en-US" smtClean="0"/>
-              <a:t>3/28/26</a:t>
+              <a:t>8/13/26</a:t>
             </a:fld>
             <a:endParaRPr lang="en-US"/>
           </a:p>
@@ -18049,7 +13165,7 @@
           <a:p>
             <a:fld id="{D5138A12-9648-F844-BBA4-2C95842AA6F9}" type="datetime1">
               <a:rPr lang="en-US" smtClean="0"/>
-              <a:t>3/28/26</a:t>
+              <a:t>8/13/26</a:t>
             </a:fld>
             <a:endParaRPr lang="en-US"/>
           </a:p>
@@ -18474,7 +13590,7 @@
             </p:nvSpPr>
             <p:spPr>
               <a:blipFill>
-                <a:blip r:embed="rId2"/>
+                <a:blip r:embed="rId3"/>
                 <a:stretch>
                   <a:fillRect l="-965" t="-2632"/>
                 </a:stretch>
@@ -18518,7 +13634,7 @@
           <a:p>
             <a:fld id="{35811E26-2583-F24E-92C9-CE79399A7D54}" type="datetime1">
               <a:rPr lang="en-US" smtClean="0"/>
-              <a:t>3/28/26</a:t>
+              <a:t>8/13/26</a:t>
             </a:fld>
             <a:endParaRPr lang="en-US"/>
           </a:p>
@@ -18645,7 +13761,7 @@
                       <a:rPr lang="en-US" i="1" dirty="0" smtClean="0">
                         <a:latin typeface="Cambria Math" panose="02040503050406030204" pitchFamily="18" charset="0"/>
                       </a:rPr>
-                      <m:t>h</m:t>
+                      <m:t>ℎ</m:t>
                     </m:r>
                   </m:oMath>
                 </a14:m>
@@ -18782,7 +13898,7 @@
           <a:p>
             <a:fld id="{EDCEE76B-59E6-2147-A703-7FBC994A6228}" type="datetime1">
               <a:rPr lang="en-US" smtClean="0"/>
-              <a:t>3/28/26</a:t>
+              <a:t>8/13/26</a:t>
             </a:fld>
             <a:endParaRPr lang="en-US"/>
           </a:p>
@@ -18957,8 +14073,9 @@
                     <m:sSup>
                       <m:sSupPr>
                         <m:ctrlPr>
-                          <a:rPr lang="en-US" b="0" i="1" dirty="0" smtClean="0">
-                            <a:latin typeface="Cambria Math" panose="02040503050406030204" pitchFamily="18" charset="0"/>
+                          <a:rPr lang="en-US" b="0" i="0" dirty="0" smtClean="0">
+                            <a:latin typeface="Source Sans Pro" panose="020B0503030403020204" pitchFamily="34" charset="0"/>
+                            <a:ea typeface="Source Sans Pro" panose="020B0503030403020204" pitchFamily="34" charset="0"/>
                           </a:rPr>
                         </m:ctrlPr>
                       </m:sSupPr>
@@ -18967,7 +14084,7 @@
                           <m:rPr>
                             <m:nor/>
                           </m:rPr>
-                          <a:rPr lang="en-US" b="1" i="0" dirty="0" smtClean="0">
+                          <a:rPr lang="en-US" b="0" i="0" dirty="0" smtClean="0">
                             <a:latin typeface="Source Sans Pro" panose="020B0503030403020204" pitchFamily="34" charset="0"/>
                             <a:ea typeface="Source Sans Pro" panose="020B0503030403020204" pitchFamily="34" charset="0"/>
                           </a:rPr>
@@ -19029,8 +14146,9 @@
                     <m:sSup>
                       <m:sSupPr>
                         <m:ctrlPr>
-                          <a:rPr lang="en-US" i="1" dirty="0" smtClean="0">
-                            <a:latin typeface="Cambria Math" panose="02040503050406030204" pitchFamily="18" charset="0"/>
+                          <a:rPr lang="en-US" b="0" i="0" dirty="0" smtClean="0">
+                            <a:latin typeface="Source Sans Pro" panose="020B0503030403020204" pitchFamily="34" charset="0"/>
+                            <a:ea typeface="Source Sans Pro" panose="020B0503030403020204" pitchFamily="34" charset="0"/>
                           </a:rPr>
                         </m:ctrlPr>
                       </m:sSupPr>
@@ -19039,7 +14157,7 @@
                           <m:rPr>
                             <m:nor/>
                           </m:rPr>
-                          <a:rPr lang="en-US" b="1" i="0" dirty="0" smtClean="0">
+                          <a:rPr lang="en-US" b="0" i="0" dirty="0" smtClean="0">
                             <a:latin typeface="Source Sans Pro" panose="020B0503030403020204" pitchFamily="34" charset="0"/>
                             <a:ea typeface="Source Sans Pro" panose="020B0503030403020204" pitchFamily="34" charset="0"/>
                           </a:rPr>
@@ -19131,7 +14249,7 @@
           <a:p>
             <a:fld id="{2A8867C7-6EB7-8548-990E-2EA0696881C0}" type="datetime1">
               <a:rPr lang="en-US" smtClean="0"/>
-              <a:t>3/28/26</a:t>
+              <a:t>8/13/26</a:t>
             </a:fld>
             <a:endParaRPr lang="en-US"/>
           </a:p>
@@ -19466,7 +14584,7 @@
                     <m:sSup>
                       <m:sSupPr>
                         <m:ctrlPr>
-                          <a:rPr lang="en-US" b="0" i="1" dirty="0" smtClean="0">
+                          <a:rPr lang="en-US" b="1" i="0" dirty="0" smtClean="0">
                             <a:latin typeface="Cambria Math" panose="02040503050406030204" pitchFamily="18" charset="0"/>
                           </a:rPr>
                         </m:ctrlPr>
@@ -19497,7 +14615,7 @@
                     <m:sSup>
                       <m:sSupPr>
                         <m:ctrlPr>
-                          <a:rPr lang="en-US" b="0" i="1" dirty="0" smtClean="0">
+                          <a:rPr lang="en-US" b="1" i="0" dirty="0" smtClean="0">
                             <a:latin typeface="Cambria Math" panose="02040503050406030204" pitchFamily="18" charset="0"/>
                           </a:rPr>
                         </m:ctrlPr>
@@ -19590,7 +14708,7 @@
                         <m:limLow>
                           <m:limLowPr>
                             <m:ctrlPr>
-                              <a:rPr lang="en-US" b="0" i="1" smtClean="0">
+                              <a:rPr lang="en-US" b="0" i="0" smtClean="0">
                                 <a:latin typeface="Cambria Math" panose="02040503050406030204" pitchFamily="18" charset="0"/>
                               </a:rPr>
                             </m:ctrlPr>
@@ -19611,7 +14729,7 @@
                               <m:rPr>
                                 <m:nor/>
                               </m:rPr>
-                              <a:rPr lang="en-US" b="1" i="0" smtClean="0">
+                              <a:rPr lang="en-US" b="0" i="0" smtClean="0">
                                 <a:latin typeface="Source Sans Pro" panose="020B0503030403020204" pitchFamily="34" charset="0"/>
                                 <a:ea typeface="Source Sans Pro" panose="020B0503030403020204" pitchFamily="34" charset="0"/>
                               </a:rPr>
@@ -19708,7 +14826,7 @@
           <a:p>
             <a:fld id="{BC1C1DA1-4FC1-6845-938B-01AAAB4C1136}" type="datetime1">
               <a:rPr lang="en-US" smtClean="0"/>
-              <a:t>3/28/26</a:t>
+              <a:t>8/13/26</a:t>
             </a:fld>
             <a:endParaRPr lang="en-US"/>
           </a:p>
@@ -19976,7 +15094,7 @@
           <a:p>
             <a:fld id="{94A92416-8675-4A48-B31B-9E8248857BB3}" type="datetime1">
               <a:rPr lang="en-US" smtClean="0"/>
-              <a:t>3/28/26</a:t>
+              <a:t>8/13/26</a:t>
             </a:fld>
             <a:endParaRPr lang="en-US"/>
           </a:p>
@@ -20108,8 +15226,9 @@
                     <m:sSup>
                       <m:sSupPr>
                         <m:ctrlPr>
-                          <a:rPr lang="en-US" i="1" dirty="0">
-                            <a:latin typeface="Cambria Math" panose="02040503050406030204" pitchFamily="18" charset="0"/>
+                          <a:rPr lang="en-US" b="0" i="0" dirty="0">
+                            <a:latin typeface="Source Sans Pro" panose="020B0503030403020204" pitchFamily="34" charset="0"/>
+                            <a:ea typeface="Source Sans Pro" panose="020B0503030403020204" pitchFamily="34" charset="0"/>
                           </a:rPr>
                         </m:ctrlPr>
                       </m:sSupPr>
@@ -20118,7 +15237,7 @@
                           <m:rPr>
                             <m:nor/>
                           </m:rPr>
-                          <a:rPr lang="en-US" b="1" dirty="0">
+                          <a:rPr lang="en-US" b="0" i="0" dirty="0">
                             <a:latin typeface="Source Sans Pro" panose="020B0503030403020204" pitchFamily="34" charset="0"/>
                             <a:ea typeface="Source Sans Pro" panose="020B0503030403020204" pitchFamily="34" charset="0"/>
                           </a:rPr>
@@ -20161,7 +15280,7 @@
                     <m:d>
                       <m:dPr>
                         <m:ctrlPr>
-                          <a:rPr lang="en-US" b="1" i="1" dirty="0" smtClean="0">
+                          <a:rPr lang="en-US" b="0" i="1" dirty="0" smtClean="0">
                             <a:latin typeface="Cambria Math" panose="02040503050406030204" pitchFamily="18" charset="0"/>
                           </a:rPr>
                         </m:ctrlPr>
@@ -20254,7 +15373,7 @@
                     <m:d>
                       <m:dPr>
                         <m:ctrlPr>
-                          <a:rPr lang="en-US" i="1" dirty="0">
+                          <a:rPr lang="en-US" b="1" dirty="0">
                             <a:latin typeface="Cambria Math" panose="02040503050406030204" pitchFamily="18" charset="0"/>
                           </a:rPr>
                         </m:ctrlPr>
@@ -20269,7 +15388,7 @@
                         <m:d>
                           <m:dPr>
                             <m:ctrlPr>
-                              <a:rPr lang="en-US" b="1" i="1" dirty="0">
+                              <a:rPr lang="en-US" b="0" i="1" dirty="0">
                                 <a:latin typeface="Cambria Math" panose="02040503050406030204" pitchFamily="18" charset="0"/>
                               </a:rPr>
                             </m:ctrlPr>
@@ -20324,7 +15443,7 @@
                     <m:d>
                       <m:dPr>
                         <m:ctrlPr>
-                          <a:rPr lang="en-US" b="1" i="1" dirty="0" smtClean="0">
+                          <a:rPr lang="en-US" b="0" i="1" dirty="0" smtClean="0">
                             <a:latin typeface="Cambria Math" panose="02040503050406030204" pitchFamily="18" charset="0"/>
                           </a:rPr>
                         </m:ctrlPr>
@@ -20369,8 +15488,9 @@
                     <m:sSup>
                       <m:sSupPr>
                         <m:ctrlPr>
-                          <a:rPr lang="en-US" i="1" dirty="0">
-                            <a:latin typeface="Cambria Math" panose="02040503050406030204" pitchFamily="18" charset="0"/>
+                          <a:rPr lang="en-US" b="0" i="0" dirty="0">
+                            <a:latin typeface="Source Sans Pro" panose="020B0503030403020204" pitchFamily="34" charset="0"/>
+                            <a:ea typeface="Source Sans Pro" panose="020B0503030403020204" pitchFamily="34" charset="0"/>
                           </a:rPr>
                         </m:ctrlPr>
                       </m:sSupPr>
@@ -20379,7 +15499,7 @@
                           <m:rPr>
                             <m:nor/>
                           </m:rPr>
-                          <a:rPr lang="en-US" b="1" dirty="0">
+                          <a:rPr lang="en-US" b="0" i="0" dirty="0">
                             <a:latin typeface="Source Sans Pro" panose="020B0503030403020204" pitchFamily="34" charset="0"/>
                             <a:ea typeface="Source Sans Pro" panose="020B0503030403020204" pitchFamily="34" charset="0"/>
                           </a:rPr>
@@ -20422,7 +15542,7 @@
                     <m:d>
                       <m:dPr>
                         <m:ctrlPr>
-                          <a:rPr lang="en-US" b="1" i="1" dirty="0">
+                          <a:rPr lang="en-US" i="1" dirty="0">
                             <a:latin typeface="Cambria Math" panose="02040503050406030204" pitchFamily="18" charset="0"/>
                           </a:rPr>
                         </m:ctrlPr>
@@ -20431,7 +15551,7 @@
                         <m:sSub>
                           <m:sSubPr>
                             <m:ctrlPr>
-                              <a:rPr lang="en-US" b="0" i="1" dirty="0" smtClean="0">
+                              <a:rPr lang="en-US" i="1" dirty="0">
                                 <a:latin typeface="Cambria Math" panose="02040503050406030204" pitchFamily="18" charset="0"/>
                               </a:rPr>
                             </m:ctrlPr>
@@ -20584,7 +15704,7 @@
           <a:p>
             <a:fld id="{647DD0AB-EBB2-E24B-BC76-75B48FD9720C}" type="datetime1">
               <a:rPr lang="en-US" smtClean="0"/>
-              <a:t>3/28/26</a:t>
+              <a:t>8/13/26</a:t>
             </a:fld>
             <a:endParaRPr lang="en-US"/>
           </a:p>
@@ -20734,7 +15854,7 @@
                     <m:sSub>
                       <m:sSubPr>
                         <m:ctrlPr>
-                          <a:rPr lang="en-US" b="1" i="1" dirty="0">
+                          <a:rPr lang="en-US" b="1" dirty="0">
                             <a:latin typeface="Cambria Math" panose="02040503050406030204" pitchFamily="18" charset="0"/>
                           </a:rPr>
                         </m:ctrlPr>
@@ -20777,7 +15897,7 @@
                     <m:d>
                       <m:dPr>
                         <m:ctrlPr>
-                          <a:rPr lang="en-US" i="1" dirty="0">
+                          <a:rPr lang="en-US" b="1" i="1" dirty="0" err="1">
                             <a:latin typeface="Cambria Math" panose="02040503050406030204" pitchFamily="18" charset="0"/>
                           </a:rPr>
                         </m:ctrlPr>
@@ -20786,7 +15906,7 @@
                         <m:sSub>
                           <m:sSubPr>
                             <m:ctrlPr>
-                              <a:rPr lang="en-US" b="1" i="1" dirty="0" err="1">
+                              <a:rPr lang="en-US" b="1" dirty="0" err="1">
                                 <a:latin typeface="Cambria Math" panose="02040503050406030204" pitchFamily="18" charset="0"/>
                               </a:rPr>
                             </m:ctrlPr>
@@ -20817,7 +15937,7 @@
                         <m:sSub>
                           <m:sSubPr>
                             <m:ctrlPr>
-                              <a:rPr lang="en-US" i="1" dirty="0" err="1">
+                              <a:rPr lang="en-US" b="1" dirty="0">
                                 <a:latin typeface="Cambria Math" panose="02040503050406030204" pitchFamily="18" charset="0"/>
                               </a:rPr>
                             </m:ctrlPr>
@@ -20918,7 +16038,7 @@
                     <m:sSub>
                       <m:sSubPr>
                         <m:ctrlPr>
-                          <a:rPr lang="en-US" b="1" i="1" dirty="0">
+                          <a:rPr lang="en-US" b="1" i="0" dirty="0" smtClean="0">
                             <a:latin typeface="Cambria Math" panose="02040503050406030204" pitchFamily="18" charset="0"/>
                           </a:rPr>
                         </m:ctrlPr>
@@ -20993,7 +16113,7 @@
                     <m:oMathParaPr>
                       <m:jc m:val="center"/>
                     </m:oMathParaPr>
-                    <m:oMath xmlns:m="http://schemas.openxmlformats.org/officeDocument/2006/math">
+                    <m:oMath>
                       <m:r>
                         <a:rPr lang="en-US" sz="2600" i="1" dirty="0">
                           <a:latin typeface="Cambria Math" panose="02040503050406030204" pitchFamily="18" charset="0"/>
@@ -21003,7 +16123,7 @@
                       <m:sSub>
                         <m:sSubPr>
                           <m:ctrlPr>
-                            <a:rPr lang="en-US" sz="2600" b="1" i="1" dirty="0">
+                            <a:rPr lang="en-US" sz="2600" b="1" dirty="0">
                               <a:latin typeface="Cambria Math" panose="02040503050406030204" pitchFamily="18" charset="0"/>
                             </a:rPr>
                           </m:ctrlPr>
@@ -21095,13 +16215,7 @@
                             <a:rPr lang="en-US" sz="2600" b="0" i="1" dirty="0" smtClean="0">
                               <a:latin typeface="Cambria Math" panose="02040503050406030204" pitchFamily="18" charset="0"/>
                             </a:rPr>
-                            <m:t>−1</m:t>
-                          </m:r>
-                          <m:r>
-                            <a:rPr lang="en-US" sz="2600" b="1" i="1" dirty="0" smtClean="0">
-                              <a:latin typeface="Cambria Math" panose="02040503050406030204" pitchFamily="18" charset="0"/>
-                            </a:rPr>
-                            <m:t> </m:t>
+                            <m:t>−1 </m:t>
                           </m:r>
                         </m:sub>
                       </m:sSub>
@@ -21114,7 +16228,7 @@
                       <m:sSub>
                         <m:sSubPr>
                           <m:ctrlPr>
-                            <a:rPr lang="en-US" sz="2600" i="1" dirty="0" err="1">
+                            <a:rPr lang="en-US" sz="2600" b="0" i="1" dirty="0" smtClean="0">
                               <a:latin typeface="Cambria Math" panose="02040503050406030204" pitchFamily="18" charset="0"/>
                             </a:rPr>
                           </m:ctrlPr>
@@ -21124,7 +16238,7 @@
                             <a:rPr lang="en-US" sz="2600" b="0" i="1" dirty="0" smtClean="0">
                               <a:latin typeface="Cambria Math" panose="02040503050406030204" pitchFamily="18" charset="0"/>
                             </a:rPr>
-                            <m:t>h</m:t>
+                            <m:t>ℎ</m:t>
                           </m:r>
                         </m:e>
                         <m:sub>
@@ -21139,7 +16253,7 @@
                       <m:d>
                         <m:dPr>
                           <m:ctrlPr>
-                            <a:rPr lang="en-US" sz="2600" i="1" dirty="0">
+                            <a:rPr lang="en-US" sz="2600" b="1" i="1" dirty="0">
                               <a:latin typeface="Cambria Math" panose="02040503050406030204" pitchFamily="18" charset="0"/>
                             </a:rPr>
                           </m:ctrlPr>
@@ -21148,7 +16262,7 @@
                           <m:sSub>
                             <m:sSubPr>
                               <m:ctrlPr>
-                                <a:rPr lang="en-US" sz="2600" b="1" i="1" dirty="0">
+                                <a:rPr lang="en-US" sz="2600" b="1" dirty="0">
                                   <a:latin typeface="Cambria Math" panose="02040503050406030204" pitchFamily="18" charset="0"/>
                                 </a:rPr>
                               </m:ctrlPr>
@@ -21222,7 +16336,7 @@
                           <m:sSub>
                             <m:sSubPr>
                               <m:ctrlPr>
-                                <a:rPr lang="en-US" sz="2600" b="0" i="1" dirty="0" smtClean="0">
+                                <a:rPr lang="en-US" sz="2600" i="1" dirty="0">
                                   <a:latin typeface="Cambria Math" panose="02040503050406030204" pitchFamily="18" charset="0"/>
                                 </a:rPr>
                               </m:ctrlPr>
@@ -21247,7 +16361,7 @@
                           <m:d>
                             <m:dPr>
                               <m:ctrlPr>
-                                <a:rPr lang="en-US" sz="2600" i="1" dirty="0">
+                                <a:rPr lang="en-US" sz="2600" b="1" i="1" dirty="0" err="1">
                                   <a:latin typeface="Cambria Math" panose="02040503050406030204" pitchFamily="18" charset="0"/>
                                 </a:rPr>
                               </m:ctrlPr>
@@ -21256,7 +16370,7 @@
                               <m:sSub>
                                 <m:sSubPr>
                                   <m:ctrlPr>
-                                    <a:rPr lang="en-US" sz="2600" b="1" i="1" dirty="0" err="1">
+                                    <a:rPr lang="en-US" sz="2600" b="1" dirty="0" err="1">
                                       <a:latin typeface="Cambria Math" panose="02040503050406030204" pitchFamily="18" charset="0"/>
                                     </a:rPr>
                                   </m:ctrlPr>
@@ -21287,7 +16401,7 @@
                               <m:sSub>
                                 <m:sSubPr>
                                   <m:ctrlPr>
-                                    <a:rPr lang="en-US" sz="2600" i="1" dirty="0" err="1">
+                                    <a:rPr lang="en-US" sz="2600" b="1" i="0" dirty="0" smtClean="0">
                                       <a:latin typeface="Cambria Math" panose="02040503050406030204" pitchFamily="18" charset="0"/>
                                     </a:rPr>
                                   </m:ctrlPr>
@@ -21356,14 +16470,11 @@
                 </a:pPr>
                 <a14:m>
                   <m:oMathPara xmlns:m="http://schemas.openxmlformats.org/officeDocument/2006/math">
-                    <m:oMathParaPr>
-                      <m:jc m:val="centerGroup"/>
-                    </m:oMathParaPr>
-                    <m:oMath xmlns:m="http://schemas.openxmlformats.org/officeDocument/2006/math">
+                    <m:oMath>
                       <m:sSup>
                         <m:sSupPr>
                           <m:ctrlPr>
-                            <a:rPr lang="en-US" sz="2600" b="1" i="1" dirty="0" smtClean="0">
+                            <a:rPr lang="en-US" sz="2600" i="1" dirty="0">
                               <a:latin typeface="Cambria Math" panose="02040503050406030204" pitchFamily="18" charset="0"/>
                             </a:rPr>
                           </m:ctrlPr>
@@ -21388,7 +16499,7 @@
                       <m:sSub>
                         <m:sSubPr>
                           <m:ctrlPr>
-                            <a:rPr lang="en-US" sz="2600" b="1" i="1" dirty="0">
+                            <a:rPr lang="en-US" sz="2600" b="1" dirty="0">
                               <a:latin typeface="Cambria Math" panose="02040503050406030204" pitchFamily="18" charset="0"/>
                             </a:rPr>
                           </m:ctrlPr>
@@ -21425,7 +16536,7 @@
                       <m:limLow>
                         <m:limLowPr>
                           <m:ctrlPr>
-                            <a:rPr lang="en-US" sz="2600" b="0" i="1" dirty="0" smtClean="0">
+                            <a:rPr lang="en-US" sz="2600" b="0" i="0" dirty="0" smtClean="0">
                               <a:latin typeface="Cambria Math" panose="02040503050406030204" pitchFamily="18" charset="0"/>
                             </a:rPr>
                           </m:ctrlPr>
@@ -21445,7 +16556,7 @@
                           <m:sSub>
                             <m:sSubPr>
                               <m:ctrlPr>
-                                <a:rPr lang="en-US" sz="2600" b="1" i="1" dirty="0">
+                                <a:rPr lang="en-US" sz="2600" b="1" dirty="0">
                                   <a:latin typeface="Cambria Math" panose="02040503050406030204" pitchFamily="18" charset="0"/>
                                 </a:rPr>
                               </m:ctrlPr>
@@ -21535,7 +16646,7 @@
                       <m:sSub>
                         <m:sSubPr>
                           <m:ctrlPr>
-                            <a:rPr lang="en-US" sz="2600" b="1" i="1" dirty="0">
+                            <a:rPr lang="en-US" sz="2600" b="1" dirty="0">
                               <a:latin typeface="Cambria Math" panose="02040503050406030204" pitchFamily="18" charset="0"/>
                             </a:rPr>
                           </m:ctrlPr>
@@ -21627,13 +16738,7 @@
                             <a:rPr lang="en-US" sz="2600" i="1" dirty="0">
                               <a:latin typeface="Cambria Math" panose="02040503050406030204" pitchFamily="18" charset="0"/>
                             </a:rPr>
-                            <m:t>−1</m:t>
-                          </m:r>
-                          <m:r>
-                            <a:rPr lang="en-US" sz="2600" b="1" i="1" dirty="0">
-                              <a:latin typeface="Cambria Math" panose="02040503050406030204" pitchFamily="18" charset="0"/>
-                            </a:rPr>
-                            <m:t> </m:t>
+                            <m:t>−1 </m:t>
                           </m:r>
                         </m:sub>
                       </m:sSub>
@@ -21739,7 +16844,7 @@
           <a:p>
             <a:fld id="{54929FAF-F4B7-0E47-9576-0FF3CC528F79}" type="datetime1">
               <a:rPr lang="en-US" smtClean="0"/>
-              <a:t>3/28/26</a:t>
+              <a:t>8/13/26</a:t>
             </a:fld>
             <a:endParaRPr lang="en-US"/>
           </a:p>
@@ -21894,7 +16999,7 @@
                     <m:sSub>
                       <m:sSubPr>
                         <m:ctrlPr>
-                          <a:rPr lang="en-US" b="1" i="1" dirty="0">
+                          <a:rPr lang="en-US" b="1" dirty="0">
                             <a:latin typeface="Cambria Math" panose="02040503050406030204" pitchFamily="18" charset="0"/>
                           </a:rPr>
                         </m:ctrlPr>
@@ -21937,7 +17042,7 @@
                     <m:d>
                       <m:dPr>
                         <m:ctrlPr>
-                          <a:rPr lang="en-US" i="1" dirty="0">
+                          <a:rPr lang="en-US" b="1" i="1" dirty="0" err="1">
                             <a:latin typeface="Cambria Math" panose="02040503050406030204" pitchFamily="18" charset="0"/>
                           </a:rPr>
                         </m:ctrlPr>
@@ -21946,7 +17051,7 @@
                         <m:sSub>
                           <m:sSubPr>
                             <m:ctrlPr>
-                              <a:rPr lang="en-US" b="1" i="1" dirty="0" err="1">
+                              <a:rPr lang="en-US" b="1" dirty="0" err="1">
                                 <a:latin typeface="Cambria Math" panose="02040503050406030204" pitchFamily="18" charset="0"/>
                               </a:rPr>
                             </m:ctrlPr>
@@ -21977,7 +17082,7 @@
                         <m:sSub>
                           <m:sSubPr>
                             <m:ctrlPr>
-                              <a:rPr lang="en-US" i="1" dirty="0" err="1">
+                              <a:rPr lang="en-US" b="1" dirty="0">
                                 <a:latin typeface="Cambria Math" panose="02040503050406030204" pitchFamily="18" charset="0"/>
                               </a:rPr>
                             </m:ctrlPr>
@@ -22078,7 +17183,7 @@
                     <m:sSub>
                       <m:sSubPr>
                         <m:ctrlPr>
-                          <a:rPr lang="en-US" b="1" i="1" dirty="0">
+                          <a:rPr lang="en-US" b="1" i="0" dirty="0" smtClean="0">
                             <a:latin typeface="Cambria Math" panose="02040503050406030204" pitchFamily="18" charset="0"/>
                           </a:rPr>
                         </m:ctrlPr>
@@ -22153,7 +17258,7 @@
                     <m:oMathParaPr>
                       <m:jc m:val="center"/>
                     </m:oMathParaPr>
-                    <m:oMath xmlns:m="http://schemas.openxmlformats.org/officeDocument/2006/math">
+                    <m:oMath>
                       <m:r>
                         <a:rPr lang="en-US" sz="2600" i="1" dirty="0">
                           <a:latin typeface="Cambria Math" panose="02040503050406030204" pitchFamily="18" charset="0"/>
@@ -22163,7 +17268,7 @@
                       <m:sSub>
                         <m:sSubPr>
                           <m:ctrlPr>
-                            <a:rPr lang="en-US" sz="2600" b="1" i="1" dirty="0">
+                            <a:rPr lang="en-US" sz="2600" b="1" dirty="0">
                               <a:latin typeface="Cambria Math" panose="02040503050406030204" pitchFamily="18" charset="0"/>
                             </a:rPr>
                           </m:ctrlPr>
@@ -22255,13 +17360,7 @@
                             <a:rPr lang="en-US" sz="2600" b="0" i="1" dirty="0" smtClean="0">
                               <a:latin typeface="Cambria Math" panose="02040503050406030204" pitchFamily="18" charset="0"/>
                             </a:rPr>
-                            <m:t>−1</m:t>
-                          </m:r>
-                          <m:r>
-                            <a:rPr lang="en-US" sz="2600" b="1" i="1" dirty="0" smtClean="0">
-                              <a:latin typeface="Cambria Math" panose="02040503050406030204" pitchFamily="18" charset="0"/>
-                            </a:rPr>
-                            <m:t> </m:t>
+                            <m:t>−1 </m:t>
                           </m:r>
                         </m:sub>
                       </m:sSub>
@@ -22274,7 +17373,7 @@
                       <m:sSub>
                         <m:sSubPr>
                           <m:ctrlPr>
-                            <a:rPr lang="en-US" sz="2600" i="1" dirty="0" err="1">
+                            <a:rPr lang="en-US" sz="2600" b="0" i="1" dirty="0" smtClean="0">
                               <a:latin typeface="Cambria Math" panose="02040503050406030204" pitchFamily="18" charset="0"/>
                             </a:rPr>
                           </m:ctrlPr>
@@ -22284,7 +17383,7 @@
                             <a:rPr lang="en-US" sz="2600" b="0" i="1" dirty="0" smtClean="0">
                               <a:latin typeface="Cambria Math" panose="02040503050406030204" pitchFamily="18" charset="0"/>
                             </a:rPr>
-                            <m:t>h</m:t>
+                            <m:t>ℎ</m:t>
                           </m:r>
                         </m:e>
                         <m:sub>
@@ -22299,7 +17398,7 @@
                       <m:d>
                         <m:dPr>
                           <m:ctrlPr>
-                            <a:rPr lang="en-US" sz="2600" i="1" dirty="0">
+                            <a:rPr lang="en-US" sz="2600" b="1" i="1" dirty="0">
                               <a:latin typeface="Cambria Math" panose="02040503050406030204" pitchFamily="18" charset="0"/>
                             </a:rPr>
                           </m:ctrlPr>
@@ -22308,7 +17407,7 @@
                           <m:sSub>
                             <m:sSubPr>
                               <m:ctrlPr>
-                                <a:rPr lang="en-US" sz="2600" b="1" i="1" dirty="0">
+                                <a:rPr lang="en-US" sz="2600" b="1" dirty="0">
                                   <a:latin typeface="Cambria Math" panose="02040503050406030204" pitchFamily="18" charset="0"/>
                                 </a:rPr>
                               </m:ctrlPr>
@@ -22382,7 +17481,7 @@
                           <m:sSub>
                             <m:sSubPr>
                               <m:ctrlPr>
-                                <a:rPr lang="en-US" sz="2600" b="0" i="1" dirty="0" smtClean="0">
+                                <a:rPr lang="en-US" sz="2600" i="1" dirty="0">
                                   <a:latin typeface="Cambria Math" panose="02040503050406030204" pitchFamily="18" charset="0"/>
                                 </a:rPr>
                               </m:ctrlPr>
@@ -22407,7 +17506,7 @@
                           <m:d>
                             <m:dPr>
                               <m:ctrlPr>
-                                <a:rPr lang="en-US" sz="2600" i="1" dirty="0">
+                                <a:rPr lang="en-US" sz="2600" b="1" i="1" dirty="0" err="1">
                                   <a:latin typeface="Cambria Math" panose="02040503050406030204" pitchFamily="18" charset="0"/>
                                 </a:rPr>
                               </m:ctrlPr>
@@ -22416,7 +17515,7 @@
                               <m:sSub>
                                 <m:sSubPr>
                                   <m:ctrlPr>
-                                    <a:rPr lang="en-US" sz="2600" b="1" i="1" dirty="0" err="1">
+                                    <a:rPr lang="en-US" sz="2600" b="1" dirty="0" err="1">
                                       <a:latin typeface="Cambria Math" panose="02040503050406030204" pitchFamily="18" charset="0"/>
                                     </a:rPr>
                                   </m:ctrlPr>
@@ -22447,7 +17546,7 @@
                               <m:sSub>
                                 <m:sSubPr>
                                   <m:ctrlPr>
-                                    <a:rPr lang="en-US" sz="2600" i="1" dirty="0" err="1">
+                                    <a:rPr lang="en-US" sz="2600" b="1" i="0" dirty="0" smtClean="0">
                                       <a:latin typeface="Cambria Math" panose="02040503050406030204" pitchFamily="18" charset="0"/>
                                     </a:rPr>
                                   </m:ctrlPr>
@@ -22516,14 +17615,11 @@
                 </a:pPr>
                 <a14:m>
                   <m:oMathPara xmlns:m="http://schemas.openxmlformats.org/officeDocument/2006/math">
-                    <m:oMathParaPr>
-                      <m:jc m:val="centerGroup"/>
-                    </m:oMathParaPr>
-                    <m:oMath xmlns:m="http://schemas.openxmlformats.org/officeDocument/2006/math">
+                    <m:oMath>
                       <m:sSup>
                         <m:sSupPr>
                           <m:ctrlPr>
-                            <a:rPr lang="en-US" sz="2600" b="1" i="1" dirty="0" smtClean="0">
+                            <a:rPr lang="en-US" sz="2600" i="1" dirty="0">
                               <a:latin typeface="Cambria Math" panose="02040503050406030204" pitchFamily="18" charset="0"/>
                             </a:rPr>
                           </m:ctrlPr>
@@ -22548,7 +17644,7 @@
                       <m:sSub>
                         <m:sSubPr>
                           <m:ctrlPr>
-                            <a:rPr lang="en-US" sz="2600" b="1" i="1" dirty="0">
+                            <a:rPr lang="en-US" sz="2600" b="1" dirty="0">
                               <a:latin typeface="Cambria Math" panose="02040503050406030204" pitchFamily="18" charset="0"/>
                             </a:rPr>
                           </m:ctrlPr>
@@ -22585,7 +17681,7 @@
                       <m:limLow>
                         <m:limLowPr>
                           <m:ctrlPr>
-                            <a:rPr lang="en-US" sz="2600" b="0" i="1" dirty="0" smtClean="0">
+                            <a:rPr lang="en-US" sz="2600" b="0" i="0" dirty="0" smtClean="0">
                               <a:latin typeface="Cambria Math" panose="02040503050406030204" pitchFamily="18" charset="0"/>
                             </a:rPr>
                           </m:ctrlPr>
@@ -22605,7 +17701,7 @@
                           <m:sSub>
                             <m:sSubPr>
                               <m:ctrlPr>
-                                <a:rPr lang="en-US" sz="2600" b="1" i="1" dirty="0">
+                                <a:rPr lang="en-US" sz="2600" b="1" dirty="0">
                                   <a:latin typeface="Cambria Math" panose="02040503050406030204" pitchFamily="18" charset="0"/>
                                 </a:rPr>
                               </m:ctrlPr>
@@ -22695,7 +17791,7 @@
                       <m:sSub>
                         <m:sSubPr>
                           <m:ctrlPr>
-                            <a:rPr lang="en-US" sz="2600" b="1" i="1" dirty="0">
+                            <a:rPr lang="en-US" sz="2600" b="1" dirty="0">
                               <a:latin typeface="Cambria Math" panose="02040503050406030204" pitchFamily="18" charset="0"/>
                             </a:rPr>
                           </m:ctrlPr>
@@ -22787,13 +17883,7 @@
                             <a:rPr lang="en-US" sz="2600" i="1" dirty="0">
                               <a:latin typeface="Cambria Math" panose="02040503050406030204" pitchFamily="18" charset="0"/>
                             </a:rPr>
-                            <m:t>−1</m:t>
-                          </m:r>
-                          <m:r>
-                            <a:rPr lang="en-US" sz="2600" b="1" i="1" dirty="0">
-                              <a:latin typeface="Cambria Math" panose="02040503050406030204" pitchFamily="18" charset="0"/>
-                            </a:rPr>
-                            <m:t> </m:t>
+                            <m:t>−1 </m:t>
                           </m:r>
                         </m:sub>
                       </m:sSub>
@@ -22899,7 +17989,7 @@
           <a:p>
             <a:fld id="{E17DF661-9794-954C-B06B-A41978DDD26D}" type="datetime1">
               <a:rPr lang="en-US" smtClean="0"/>
-              <a:t>3/28/26</a:t>
+              <a:t>8/13/26</a:t>
             </a:fld>
             <a:endParaRPr lang="en-US"/>
           </a:p>
@@ -23116,7 +18206,7 @@
           <a:p>
             <a:fld id="{53B404B7-6158-5D4A-BED7-EA08DCAC4F3E}" type="datetime1">
               <a:rPr lang="en-US" smtClean="0"/>
-              <a:t>3/28/26</a:t>
+              <a:t>8/13/26</a:t>
             </a:fld>
             <a:endParaRPr lang="en-US"/>
           </a:p>
@@ -23355,7 +18445,7 @@
           <a:p>
             <a:fld id="{46F63714-B1ED-F344-8E4D-9429F1F1DE89}" type="datetime1">
               <a:rPr lang="en-US" smtClean="0"/>
-              <a:t>3/28/26</a:t>
+              <a:t>8/13/26</a:t>
             </a:fld>
             <a:endParaRPr lang="en-US"/>
           </a:p>
@@ -23513,7 +18603,7 @@
                     <m:sSup>
                       <m:sSupPr>
                         <m:ctrlPr>
-                          <a:rPr lang="en-US" i="1" dirty="0">
+                          <a:rPr lang="en-US" b="1" dirty="0">
                             <a:latin typeface="Cambria Math" panose="02040503050406030204" pitchFamily="18" charset="0"/>
                           </a:rPr>
                         </m:ctrlPr>
@@ -23620,7 +18710,7 @@
                     <m:sSup>
                       <m:sSupPr>
                         <m:ctrlPr>
-                          <a:rPr lang="en-US" i="1" dirty="0">
+                          <a:rPr lang="en-US" b="1" dirty="0">
                             <a:latin typeface="Cambria Math" panose="02040503050406030204" pitchFamily="18" charset="0"/>
                           </a:rPr>
                         </m:ctrlPr>
@@ -23684,7 +18774,7 @@
                     <m:sSup>
                       <m:sSupPr>
                         <m:ctrlPr>
-                          <a:rPr lang="en-US" i="1" dirty="0">
+                          <a:rPr lang="en-US" b="1" dirty="0">
                             <a:latin typeface="Cambria Math" panose="02040503050406030204" pitchFamily="18" charset="0"/>
                           </a:rPr>
                         </m:ctrlPr>
@@ -23782,7 +18872,7 @@
           <a:p>
             <a:fld id="{982C93A7-6EEF-B84A-9EAC-08CE45A63F53}" type="datetime1">
               <a:rPr lang="en-US" smtClean="0"/>
-              <a:t>3/28/26</a:t>
+              <a:t>8/13/26</a:t>
             </a:fld>
             <a:endParaRPr lang="en-US"/>
           </a:p>
@@ -24168,7 +19258,7 @@
           <a:p>
             <a:fld id="{01B02FE1-6A01-AA42-A08D-7646621939A6}" type="datetime1">
               <a:rPr lang="en-US" smtClean="0"/>
-              <a:t>3/28/26</a:t>
+              <a:t>8/13/26</a:t>
             </a:fld>
             <a:endParaRPr lang="en-US"/>
           </a:p>
@@ -24361,7 +19451,7 @@
                     <m:sSup>
                       <m:sSupPr>
                         <m:ctrlPr>
-                          <a:rPr lang="en-US" i="1" dirty="0">
+                          <a:rPr lang="en-US" b="1" dirty="0">
                             <a:latin typeface="Cambria Math" panose="02040503050406030204" pitchFamily="18" charset="0"/>
                           </a:rPr>
                         </m:ctrlPr>
@@ -24563,7 +19653,7 @@
           <a:p>
             <a:fld id="{6980F436-80E4-3E4A-8888-4BA59C95CDDB}" type="datetime1">
               <a:rPr lang="en-US" smtClean="0"/>
-              <a:t>3/28/26</a:t>
+              <a:t>8/13/26</a:t>
             </a:fld>
             <a:endParaRPr lang="en-US"/>
           </a:p>
@@ -24916,9 +20006,9 @@
                     <m:sSup>
                       <m:sSupPr>
                         <m:ctrlPr>
-                          <a:rPr lang="en-US" b="0" i="1" smtClean="0">
-                            <a:latin typeface="Cambria Math" panose="02040503050406030204" pitchFamily="18" charset="0"/>
-                            <a:ea typeface="Cambria Math" panose="02040503050406030204" pitchFamily="18" charset="0"/>
+                          <a:rPr lang="en-US" b="0" i="0" smtClean="0">
+                            <a:latin typeface="Source Sans Pro" panose="020B0503030403020204" pitchFamily="34" charset="0"/>
+                            <a:ea typeface="Source Sans Pro" panose="020B0503030403020204" pitchFamily="34" charset="0"/>
                           </a:rPr>
                         </m:ctrlPr>
                       </m:sSupPr>
@@ -24927,7 +20017,7 @@
                           <m:rPr>
                             <m:nor/>
                           </m:rPr>
-                          <a:rPr lang="en-US" b="1" i="0" smtClean="0">
+                          <a:rPr lang="en-US" b="0" i="0" smtClean="0">
                             <a:latin typeface="Source Sans Pro" panose="020B0503030403020204" pitchFamily="34" charset="0"/>
                             <a:ea typeface="Source Sans Pro" panose="020B0503030403020204" pitchFamily="34" charset="0"/>
                           </a:rPr>
@@ -24955,7 +20045,7 @@
                       <m:rPr>
                         <m:nor/>
                       </m:rPr>
-                      <a:rPr lang="en-US" b="1">
+                      <a:rPr lang="en-US" b="0" i="0">
                         <a:latin typeface="Source Sans Pro" panose="020B0503030403020204" pitchFamily="34" charset="0"/>
                         <a:ea typeface="Source Sans Pro" panose="020B0503030403020204" pitchFamily="34" charset="0"/>
                       </a:rPr>
@@ -25002,9 +20092,9 @@
                     <m:sSup>
                       <m:sSupPr>
                         <m:ctrlPr>
-                          <a:rPr lang="en-US" b="0" i="1" smtClean="0">
-                            <a:latin typeface="Cambria Math" panose="02040503050406030204" pitchFamily="18" charset="0"/>
-                            <a:ea typeface="Cambria Math" panose="02040503050406030204" pitchFamily="18" charset="0"/>
+                          <a:rPr lang="en-US" b="0" i="0">
+                            <a:latin typeface="Source Sans Pro" panose="020B0503030403020204" pitchFamily="34" charset="0"/>
+                            <a:ea typeface="Source Sans Pro" panose="020B0503030403020204" pitchFamily="34" charset="0"/>
                           </a:rPr>
                         </m:ctrlPr>
                       </m:sSupPr>
@@ -25013,7 +20103,7 @@
                           <m:rPr>
                             <m:nor/>
                           </m:rPr>
-                          <a:rPr lang="en-US" b="1">
+                          <a:rPr lang="en-US" b="0" i="0">
                             <a:latin typeface="Source Sans Pro" panose="020B0503030403020204" pitchFamily="34" charset="0"/>
                             <a:ea typeface="Source Sans Pro" panose="020B0503030403020204" pitchFamily="34" charset="0"/>
                           </a:rPr>
@@ -25033,7 +20123,7 @@
                     <m:sSup>
                       <m:sSupPr>
                         <m:ctrlPr>
-                          <a:rPr lang="en-US" b="0" i="1" smtClean="0">
+                          <a:rPr lang="en-US" i="1">
                             <a:latin typeface="Cambria Math" panose="02040503050406030204" pitchFamily="18" charset="0"/>
                             <a:ea typeface="Cambria Math" panose="02040503050406030204" pitchFamily="18" charset="0"/>
                           </a:rPr>
@@ -25078,9 +20168,9 @@
                     <m:sSup>
                       <m:sSupPr>
                         <m:ctrlPr>
-                          <a:rPr lang="en-US" i="1">
-                            <a:latin typeface="Cambria Math" panose="02040503050406030204" pitchFamily="18" charset="0"/>
-                            <a:ea typeface="Cambria Math" panose="02040503050406030204" pitchFamily="18" charset="0"/>
+                          <a:rPr lang="en-US" b="0" i="0">
+                            <a:latin typeface="Source Sans Pro" panose="020B0503030403020204" pitchFamily="34" charset="0"/>
+                            <a:ea typeface="Source Sans Pro" panose="020B0503030403020204" pitchFamily="34" charset="0"/>
                           </a:rPr>
                         </m:ctrlPr>
                       </m:sSupPr>
@@ -25089,7 +20179,7 @@
                           <m:rPr>
                             <m:nor/>
                           </m:rPr>
-                          <a:rPr lang="en-US" b="1">
+                          <a:rPr lang="en-US" b="0" i="0">
                             <a:latin typeface="Source Sans Pro" panose="020B0503030403020204" pitchFamily="34" charset="0"/>
                             <a:ea typeface="Source Sans Pro" panose="020B0503030403020204" pitchFamily="34" charset="0"/>
                           </a:rPr>
@@ -25117,7 +20207,7 @@
                       <m:rPr>
                         <m:nor/>
                       </m:rPr>
-                      <a:rPr lang="en-US" b="1">
+                      <a:rPr lang="en-US" b="0" i="0">
                         <a:latin typeface="Source Sans Pro" panose="020B0503030403020204" pitchFamily="34" charset="0"/>
                         <a:ea typeface="Source Sans Pro" panose="020B0503030403020204" pitchFamily="34" charset="0"/>
                       </a:rPr>
@@ -25213,7 +20303,7 @@
           <a:p>
             <a:fld id="{C2EEB5A1-01B8-074C-A521-C54BB225D18E}" type="datetime1">
               <a:rPr lang="en-US" smtClean="0"/>
-              <a:t>3/28/26</a:t>
+              <a:t>8/13/26</a:t>
             </a:fld>
             <a:endParaRPr lang="en-US"/>
           </a:p>
@@ -25476,7 +20566,7 @@
                     <m:sSup>
                       <m:sSupPr>
                         <m:ctrlPr>
-                          <a:rPr lang="en-US" i="1" dirty="0">
+                          <a:rPr lang="en-US" b="1" dirty="0">
                             <a:latin typeface="Cambria Math" panose="02040503050406030204" pitchFamily="18" charset="0"/>
                           </a:rPr>
                         </m:ctrlPr>
@@ -25665,7 +20755,7 @@
                     <m:sSup>
                       <m:sSupPr>
                         <m:ctrlPr>
-                          <a:rPr lang="en-US" i="1" dirty="0">
+                          <a:rPr lang="en-US" b="1" dirty="0">
                             <a:latin typeface="Cambria Math" panose="02040503050406030204" pitchFamily="18" charset="0"/>
                           </a:rPr>
                         </m:ctrlPr>
@@ -25871,7 +20961,7 @@
           <a:p>
             <a:fld id="{312885B6-F9FC-8140-A8B6-EBC801FB1318}" type="datetime1">
               <a:rPr lang="en-US" smtClean="0"/>
-              <a:t>3/28/26</a:t>
+              <a:t>8/13/26</a:t>
             </a:fld>
             <a:endParaRPr lang="en-US"/>
           </a:p>
@@ -26306,7 +21396,7 @@
           <a:p>
             <a:fld id="{D1856522-79AF-B44A-90A2-110FBDFA7A4E}" type="datetime1">
               <a:rPr lang="en-US" smtClean="0"/>
-              <a:t>3/28/26</a:t>
+              <a:t>8/13/26</a:t>
             </a:fld>
             <a:endParaRPr lang="en-US" dirty="0"/>
           </a:p>
@@ -26434,7 +21524,7 @@
                     <m:sSup>
                       <m:sSupPr>
                         <m:ctrlPr>
-                          <a:rPr lang="en-US" i="1" dirty="0">
+                          <a:rPr lang="en-US" b="1" dirty="0">
                             <a:latin typeface="Cambria Math" panose="02040503050406030204" pitchFamily="18" charset="0"/>
                           </a:rPr>
                         </m:ctrlPr>
@@ -26551,9 +21641,9 @@
                     <m:sSup>
                       <m:sSupPr>
                         <m:ctrlPr>
-                          <a:rPr lang="en-US" i="1">
-                            <a:latin typeface="Cambria Math" panose="02040503050406030204" pitchFamily="18" charset="0"/>
-                            <a:ea typeface="Cambria Math" panose="02040503050406030204" pitchFamily="18" charset="0"/>
+                          <a:rPr lang="en-US" b="0" i="0">
+                            <a:latin typeface="Source Sans Pro" panose="020B0503030403020204" pitchFamily="34" charset="0"/>
+                            <a:ea typeface="Source Sans Pro" panose="020B0503030403020204" pitchFamily="34" charset="0"/>
                           </a:rPr>
                         </m:ctrlPr>
                       </m:sSupPr>
@@ -26562,7 +21652,7 @@
                           <m:rPr>
                             <m:nor/>
                           </m:rPr>
-                          <a:rPr lang="en-US" b="1">
+                          <a:rPr lang="en-US" b="0" i="0">
                             <a:latin typeface="Source Sans Pro" panose="020B0503030403020204" pitchFamily="34" charset="0"/>
                             <a:ea typeface="Source Sans Pro" panose="020B0503030403020204" pitchFamily="34" charset="0"/>
                           </a:rPr>
@@ -26627,7 +21717,7 @@
                     <m:sSup>
                       <m:sSupPr>
                         <m:ctrlPr>
-                          <a:rPr lang="en-US" b="0" i="1" smtClean="0">
+                          <a:rPr lang="en-US" b="1" i="0" smtClean="0">
                             <a:latin typeface="Cambria Math" panose="02040503050406030204" pitchFamily="18" charset="0"/>
                             <a:ea typeface="Cambria Math" panose="02040503050406030204" pitchFamily="18" charset="0"/>
                           </a:rPr>
@@ -26670,7 +21760,7 @@
                       <m:rPr>
                         <m:nor/>
                       </m:rPr>
-                      <a:rPr lang="en-US" b="1">
+                      <a:rPr lang="en-US" b="0" i="0">
                         <a:latin typeface="Source Sans Pro" panose="020B0503030403020204" pitchFamily="34" charset="0"/>
                         <a:ea typeface="Source Sans Pro" panose="020B0503030403020204" pitchFamily="34" charset="0"/>
                       </a:rPr>
@@ -26742,7 +21832,7 @@
                     <m:sSup>
                       <m:sSupPr>
                         <m:ctrlPr>
-                          <a:rPr lang="en-US" i="1" dirty="0">
+                          <a:rPr lang="en-US" b="1" dirty="0">
                             <a:latin typeface="Cambria Math" panose="02040503050406030204" pitchFamily="18" charset="0"/>
                           </a:rPr>
                         </m:ctrlPr>
@@ -26796,7 +21886,7 @@
             </p:nvSpPr>
             <p:spPr>
               <a:blipFill>
-                <a:blip r:embed="rId2"/>
+                <a:blip r:embed="rId3"/>
                 <a:stretch>
                   <a:fillRect l="-965" t="-2632"/>
                 </a:stretch>
@@ -26840,7 +21930,7 @@
           <a:p>
             <a:fld id="{34BC1D56-1F80-F148-894E-7D93732A8B76}" type="datetime1">
               <a:rPr lang="en-US" smtClean="0"/>
-              <a:t>3/28/26</a:t>
+              <a:t>8/13/26</a:t>
             </a:fld>
             <a:endParaRPr lang="en-US"/>
           </a:p>
@@ -26890,7 +21980,7 @@
           <p:nvPr/>
         </p:nvPicPr>
         <p:blipFill rotWithShape="1">
-          <a:blip r:embed="rId3"/>
+          <a:blip r:embed="rId4"/>
           <a:srcRect r="71822"/>
           <a:stretch/>
         </p:blipFill>
@@ -26919,7 +22009,7 @@
           <p:nvPr/>
         </p:nvPicPr>
         <p:blipFill rotWithShape="1">
-          <a:blip r:embed="rId4"/>
+          <a:blip r:embed="rId5"/>
           <a:srcRect r="77667" b="-87885"/>
           <a:stretch/>
         </p:blipFill>
@@ -27059,7 +22149,7 @@
           <a:p>
             <a:fld id="{21092734-DB58-9D48-B418-038B5DFDF175}" type="datetime1">
               <a:rPr lang="en-US" smtClean="0"/>
-              <a:t>3/28/26</a:t>
+              <a:t>8/13/26</a:t>
             </a:fld>
             <a:endParaRPr lang="en-US"/>
           </a:p>
@@ -27318,7 +22408,7 @@
                     <m:sSup>
                       <m:sSupPr>
                         <m:ctrlPr>
-                          <a:rPr lang="en-US" i="1" dirty="0">
+                          <a:rPr lang="en-US" b="1" dirty="0">
                             <a:latin typeface="Cambria Math" panose="02040503050406030204" pitchFamily="18" charset="0"/>
                           </a:rPr>
                         </m:ctrlPr>
@@ -27411,7 +22501,7 @@
                     <m:sSup>
                       <m:sSupPr>
                         <m:ctrlPr>
-                          <a:rPr lang="en-US" i="1" dirty="0">
+                          <a:rPr lang="en-US" b="1" dirty="0">
                             <a:latin typeface="Cambria Math" panose="02040503050406030204" pitchFamily="18" charset="0"/>
                           </a:rPr>
                         </m:ctrlPr>
@@ -27810,7 +22900,7 @@
                     <m:sSup>
                       <m:sSupPr>
                         <m:ctrlPr>
-                          <a:rPr lang="en-US" sz="2600" b="0" i="1" smtClean="0">
+                          <a:rPr lang="en-US" sz="2600" i="1" smtClean="0">
                             <a:latin typeface="Cambria Math" panose="02040503050406030204" pitchFamily="18" charset="0"/>
                             <a:ea typeface="Cambria Math" panose="02040503050406030204" pitchFamily="18" charset="0"/>
                           </a:rPr>
@@ -28229,9 +23319,9 @@
                     <m:sSup>
                       <m:sSupPr>
                         <m:ctrlPr>
-                          <a:rPr lang="en-US" sz="2600" i="1">
-                            <a:latin typeface="Cambria Math" panose="02040503050406030204" pitchFamily="18" charset="0"/>
-                            <a:ea typeface="Cambria Math" panose="02040503050406030204" pitchFamily="18" charset="0"/>
+                          <a:rPr lang="en-US" sz="2600" b="0" i="0">
+                            <a:latin typeface="Source Sans Pro" panose="020B0503030403020204" pitchFamily="34" charset="0"/>
+                            <a:ea typeface="Source Sans Pro" panose="020B0503030403020204" pitchFamily="34" charset="0"/>
                           </a:rPr>
                         </m:ctrlPr>
                       </m:sSupPr>
@@ -28240,7 +23330,7 @@
                           <m:rPr>
                             <m:nor/>
                           </m:rPr>
-                          <a:rPr lang="en-US" sz="2600" b="1">
+                          <a:rPr lang="en-US" sz="2600" b="0" i="0">
                             <a:latin typeface="Source Sans Pro" panose="020B0503030403020204" pitchFamily="34" charset="0"/>
                             <a:ea typeface="Source Sans Pro" panose="020B0503030403020204" pitchFamily="34" charset="0"/>
                           </a:rPr>
@@ -28306,9 +23396,9 @@
                     <m:sSup>
                       <m:sSupPr>
                         <m:ctrlPr>
-                          <a:rPr lang="en-US" sz="2600" i="1">
-                            <a:latin typeface="Cambria Math" panose="02040503050406030204" pitchFamily="18" charset="0"/>
-                            <a:ea typeface="Cambria Math" panose="02040503050406030204" pitchFamily="18" charset="0"/>
+                          <a:rPr lang="en-US" sz="2600" b="0" i="0">
+                            <a:latin typeface="Source Sans Pro" panose="020B0503030403020204" pitchFamily="34" charset="0"/>
+                            <a:ea typeface="Source Sans Pro" panose="020B0503030403020204" pitchFamily="34" charset="0"/>
                           </a:rPr>
                         </m:ctrlPr>
                       </m:sSupPr>
@@ -28317,7 +23407,7 @@
                           <m:rPr>
                             <m:nor/>
                           </m:rPr>
-                          <a:rPr lang="en-US" sz="2600" b="1">
+                          <a:rPr lang="en-US" sz="2600" b="0" i="0">
                             <a:latin typeface="Source Sans Pro" panose="020B0503030403020204" pitchFamily="34" charset="0"/>
                             <a:ea typeface="Source Sans Pro" panose="020B0503030403020204" pitchFamily="34" charset="0"/>
                           </a:rPr>
@@ -28452,7 +23542,7 @@
           <a:p>
             <a:fld id="{E80A69F8-B03C-FD49-8214-05619B470154}" type="datetime1">
               <a:rPr lang="en-US" smtClean="0"/>
-              <a:t>3/28/26</a:t>
+              <a:t>8/13/26</a:t>
             </a:fld>
             <a:endParaRPr lang="en-US"/>
           </a:p>
@@ -28694,7 +23784,7 @@
           <a:p>
             <a:fld id="{0E8449B2-29C3-7944-BF16-25CF0383A1EC}" type="datetime1">
               <a:rPr lang="en-US" smtClean="0"/>
-              <a:t>3/28/26</a:t>
+              <a:t>8/13/26</a:t>
             </a:fld>
             <a:endParaRPr lang="en-US"/>
           </a:p>
@@ -28810,7 +23900,7 @@
           <a:p>
             <a:fld id="{8696A3FE-CB35-5C41-B610-C5B846689B61}" type="datetime1">
               <a:rPr lang="en-US" smtClean="0"/>
-              <a:t>3/28/26</a:t>
+              <a:t>8/13/26</a:t>
             </a:fld>
             <a:endParaRPr lang="en-US"/>
           </a:p>
@@ -29085,7 +24175,7 @@
           <a:p>
             <a:fld id="{86E5A0D8-3A7B-5B46-A939-1005EB0F8A6C}" type="datetime1">
               <a:rPr lang="en-US" smtClean="0"/>
-              <a:t>3/28/26</a:t>
+              <a:t>8/13/26</a:t>
             </a:fld>
             <a:endParaRPr lang="en-US"/>
           </a:p>
@@ -29250,7 +24340,7 @@
           <a:p>
             <a:fld id="{066851E0-CD2B-2D4D-B6F1-6F97BB78D4F7}" type="datetime1">
               <a:rPr lang="en-US" smtClean="0"/>
-              <a:t>3/28/26</a:t>
+              <a:t>8/13/26</a:t>
             </a:fld>
             <a:endParaRPr lang="en-US"/>
           </a:p>
@@ -29447,7 +24537,7 @@
           <a:p>
             <a:fld id="{6A185041-20FB-DC46-B4C9-87C6D04F8991}" type="datetime1">
               <a:rPr lang="en-US" smtClean="0"/>
-              <a:t>3/28/26</a:t>
+              <a:t>8/13/26</a:t>
             </a:fld>
             <a:endParaRPr lang="en-US"/>
           </a:p>
@@ -29660,7 +24750,7 @@
           <a:p>
             <a:fld id="{7A740B57-3004-8A4F-98CE-749B5A602E46}" type="datetime1">
               <a:rPr lang="en-US" smtClean="0"/>
-              <a:t>3/28/26</a:t>
+              <a:t>8/13/26</a:t>
             </a:fld>
             <a:endParaRPr lang="en-US"/>
           </a:p>
@@ -29776,7 +24866,7 @@
           <a:p>
             <a:fld id="{58D66743-6C65-4346-A746-99D0FDF421E8}" type="datetime1">
               <a:rPr lang="en-US" smtClean="0"/>
-              <a:t>3/28/26</a:t>
+              <a:t>8/13/26</a:t>
             </a:fld>
             <a:endParaRPr lang="en-US"/>
           </a:p>
